--- a/docs/agent-lab-guide.pptx
+++ b/docs/agent-lab-guide.pptx
@@ -18,6 +18,8 @@
     <p:sldId id="266" r:id="rId12"/>
     <p:sldId id="267" r:id="rId13"/>
     <p:sldId id="268" r:id="rId14"/>
+    <p:sldId id="271" r:id="rId22"/>
+    <p:sldId id="272" r:id="rId23"/>
     <p:sldId id="269" r:id="rId15"/>
     <p:sldId id="270" r:id="rId16"/>
   </p:sldIdLst>
@@ -815,10 +817,8 @@
           <a:lstStyle/>
           <a:p>
             <a:r>
-              <a:rPr lang="en-US" dirty="0"/>
-              <a:t>Planned. The mapping is what to look for when comparing, not existing code.</a:t>
-            </a:r>
-            <a:endParaRPr lang="en-US" dirty="0"/>
+              <a:t>Stage 3b findings. The native langchaingo Ollama client ignores tool definitions, so we use its OpenAI client against Ollama /v1, which cannot set num_ctx or keep_alive. Tools take a single string. The executor aborts on tool errors. Memory is flattened text.</a:t>
+            </a:r>
           </a:p>
         </p:txBody>
       </p:sp>
@@ -903,10 +903,8 @@
           <a:lstStyle/>
           <a:p>
             <a:r>
-              <a:rPr lang="en-US" dirty="0"/>
-              <a:t>Both are planned.</a:t>
-            </a:r>
-            <a:endParaRPr lang="en-US" dirty="0"/>
+              <a:t>The MCP server exposes get_joke and search_dad_jokes. Claude Code can connect to it. Stage 6 reuses the same tool code in-process.</a:t>
+            </a:r>
           </a:p>
         </p:txBody>
       </p:sp>
@@ -1122,6 +1120,146 @@
 </p:notes>
 </file>
 
+<file path=ppt/notesSlides/notesSlide16.xml><?xml version="1.0" encoding="utf-8"?>
+<p:notes xmlns:a="http://schemas.openxmlformats.org/drawingml/2006/main" xmlns:p="http://schemas.openxmlformats.org/presentationml/2006/main" xmlns:r="http://schemas.openxmlformats.org/officeDocument/2006/relationships">
+  <p:cSld>
+    <p:spTree>
+      <p:nvGrpSpPr>
+        <p:cNvPr id="1" name=""/>
+        <p:cNvGrpSpPr/>
+        <p:nvPr/>
+      </p:nvGrpSpPr>
+      <p:grpSpPr>
+        <a:xfrm>
+          <a:off x="0" y="0"/>
+          <a:ext cx="0" cy="0"/>
+          <a:chOff x="0" y="0"/>
+          <a:chExt cx="0" cy="0"/>
+        </a:xfrm>
+      </p:grpSpPr>
+      <p:sp>
+        <p:nvSpPr>
+          <p:cNvPr id="2" name="Slide Image Placeholder 1"/>
+          <p:cNvSpPr>
+            <a:spLocks noGrp="1"/>
+          </p:cNvSpPr>
+          <p:nvPr>
+            <p:ph type="sldImg" idx="2"/>
+          </p:nvPr>
+        </p:nvSpPr>
+        <p:spPr/>
+      </p:sp>
+      <p:sp>
+        <p:nvSpPr>
+          <p:cNvPr id="3" name="Notes Placeholder 2"/>
+          <p:cNvSpPr>
+            <a:spLocks noGrp="1"/>
+          </p:cNvSpPr>
+          <p:nvPr>
+            <p:ph type="body" idx="3" sz="quarter"/>
+          </p:nvPr>
+        </p:nvSpPr>
+        <p:spPr/>
+        <p:txBody>
+          <a:bodyPr/>
+          <a:lstStyle/>
+          <a:p>
+            <a:r>
+              <a:t>Scores are single runs on the local model on 2026-10-06. The stage 0 score is exact. The stage 6 failure was the known unasked-explanation weakness.</a:t>
+            </a:r>
+          </a:p>
+        </p:txBody>
+      </p:sp>
+      <p:sp>
+        <p:nvSpPr>
+          <p:cNvPr id="4" name="Slide Number Placeholder 3"/>
+          <p:cNvSpPr>
+            <a:spLocks noGrp="1"/>
+          </p:cNvSpPr>
+          <p:nvPr>
+            <p:ph type="sldNum" idx="5" sz="quarter"/>
+          </p:nvPr>
+        </p:nvSpPr>
+        <p:spPr/>
+      </p:sp>
+    </p:spTree>
+  </p:cSld>
+  <p:clrMapOvr>
+    <a:masterClrMapping/>
+  </p:clrMapOvr>
+</p:notes>
+</file>
+
+<file path=ppt/notesSlides/notesSlide17.xml><?xml version="1.0" encoding="utf-8"?>
+<p:notes xmlns:a="http://schemas.openxmlformats.org/drawingml/2006/main" xmlns:p="http://schemas.openxmlformats.org/presentationml/2006/main" xmlns:r="http://schemas.openxmlformats.org/officeDocument/2006/relationships">
+  <p:cSld>
+    <p:spTree>
+      <p:nvGrpSpPr>
+        <p:cNvPr id="1" name=""/>
+        <p:cNvGrpSpPr/>
+        <p:nvPr/>
+      </p:nvGrpSpPr>
+      <p:grpSpPr>
+        <a:xfrm>
+          <a:off x="0" y="0"/>
+          <a:ext cx="0" cy="0"/>
+          <a:chOff x="0" y="0"/>
+          <a:chExt cx="0" cy="0"/>
+        </a:xfrm>
+      </p:grpSpPr>
+      <p:sp>
+        <p:nvSpPr>
+          <p:cNvPr id="2" name="Slide Image Placeholder 1"/>
+          <p:cNvSpPr>
+            <a:spLocks noGrp="1"/>
+          </p:cNvSpPr>
+          <p:nvPr>
+            <p:ph type="sldImg" idx="2"/>
+          </p:nvPr>
+        </p:nvSpPr>
+        <p:spPr/>
+      </p:sp>
+      <p:sp>
+        <p:nvSpPr>
+          <p:cNvPr id="3" name="Notes Placeholder 2"/>
+          <p:cNvSpPr>
+            <a:spLocks noGrp="1"/>
+          </p:cNvSpPr>
+          <p:nvPr>
+            <p:ph type="body" idx="3" sz="quarter"/>
+          </p:nvPr>
+        </p:nvSpPr>
+        <p:spPr/>
+        <p:txBody>
+          <a:bodyPr/>
+          <a:lstStyle/>
+          <a:p>
+            <a:r>
+              <a:t>Adapters hide the wire differences: system prompt placement, argument encoding, tool result placement and call IDs. Run the same eval per provider to compare.</a:t>
+            </a:r>
+          </a:p>
+        </p:txBody>
+      </p:sp>
+      <p:sp>
+        <p:nvSpPr>
+          <p:cNvPr id="4" name="Slide Number Placeholder 3"/>
+          <p:cNvSpPr>
+            <a:spLocks noGrp="1"/>
+          </p:cNvSpPr>
+          <p:nvPr>
+            <p:ph type="sldNum" idx="5" sz="quarter"/>
+          </p:nvPr>
+        </p:nvSpPr>
+        <p:spPr/>
+      </p:sp>
+    </p:spTree>
+  </p:cSld>
+  <p:clrMapOvr>
+    <a:masterClrMapping/>
+  </p:clrMapOvr>
+</p:notes>
+</file>
+
 <file path=ppt/notesSlides/notesSlide2.xml><?xml version="1.0" encoding="utf-8"?>
 <p:notes xmlns:a="http://schemas.openxmlformats.org/drawingml/2006/main" xmlns:r="http://schemas.openxmlformats.org/officeDocument/2006/relationships" xmlns:p="http://schemas.openxmlformats.org/presentationml/2006/main">
   <p:cSld>
@@ -1167,10 +1305,8 @@
           <a:lstStyle/>
           <a:p>
             <a:r>
-              <a:rPr lang="en-US" dirty="0"/>
-              <a:t>Solid stages are built. Dashed ones are on the roadmap.</a:t>
-            </a:r>
-            <a:endParaRPr lang="en-US" dirty="0"/>
+              <a:t>All eight stages are built and tested offline. Stage 6 OpenAI and Claude adapters have not run against the live APIs.</a:t>
+            </a:r>
           </a:p>
         </p:txBody>
       </p:sp>
@@ -2459,7 +2595,7 @@
                   <a:srgbClr val="CADCFC"/>
                 </a:solidFill>
               </a:rPr>
-              <a:t>One idea at a time, from keyword matching to tool-calling agents, in a project that fetches jokes.</a:t>
+              <a:t>One idea at a time, from keyword matching to tool-calling agents, MCP, evals and provider switching, in a project that fetches jokes.</a:t>
             </a:r>
             <a:endParaRPr lang="en-US" sz="2000" dirty="0"/>
           </a:p>
@@ -2495,7 +2631,7 @@
                   <a:srgbClr val="4CC9C0"/>
                 </a:solidFill>
               </a:rPr>
-              <a:t>agent-lab  ·  Go  ·  Ollama  ·  stages 0 to 3 built, 3b to 5 planned</a:t>
+              <a:t>agent-lab  ·  Go  ·  Ollama  ·  all stages 0 to 6 built</a:t>
             </a:r>
             <a:endParaRPr lang="en-US" sz="1400" dirty="0"/>
           </a:p>
@@ -3939,7 +4075,7 @@
                   <a:srgbClr val="0B3B3C"/>
                 </a:solidFill>
               </a:rPr>
-              <a:t>Next: stage 3b in langchaingo</a:t>
+              <a:t>Stage 3b: the same agent in langchaingo</a:t>
             </a:r>
             <a:endParaRPr lang="en-US" sz="3000" dirty="0"/>
           </a:p>
@@ -3961,7 +4097,7 @@
         </p:nvGraphicFramePr>
         <p:xfrm>
           <a:off x="457200" y="1280160"/>
-          <a:ext cx="8229600" cy="914400"/>
+          <a:ext cx="8229600" cy="1981200"/>
         </p:xfrm>
         <a:graphic>
           <a:graphicData uri="http://schemas.openxmlformats.org/drawingml/2006/table">
@@ -3972,7 +4108,7 @@
                 <a:gridCol w="2377440"/>
                 <a:gridCol w="3291840"/>
               </a:tblGrid>
-              <a:tr h="457200">
+              <a:tr h="330200">
                 <a:tc>
                   <a:txBody>
                     <a:bodyPr/>
@@ -3982,7 +4118,7 @@
                         <a:buNone/>
                       </a:pPr>
                       <a:r>
-                        <a:rPr lang="en-US" sz="1200" b="1" dirty="0">
+                        <a:rPr lang="en-US" sz="1000" b="1" dirty="0">
                           <a:solidFill>
                             <a:srgbClr val="FFFFFF"/>
                           </a:solidFill>
@@ -4043,7 +4179,7 @@
                         <a:buNone/>
                       </a:pPr>
                       <a:r>
-                        <a:rPr lang="en-US" sz="1200" b="1" dirty="0">
+                        <a:rPr lang="en-US" sz="1000" b="1" dirty="0">
                           <a:solidFill>
                             <a:srgbClr val="FFFFFF"/>
                           </a:solidFill>
@@ -4104,12 +4240,12 @@
                         <a:buNone/>
                       </a:pPr>
                       <a:r>
-                        <a:rPr lang="en-US" sz="1200" b="1" dirty="0">
+                        <a:rPr lang="en-US" sz="1000" b="1" dirty="0">
                           <a:solidFill>
                             <a:srgbClr val="FFFFFF"/>
                           </a:solidFill>
                         </a:rPr>
-                        <a:t>What to look for</a:t>
+                        <a:t>What we found</a:t>
                       </a:r>
                       <a:endParaRPr lang="en-US" sz="1200" dirty="0"/>
                     </a:p>
@@ -4157,7 +4293,7 @@
                   </a:tcPr>
                 </a:tc>
               </a:tr>
-              <a:tr h="457200">
+              <a:tr h="330200">
                 <a:tc>
                   <a:txBody>
                     <a:bodyPr/>
@@ -4167,7 +4303,7 @@
                         <a:buNone/>
                       </a:pPr>
                       <a:r>
-                        <a:rPr lang="en-US" sz="1400" dirty="0">
+                        <a:rPr lang="en-US" sz="1100" dirty="0">
                           <a:solidFill>
                             <a:srgbClr val="14212B"/>
                           </a:solidFill>
@@ -4225,12 +4361,12 @@
                         <a:buNone/>
                       </a:pPr>
                       <a:r>
-                        <a:rPr lang="en-US" sz="1400" dirty="0">
+                        <a:rPr lang="en-US" sz="1100" dirty="0">
                           <a:solidFill>
                             <a:srgbClr val="14212B"/>
                           </a:solidFill>
                         </a:rPr>
-                        <a:t>LLM provider object</a:t>
+                        <a:t>openai client on /v1</a:t>
                       </a:r>
                       <a:endParaRPr lang="en-US" sz="1400" dirty="0"/>
                     </a:p>
@@ -4283,12 +4419,12 @@
                         <a:buNone/>
                       </a:pPr>
                       <a:r>
-                        <a:rPr lang="en-US" sz="1400" dirty="0">
+                        <a:rPr lang="en-US" sz="1100" dirty="0">
                           <a:solidFill>
                             <a:srgbClr val="14212B"/>
                           </a:solidFill>
                         </a:rPr>
-                        <a:t>Are num_ctx and keep_alive reachable?</a:t>
+                        <a:t>Native client drops tools; /v1 has no num_ctx</a:t>
                       </a:r>
                       <a:endParaRPr lang="en-US" sz="1400" dirty="0"/>
                     </a:p>
@@ -4333,7 +4469,7 @@
                   </a:tcPr>
                 </a:tc>
               </a:tr>
-              <a:tr h="457200">
+              <a:tr h="330200">
                 <a:tc>
                   <a:txBody>
                     <a:bodyPr/>
@@ -4343,7 +4479,7 @@
                         <a:buNone/>
                       </a:pPr>
                       <a:r>
-                        <a:rPr lang="en-US" sz="1400" dirty="0">
+                        <a:rPr lang="en-US" sz="1100" dirty="0">
                           <a:solidFill>
                             <a:srgbClr val="14212B"/>
                           </a:solidFill>
@@ -4401,12 +4537,12 @@
                         <a:buNone/>
                       </a:pPr>
                       <a:r>
-                        <a:rPr lang="en-US" sz="1400" dirty="0">
+                        <a:rPr lang="en-US" sz="1100" dirty="0">
                           <a:solidFill>
                             <a:srgbClr val="14212B"/>
                           </a:solidFill>
                         </a:rPr>
-                        <a:t>Tool interface</a:t>
+                        <a:t>tools.Tool, one string</a:t>
                       </a:r>
                       <a:endParaRPr lang="en-US" sz="1400" dirty="0"/>
                     </a:p>
@@ -4459,12 +4595,12 @@
                         <a:buNone/>
                       </a:pPr>
                       <a:r>
-                        <a:rPr lang="en-US" sz="1400" dirty="0">
+                        <a:rPr lang="en-US" sz="1100" dirty="0">
                           <a:solidFill>
                             <a:srgbClr val="14212B"/>
                           </a:solidFill>
                         </a:rPr>
-                        <a:t>Can jokeapi.Schema() be reused?</a:t>
+                        <a:t>Typed schema becomes prose; JSON inside a string</a:t>
                       </a:r>
                       <a:endParaRPr lang="en-US" sz="1400" dirty="0"/>
                     </a:p>
@@ -4509,7 +4645,7 @@
                   </a:tcPr>
                 </a:tc>
               </a:tr>
-              <a:tr h="457200">
+              <a:tr h="330200">
                 <a:tc>
                   <a:txBody>
                     <a:bodyPr/>
@@ -4519,7 +4655,7 @@
                         <a:buNone/>
                       </a:pPr>
                       <a:r>
-                        <a:rPr lang="en-US" sz="1400" dirty="0">
+                        <a:rPr lang="en-US" sz="1100" dirty="0">
                           <a:solidFill>
                             <a:srgbClr val="14212B"/>
                           </a:solidFill>
@@ -4577,12 +4713,12 @@
                         <a:buNone/>
                       </a:pPr>
                       <a:r>
-                        <a:rPr lang="en-US" sz="1400" dirty="0">
+                        <a:rPr lang="en-US" sz="1100" dirty="0">
                           <a:solidFill>
                             <a:srgbClr val="14212B"/>
                           </a:solidFill>
                         </a:rPr>
-                        <a:t>Agent executor</a:t>
+                        <a:t>agents.Executor</a:t>
                       </a:r>
                       <a:endParaRPr lang="en-US" sz="1400" dirty="0"/>
                     </a:p>
@@ -4635,12 +4771,12 @@
                         <a:buNone/>
                       </a:pPr>
                       <a:r>
-                        <a:rPr lang="en-US" sz="1400" dirty="0">
+                        <a:rPr lang="en-US" sz="1100" dirty="0">
                           <a:solidFill>
                             <a:srgbClr val="14212B"/>
                           </a:solidFill>
                         </a:rPr>
-                        <a:t>Where is the step cap?</a:t>
+                        <a:t>A tool Go error aborts the run; return text instead</a:t>
                       </a:r>
                       <a:endParaRPr lang="en-US" sz="1400" dirty="0"/>
                     </a:p>
@@ -4685,7 +4821,7 @@
                   </a:tcPr>
                 </a:tc>
               </a:tr>
-              <a:tr h="457200">
+              <a:tr h="330200">
                 <a:tc>
                   <a:txBody>
                     <a:bodyPr/>
@@ -4695,7 +4831,7 @@
                         <a:buNone/>
                       </a:pPr>
                       <a:r>
-                        <a:rPr lang="en-US" sz="1400" dirty="0">
+                        <a:rPr lang="en-US" sz="1100" dirty="0">
                           <a:solidFill>
                             <a:srgbClr val="14212B"/>
                           </a:solidFill>
@@ -4753,12 +4889,12 @@
                         <a:buNone/>
                       </a:pPr>
                       <a:r>
-                        <a:rPr lang="en-US" sz="1400" dirty="0">
+                        <a:rPr lang="en-US" sz="1100" dirty="0">
                           <a:solidFill>
                             <a:srgbClr val="14212B"/>
                           </a:solidFill>
                         </a:rPr>
-                        <a:t>Memory component</a:t>
+                        <a:t>Window buffer</a:t>
                       </a:r>
                       <a:endParaRPr lang="en-US" sz="1400" dirty="0"/>
                     </a:p>
@@ -4811,12 +4947,12 @@
                         <a:buNone/>
                       </a:pPr>
                       <a:r>
-                        <a:rPr lang="en-US" sz="1400" dirty="0">
+                        <a:rPr lang="en-US" sz="1100" dirty="0">
                           <a:solidFill>
                             <a:srgbClr val="14212B"/>
                           </a:solidFill>
                         </a:rPr>
-                        <a:t>Is trimming turn-aware?</a:t>
+                        <a:t>Text only, flattened into the system prompt</a:t>
                       </a:r>
                       <a:endParaRPr lang="en-US" sz="1400" dirty="0"/>
                     </a:p>
@@ -4861,7 +4997,7 @@
                   </a:tcPr>
                 </a:tc>
               </a:tr>
-              <a:tr h="457200">
+              <a:tr h="330200">
                 <a:tc>
                   <a:txBody>
                     <a:bodyPr/>
@@ -4871,7 +5007,7 @@
                         <a:buNone/>
                       </a:pPr>
                       <a:r>
-                        <a:rPr lang="en-US" sz="1400" dirty="0">
+                        <a:rPr lang="en-US" sz="1100" dirty="0">
                           <a:solidFill>
                             <a:srgbClr val="14212B"/>
                           </a:solidFill>
@@ -4929,7 +5065,7 @@
                         <a:buNone/>
                       </a:pPr>
                       <a:r>
-                        <a:rPr lang="en-US" sz="1400" dirty="0">
+                        <a:rPr lang="en-US" sz="1100" dirty="0">
                           <a:solidFill>
                             <a:srgbClr val="14212B"/>
                           </a:solidFill>
@@ -4987,12 +5123,12 @@
                         <a:buNone/>
                       </a:pPr>
                       <a:r>
-                        <a:rPr lang="en-US" sz="1400" dirty="0">
+                        <a:rPr lang="en-US" sz="1100" dirty="0">
                           <a:solidFill>
                             <a:srgbClr val="14212B"/>
                           </a:solidFill>
                         </a:rPr>
-                        <a:t>Can you see every prompt?</a:t>
+                        <a:t>Works; token counts hide in GenerationInfo</a:t>
                       </a:r>
                       <a:endParaRPr lang="en-US" sz="1400" dirty="0"/>
                     </a:p>
@@ -5071,7 +5207,7 @@
                   <a:srgbClr val="5A6B78"/>
                 </a:solidFill>
               </a:rPr>
-              <a:t>Planned, not built yet. The goal is to see what a framework hides.</a:t>
+              <a:t>Built. A framework removes code, not decisions: stage 3 and 3b are both about 275 lines.</a:t>
             </a:r>
             <a:endParaRPr lang="en-US" sz="1400" dirty="0"/>
           </a:p>
@@ -5179,36 +5315,12 @@
                   <a:srgbClr val="0B3B3C"/>
                 </a:solidFill>
               </a:rPr>
-              <a:t>Stage 4: MCP, stage 5: evals</a:t>
+              <a:t>Stage 4: tools behind an MCP server</a:t>
             </a:r>
             <a:endParaRPr lang="en-US" sz="3000" dirty="0"/>
           </a:p>
         </p:txBody>
       </p:sp>
-      <p:pic>
-        <p:nvPicPr>
-          <p:cNvPr id="4" name="MCP diagram" descr="MCP diagram">    </p:cNvPr>
-          <p:cNvPicPr>
-            <a:picLocks noChangeAspect="1"/>
-          </p:cNvPicPr>
-          <p:nvPr/>
-        </p:nvPicPr>
-        <p:blipFill>
-          <a:blip r:embed="rId1"/>
-          <a:stretch>
-            <a:fillRect/>
-          </a:stretch>
-        </p:blipFill>
-        <p:spPr>
-          <a:xfrm>
-            <a:off x="365760" y="1674796"/>
-            <a:ext cx="4572000" cy="1588168"/>
-          </a:xfrm>
-          <a:prstGeom prst="rect">
-            <a:avLst/>
-          </a:prstGeom>
-        </p:spPr>
-      </p:pic>
       <p:sp>
         <p:nvSpPr>
           <p:cNvPr id="5" name="bullets"/>
@@ -5238,12 +5350,12 @@
               <a:buChar char="•"/>
             </a:pPr>
             <a:r>
-              <a:rPr lang="en-US" sz="1500" dirty="0">
+              <a:rPr lang="en-US" sz="1300" dirty="0">
                 <a:solidFill>
                   <a:schemeClr val="tx1"/>
                 </a:solidFill>
               </a:rPr>
-              <a:t>Stage 4: the joke tools become an MCP server that Claude Code and the agent both use</a:t>
+              <a:t>Hand-written JSON-RPC over stdio, about 160 lines, no SDK</a:t>
             </a:r>
             <a:endParaRPr lang="en-US" sz="1500" dirty="0"/>
           </a:p>
@@ -5256,12 +5368,12 @@
               <a:buChar char="•"/>
             </a:pPr>
             <a:r>
-              <a:rPr lang="en-US" sz="1500" dirty="0">
+              <a:rPr lang="en-US" sz="1300" dirty="0">
                 <a:solidFill>
                   <a:schemeClr val="tx1"/>
                 </a:solidFill>
               </a:rPr>
-              <a:t>Stage 5: a table of prompts mapped to expected requests, scored per stage</a:t>
+              <a:t>initialize, tools/list, tools/call; notifications get no reply</a:t>
             </a:r>
             <a:endParaRPr lang="en-US" sz="1500" dirty="0"/>
           </a:p>
@@ -5274,12 +5386,48 @@
               <a:buChar char="•"/>
             </a:pPr>
             <a:r>
-              <a:rPr lang="en-US" sz="1500" dirty="0">
+              <a:rPr lang="en-US" sz="1300" dirty="0">
                 <a:solidFill>
                   <a:schemeClr val="tx1"/>
                 </a:solidFill>
               </a:rPr>
-              <a:t>Known weaknesses become eval cases</a:t>
+              <a:t>stdout is the protocol, so -trace logs to stderr</a:t>
+            </a:r>
+            <a:endParaRPr lang="en-US" sz="1500" dirty="0"/>
+          </a:p>
+          <a:p>
+            <a:pPr marL="342900" indent="-342900">
+              <a:spcAft>
+                <a:spcPts val="800"/>
+              </a:spcAft>
+              <a:buSzPct val="100000"/>
+              <a:buChar char="•"/>
+            </a:pPr>
+            <a:r>
+              <a:rPr lang="en-US" sz="1300" dirty="0">
+                <a:solidFill>
+                  <a:schemeClr val="tx1"/>
+                </a:solidFill>
+              </a:rPr>
+              <a:t>A failing tool returns isError, not a protocol error</a:t>
+            </a:r>
+            <a:endParaRPr lang="en-US" sz="1500" dirty="0"/>
+          </a:p>
+          <a:p>
+            <a:pPr marL="342900" indent="-342900">
+              <a:spcAft>
+                <a:spcPts val="800"/>
+              </a:spcAft>
+              <a:buSzPct val="100000"/>
+              <a:buChar char="•"/>
+            </a:pPr>
+            <a:r>
+              <a:rPr lang="en-US" sz="1300" dirty="0">
+                <a:solidFill>
+                  <a:schemeClr val="tx1"/>
+                </a:solidFill>
+              </a:rPr>
+              <a:t>claude mcp add jokes -- go run ./cmd/jokes-mcp</a:t>
             </a:r>
             <a:endParaRPr lang="en-US" sz="1500" dirty="0"/>
           </a:p>
@@ -5293,7 +5441,7 @@
         </p:nvSpPr>
         <p:spPr>
           <a:xfrm>
-            <a:off x="457200" y="4023360"/>
+            <a:off x="457200" y="4000000"/>
             <a:ext cx="4389120" cy="365760"/>
           </a:xfrm>
           <a:prstGeom prst="rect">
@@ -5315,7 +5463,7 @@
                   <a:srgbClr val="5A6B78"/>
                 </a:solidFill>
               </a:rPr>
-              <a:t>Planned shape: one tool implementation, many clients.</a:t>
+              <a:t>The client owns the model and the loop; the server only runs tools.</a:t>
             </a:r>
             <a:endParaRPr lang="en-US" sz="1200" dirty="0"/>
           </a:p>
@@ -5366,6 +5514,30 @@
           </a:p>
         </p:txBody>
       </p:sp>
+      <p:pic>
+        <p:nvPicPr>
+          <p:cNvPr id="26" name="Picture 25" descr="d4.png"/>
+          <p:cNvPicPr>
+            <a:picLocks noChangeAspect="1"/>
+          </p:cNvPicPr>
+          <p:nvPr/>
+        </p:nvPicPr>
+        <p:blipFill>
+          <a:blip r:embed="rId4"/>
+          <a:stretch>
+            <a:fillRect/>
+          </a:stretch>
+        </p:blipFill>
+        <p:spPr>
+          <a:xfrm>
+            <a:off x="365760" y="1280160"/>
+            <a:ext cx="4480000" cy="2691204"/>
+          </a:xfrm>
+          <a:prstGeom prst="rect">
+            <a:avLst/>
+          </a:prstGeom>
+        </p:spPr>
+      </p:pic>
     </p:spTree>
   </p:cSld>
   <p:clrMapOvr>
@@ -5375,6 +5547,528 @@
 </file>
 
 <file path=ppt/slides/slide14.xml><?xml version="1.0" encoding="utf-8"?>
+<p:sld xmlns:a="http://schemas.openxmlformats.org/drawingml/2006/main" xmlns:p="http://schemas.openxmlformats.org/presentationml/2006/main" xmlns:r="http://schemas.openxmlformats.org/officeDocument/2006/relationships">
+  <p:cSld>
+    <p:spTree>
+      <p:nvGrpSpPr>
+        <p:cNvPr id="1" name=""/>
+        <p:cNvGrpSpPr/>
+        <p:nvPr/>
+      </p:nvGrpSpPr>
+      <p:grpSpPr/>
+      <p:sp>
+        <p:nvSpPr>
+          <p:cNvPr id="2" name="Text 0"/>
+          <p:cNvSpPr/>
+          <p:nvPr>
+            <p:ph idx="100" type="title" hasCustomPrompt="1"/>
+          </p:nvPr>
+        </p:nvSpPr>
+        <p:spPr>
+          <a:xfrm>
+            <a:off x="457200" y="274320"/>
+            <a:ext cx="8229600" cy="731520"/>
+          </a:xfrm>
+          <a:prstGeom prst="rect">
+            <a:avLst/>
+          </a:prstGeom>
+          <a:noFill/>
+          <a:ln/>
+        </p:spPr>
+        <p:txBody>
+          <a:bodyPr wrap="square" lIns="0" tIns="0" rIns="0" bIns="0" rtlCol="0" anchor="ctr"/>
+          <a:lstStyle/>
+          <a:p>
+            <a:pPr algn="l" indent="0" marL="0">
+              <a:buNone/>
+            </a:pPr>
+            <a:r>
+              <a:rPr lang="en-US" sz="3000" b="1" dirty="0">
+                <a:solidFill>
+                  <a:srgbClr val="0B3B3C"/>
+                </a:solidFill>
+              </a:rPr>
+              <a:t>Stage 5: evals</a:t>
+            </a:r>
+            <a:endParaRPr lang="en-US" sz="3000" dirty="0"/>
+          </a:p>
+        </p:txBody>
+      </p:sp>
+      <p:sp>
+        <p:nvSpPr>
+          <p:cNvPr id="5" name="bullets"/>
+          <p:cNvSpPr txBox="1"/>
+          <p:nvPr/>
+        </p:nvSpPr>
+        <p:spPr>
+          <a:xfrm>
+            <a:off x="457200" y="1280160"/>
+            <a:ext cx="8229600" cy="3017520"/>
+          </a:xfrm>
+          <a:prstGeom prst="rect">
+            <a:avLst/>
+          </a:prstGeom>
+          <a:noFill/>
+          <a:ln/>
+        </p:spPr>
+        <p:txBody>
+          <a:bodyPr wrap="square" lIns="0" tIns="0" rIns="0" bIns="0" rtlCol="0" anchor="t"/>
+          <a:lstStyle/>
+          <a:p>
+            <a:pPr marL="342900" indent="-342900">
+              <a:spcAft>
+                <a:spcPts val="800"/>
+              </a:spcAft>
+              <a:buSzPct val="100000"/>
+              <a:buChar char="•"/>
+            </a:pPr>
+            <a:r>
+              <a:rPr lang="en-US" sz="1400" dirty="0">
+                <a:solidFill>
+                  <a:schemeClr val="tx1"/>
+                </a:solidFill>
+              </a:rPr>
+              <a:t>13 request cases and 6 conversation cases, with plain Go checks</a:t>
+            </a:r>
+            <a:endParaRPr lang="en-US" sz="1500" dirty="0"/>
+          </a:p>
+          <a:p>
+            <a:pPr marL="342900" indent="-342900">
+              <a:spcAft>
+                <a:spcPts val="800"/>
+              </a:spcAft>
+              <a:buSzPct val="100000"/>
+              <a:buChar char="•"/>
+            </a:pPr>
+            <a:r>
+              <a:rPr lang="en-US" sz="1400" dirty="0">
+                <a:solidFill>
+                  <a:schemeClr val="tx1"/>
+                </a:solidFill>
+              </a:rPr>
+              <a:t>Checks read typed requests and tool calls, not reply prose</a:t>
+            </a:r>
+            <a:endParaRPr lang="en-US" sz="1500" dirty="0"/>
+          </a:p>
+          <a:p>
+            <a:pPr marL="342900" indent="-342900">
+              <a:spcAft>
+                <a:spcPts val="800"/>
+              </a:spcAft>
+              <a:buSzPct val="100000"/>
+              <a:buChar char="•"/>
+            </a:pPr>
+            <a:r>
+              <a:rPr lang="en-US" sz="1400" dirty="0">
+                <a:solidFill>
+                  <a:schemeClr val="tx1"/>
+                </a:solidFill>
+              </a:rPr>
+              <a:t>Stage 0: 7 of 13.  Stage 1 (qwen3.5:9b-mlx): 8 of 13.  Stage 6 agent: 5 of 6</a:t>
+            </a:r>
+            <a:endParaRPr lang="en-US" sz="1500" dirty="0"/>
+          </a:p>
+          <a:p>
+            <a:pPr marL="342900" indent="-342900">
+              <a:spcAft>
+                <a:spcPts val="800"/>
+              </a:spcAft>
+              <a:buSzPct val="100000"/>
+              <a:buChar char="•"/>
+            </a:pPr>
+            <a:r>
+              <a:rPr lang="en-US" sz="1400" dirty="0">
+                <a:solidFill>
+                  <a:schemeClr val="tx1"/>
+                </a:solidFill>
+              </a:rPr>
+              <a:t>Known weaknesses are cases on purpose: clean, no-unasked-explanations</a:t>
+            </a:r>
+            <a:endParaRPr lang="en-US" sz="1500" dirty="0"/>
+          </a:p>
+          <a:p>
+            <a:pPr marL="342900" indent="-342900">
+              <a:spcAft>
+                <a:spcPts val="800"/>
+              </a:spcAft>
+              <a:buSzPct val="100000"/>
+              <a:buChar char="•"/>
+            </a:pPr>
+            <a:r>
+              <a:rPr lang="en-US" sz="1400" dirty="0">
+                <a:solidFill>
+                  <a:schemeClr val="tx1"/>
+                </a:solidFill>
+              </a:rPr>
+              <a:t>One run each; use -n 3 for pass rates</a:t>
+            </a:r>
+            <a:endParaRPr lang="en-US" sz="1500" dirty="0"/>
+          </a:p>
+        </p:txBody>
+      </p:sp>
+      <p:sp>
+        <p:nvSpPr>
+          <p:cNvPr id="6" name="caption"/>
+          <p:cNvSpPr txBox="1"/>
+          <p:nvPr/>
+        </p:nvSpPr>
+        <p:spPr>
+          <a:xfrm>
+            <a:off x="457200" y="4297680"/>
+            <a:ext cx="4389120" cy="365760"/>
+          </a:xfrm>
+          <a:prstGeom prst="rect">
+            <a:avLst/>
+          </a:prstGeom>
+          <a:noFill/>
+          <a:ln/>
+        </p:spPr>
+        <p:txBody>
+          <a:bodyPr wrap="square" lIns="0" tIns="0" rIns="0" bIns="0" rtlCol="0" anchor="ctr"/>
+          <a:lstStyle/>
+          <a:p>
+            <a:pPr indent="0" marL="0">
+              <a:buNone/>
+            </a:pPr>
+            <a:r>
+              <a:rPr lang="en-US" sz="1200" dirty="0">
+                <a:solidFill>
+                  <a:srgbClr val="5A6B78"/>
+                </a:solidFill>
+              </a:rPr>
+              <a:t>make eval  ·  go run ./cmd/jokes-eval -stage 1 -n 3</a:t>
+            </a:r>
+            <a:endParaRPr lang="en-US" sz="1200" dirty="0"/>
+          </a:p>
+        </p:txBody>
+      </p:sp>
+      <p:sp>
+        <p:nvSpPr>
+          <p:cNvPr id="25" name="Slide Number Placeholder 0"/>
+          <p:cNvSpPr>
+            <a:spLocks noGrp="1"/>
+          </p:cNvSpPr>
+          <p:nvPr>
+            <p:ph type="sldNum" sz="quarter" idx="4294967295"/>
+          </p:nvPr>
+        </p:nvSpPr>
+        <p:spPr>
+          <a:xfrm>
+            <a:off x="8412480" y="4754880"/>
+            <a:ext cx="457200" cy="274320"/>
+          </a:xfrm>
+          <a:prstGeom prst="rect">
+            <a:avLst/>
+          </a:prstGeom>
+          <a:extLst>
+            <a:ext uri="{C572A759-6A51-4108-AA02-DFA0A04FC94B}">
+              <ma14:wrappingTextBoxFlag xmlns:ma14="http://schemas.microsoft.com/office/mac/drawingml/2011/main" val="0"/>
+            </a:ext>
+          </a:extLst>
+        </p:spPr>
+        <p:txBody>
+          <a:bodyPr/>
+          <a:lstStyle>
+            <a:lvl1pPr>
+              <a:defRPr sz="1000">
+                <a:solidFill>
+                  <a:srgbClr val="7A8A96"/>
+                </a:solidFill>
+              </a:defRPr>
+            </a:lvl1pPr>
+          </a:lstStyle>
+          <a:p>
+            <a:pPr algn="l"/>
+            <a:fld id="{F7021451-1387-4CA6-816F-3879F97B5CBC}" type="slidenum">
+              <a:rPr b="0" lang="en-US"/>
+              <a:t>13</a:t>
+            </a:fld>
+            <a:endParaRPr lang="en-US"/>
+          </a:p>
+        </p:txBody>
+      </p:sp>
+    </p:spTree>
+  </p:cSld>
+  <p:clrMapOvr>
+    <a:masterClrMapping/>
+  </p:clrMapOvr>
+</p:sld>
+</file>
+
+<file path=ppt/slides/slide15.xml><?xml version="1.0" encoding="utf-8"?>
+<p:sld xmlns:a="http://schemas.openxmlformats.org/drawingml/2006/main" xmlns:p="http://schemas.openxmlformats.org/presentationml/2006/main" xmlns:r="http://schemas.openxmlformats.org/officeDocument/2006/relationships">
+  <p:cSld>
+    <p:spTree>
+      <p:nvGrpSpPr>
+        <p:cNvPr id="1" name=""/>
+        <p:cNvGrpSpPr/>
+        <p:nvPr/>
+      </p:nvGrpSpPr>
+      <p:grpSpPr/>
+      <p:sp>
+        <p:nvSpPr>
+          <p:cNvPr id="2" name="Text 0"/>
+          <p:cNvSpPr/>
+          <p:nvPr>
+            <p:ph idx="100" type="title" hasCustomPrompt="1"/>
+          </p:nvPr>
+        </p:nvSpPr>
+        <p:spPr>
+          <a:xfrm>
+            <a:off x="457200" y="274320"/>
+            <a:ext cx="8229600" cy="731520"/>
+          </a:xfrm>
+          <a:prstGeom prst="rect">
+            <a:avLst/>
+          </a:prstGeom>
+          <a:noFill/>
+          <a:ln/>
+        </p:spPr>
+        <p:txBody>
+          <a:bodyPr wrap="square" lIns="0" tIns="0" rIns="0" bIns="0" rtlCol="0" anchor="ctr"/>
+          <a:lstStyle/>
+          <a:p>
+            <a:pPr algn="l" indent="0" marL="0">
+              <a:buNone/>
+            </a:pPr>
+            <a:r>
+              <a:rPr lang="en-US" sz="3000" b="1" dirty="0">
+                <a:solidFill>
+                  <a:srgbClr val="0B3B3C"/>
+                </a:solidFill>
+              </a:rPr>
+              <a:t>Stage 6: one loop, any provider</a:t>
+            </a:r>
+            <a:endParaRPr lang="en-US" sz="3000" dirty="0"/>
+          </a:p>
+        </p:txBody>
+      </p:sp>
+      <p:sp>
+        <p:nvSpPr>
+          <p:cNvPr id="5" name="bullets"/>
+          <p:cNvSpPr txBox="1"/>
+          <p:nvPr/>
+        </p:nvSpPr>
+        <p:spPr>
+          <a:xfrm>
+            <a:off x="5120640" y="1280160"/>
+            <a:ext cx="3657600" cy="3017520"/>
+          </a:xfrm>
+          <a:prstGeom prst="rect">
+            <a:avLst/>
+          </a:prstGeom>
+          <a:noFill/>
+          <a:ln/>
+        </p:spPr>
+        <p:txBody>
+          <a:bodyPr wrap="square" lIns="0" tIns="0" rIns="0" bIns="0" rtlCol="0" anchor="t"/>
+          <a:lstStyle/>
+          <a:p>
+            <a:pPr marL="342900" indent="-342900">
+              <a:spcAft>
+                <a:spcPts val="800"/>
+              </a:spcAft>
+              <a:buSzPct val="100000"/>
+              <a:buChar char="•"/>
+            </a:pPr>
+            <a:r>
+              <a:rPr lang="en-US" sz="1200" dirty="0">
+                <a:solidFill>
+                  <a:schemeClr val="tx1"/>
+                </a:solidFill>
+              </a:rPr>
+              <a:t>provider.Provider: system, messages, tools in; one message out</a:t>
+            </a:r>
+            <a:endParaRPr lang="en-US" sz="1500" dirty="0"/>
+          </a:p>
+          <a:p>
+            <a:pPr marL="342900" indent="-342900">
+              <a:spcAft>
+                <a:spcPts val="800"/>
+              </a:spcAft>
+              <a:buSzPct val="100000"/>
+              <a:buChar char="•"/>
+            </a:pPr>
+            <a:r>
+              <a:rPr lang="en-US" sz="1200" dirty="0">
+                <a:solidFill>
+                  <a:schemeClr val="tx1"/>
+                </a:solidFill>
+              </a:rPr>
+              <a:t>Ollama, OpenAI and Claude adapters in plain HTTP</a:t>
+            </a:r>
+            <a:endParaRPr lang="en-US" sz="1500" dirty="0"/>
+          </a:p>
+          <a:p>
+            <a:pPr marL="342900" indent="-342900">
+              <a:spcAft>
+                <a:spcPts val="800"/>
+              </a:spcAft>
+              <a:buSzPct val="100000"/>
+              <a:buChar char="•"/>
+            </a:pPr>
+            <a:r>
+              <a:rPr lang="en-US" sz="1200" dirty="0">
+                <a:solidFill>
+                  <a:schemeClr val="tx1"/>
+                </a:solidFill>
+              </a:rPr>
+              <a:t>OpenAI args are a JSON string; Claude wants tool results in a user message</a:t>
+            </a:r>
+            <a:endParaRPr lang="en-US" sz="1500" dirty="0"/>
+          </a:p>
+          <a:p>
+            <a:pPr marL="342900" indent="-342900">
+              <a:spcAft>
+                <a:spcPts val="800"/>
+              </a:spcAft>
+              <a:buSzPct val="100000"/>
+              <a:buChar char="•"/>
+            </a:pPr>
+            <a:r>
+              <a:rPr lang="en-US" sz="1200" dirty="0">
+                <a:solidFill>
+                  <a:schemeClr val="tx1"/>
+                </a:solidFill>
+              </a:rPr>
+              <a:t>Tools are stage 4's; the repeat check moved into the loop</a:t>
+            </a:r>
+            <a:endParaRPr lang="en-US" sz="1500" dirty="0"/>
+          </a:p>
+          <a:p>
+            <a:pPr marL="342900" indent="-342900">
+              <a:spcAft>
+                <a:spcPts val="800"/>
+              </a:spcAft>
+              <a:buSzPct val="100000"/>
+              <a:buChar char="•"/>
+            </a:pPr>
+            <a:r>
+              <a:rPr lang="en-US" sz="1200" dirty="0">
+                <a:solidFill>
+                  <a:schemeClr val="tx1"/>
+                </a:solidFill>
+              </a:rPr>
+              <a:t>OpenAI and Claude tested on fakes only, not yet live</a:t>
+            </a:r>
+            <a:endParaRPr lang="en-US" sz="1500" dirty="0"/>
+          </a:p>
+        </p:txBody>
+      </p:sp>
+      <p:sp>
+        <p:nvSpPr>
+          <p:cNvPr id="6" name="caption"/>
+          <p:cNvSpPr txBox="1"/>
+          <p:nvPr/>
+        </p:nvSpPr>
+        <p:spPr>
+          <a:xfrm>
+            <a:off x="457200" y="3000000"/>
+            <a:ext cx="4389120" cy="365760"/>
+          </a:xfrm>
+          <a:prstGeom prst="rect">
+            <a:avLst/>
+          </a:prstGeom>
+          <a:noFill/>
+          <a:ln/>
+        </p:spPr>
+        <p:txBody>
+          <a:bodyPr wrap="square" lIns="0" tIns="0" rIns="0" bIns="0" rtlCol="0" anchor="ctr"/>
+          <a:lstStyle/>
+          <a:p>
+            <a:pPr indent="0" marL="0">
+              <a:buNone/>
+            </a:pPr>
+            <a:r>
+              <a:rPr lang="en-US" sz="1200" dirty="0">
+                <a:solidFill>
+                  <a:srgbClr val="5A6B78"/>
+                </a:solidFill>
+              </a:rPr>
+              <a:t>-stage 6 -provider ollama | openai | claude</a:t>
+            </a:r>
+            <a:endParaRPr lang="en-US" sz="1200" dirty="0"/>
+          </a:p>
+        </p:txBody>
+      </p:sp>
+      <p:sp>
+        <p:nvSpPr>
+          <p:cNvPr id="25" name="Slide Number Placeholder 0"/>
+          <p:cNvSpPr>
+            <a:spLocks noGrp="1"/>
+          </p:cNvSpPr>
+          <p:nvPr>
+            <p:ph type="sldNum" sz="quarter" idx="4294967295"/>
+          </p:nvPr>
+        </p:nvSpPr>
+        <p:spPr>
+          <a:xfrm>
+            <a:off x="8412480" y="4754880"/>
+            <a:ext cx="457200" cy="274320"/>
+          </a:xfrm>
+          <a:prstGeom prst="rect">
+            <a:avLst/>
+          </a:prstGeom>
+          <a:extLst>
+            <a:ext uri="{C572A759-6A51-4108-AA02-DFA0A04FC94B}">
+              <ma14:wrappingTextBoxFlag xmlns:ma14="http://schemas.microsoft.com/office/mac/drawingml/2011/main" val="0"/>
+            </a:ext>
+          </a:extLst>
+        </p:spPr>
+        <p:txBody>
+          <a:bodyPr/>
+          <a:lstStyle>
+            <a:lvl1pPr>
+              <a:defRPr sz="1000">
+                <a:solidFill>
+                  <a:srgbClr val="7A8A96"/>
+                </a:solidFill>
+              </a:defRPr>
+            </a:lvl1pPr>
+          </a:lstStyle>
+          <a:p>
+            <a:pPr algn="l"/>
+            <a:fld id="{F7021451-1387-4CA6-816F-3879F97B5CBC}" type="slidenum">
+              <a:rPr b="0" lang="en-US"/>
+              <a:t>13</a:t>
+            </a:fld>
+            <a:endParaRPr lang="en-US"/>
+          </a:p>
+        </p:txBody>
+      </p:sp>
+      <p:pic>
+        <p:nvPicPr>
+          <p:cNvPr id="26" name="Picture 25" descr="d6.png"/>
+          <p:cNvPicPr>
+            <a:picLocks noChangeAspect="1"/>
+          </p:cNvPicPr>
+          <p:nvPr/>
+        </p:nvPicPr>
+        <p:blipFill>
+          <a:blip r:embed="rId2"/>
+          <a:stretch>
+            <a:fillRect/>
+          </a:stretch>
+        </p:blipFill>
+        <p:spPr>
+          <a:xfrm>
+            <a:off x="365760" y="1500000"/>
+            <a:ext cx="4480000" cy="1502243"/>
+          </a:xfrm>
+          <a:prstGeom prst="rect">
+            <a:avLst/>
+          </a:prstGeom>
+        </p:spPr>
+      </p:pic>
+    </p:spTree>
+  </p:cSld>
+  <p:clrMapOvr>
+    <a:masterClrMapping/>
+  </p:clrMapOvr>
+</p:sld>
+</file>
+
+<file path=ppt/slides/slide16.xml><?xml version="1.0" encoding="utf-8"?>
 <p:sld xmlns:a="http://schemas.openxmlformats.org/drawingml/2006/main" xmlns:r="http://schemas.openxmlformats.org/officeDocument/2006/relationships" xmlns:p="http://schemas.openxmlformats.org/presentationml/2006/main">
   <p:cSld name="Slide 14">
     <p:spTree>
@@ -6930,7 +7624,7 @@
 </p:sld>
 </file>
 
-<file path=ppt/slides/slide15.xml><?xml version="1.0" encoding="utf-8"?>
+<file path=ppt/slides/slide17.xml><?xml version="1.0" encoding="utf-8"?>
 <p:sld xmlns:a="http://schemas.openxmlformats.org/drawingml/2006/main" xmlns:r="http://schemas.openxmlformats.org/officeDocument/2006/relationships" xmlns:p="http://schemas.openxmlformats.org/presentationml/2006/main">
   <p:cSld name="Slide 15">
     <p:spTree>
@@ -7481,7 +8175,7 @@
                 <a:ea typeface="Courier New" pitchFamily="34" charset="-122"/>
                 <a:cs typeface="Courier New" pitchFamily="34" charset="-120"/>
               </a:rPr>
-              <a:t>make test   ·   go run ./cmd/jokes -stage 3 -trace</a:t>
+              <a:t>make test   ·   make eval   ·   go run ./cmd/jokes -stage 3 -trace</a:t>
             </a:r>
             <a:endParaRPr lang="en-US" sz="1400" dirty="0"/>
           </a:p>
@@ -7589,7 +8283,7 @@
                   <a:srgbClr val="0B3B3C"/>
                 </a:solidFill>
               </a:rPr>
-              <a:t>Six steps, one dial: who is in charge?</a:t>
+              <a:t>Eight stages, one dial: who is in charge?</a:t>
             </a:r>
             <a:endParaRPr lang="en-US" sz="3000" dirty="0"/>
           </a:p>
@@ -7604,7 +8298,7 @@
         <p:spPr>
           <a:xfrm>
             <a:off x="457200" y="1280160"/>
-            <a:ext cx="1097280" cy="1371600"/>
+            <a:ext cx="948690" cy="1371600"/>
           </a:xfrm>
           <a:prstGeom prst="roundRect">
             <a:avLst>
@@ -7618,7 +8312,6 @@
             <a:solidFill>
               <a:srgbClr val="7A8A96"/>
             </a:solidFill>
-            <a:prstDash val="solid"/>
           </a:ln>
         </p:spPr>
       </p:sp>
@@ -7631,7 +8324,7 @@
         <p:spPr>
           <a:xfrm>
             <a:off x="457200" y="1280160"/>
-            <a:ext cx="1097280" cy="1371600"/>
+            <a:ext cx="948690" cy="1371600"/>
           </a:xfrm>
           <a:prstGeom prst="rect">
             <a:avLst/>
@@ -7664,7 +8357,7 @@
               <a:buNone/>
             </a:pPr>
             <a:r>
-              <a:rPr lang="en-US" sz="1200" b="1" dirty="0">
+              <a:rPr lang="en-US" sz="1000" b="1" dirty="0">
                 <a:solidFill>
                   <a:srgbClr val="FFFFFF"/>
                 </a:solidFill>
@@ -7678,7 +8371,7 @@
               <a:buNone/>
             </a:pPr>
             <a:r>
-              <a:rPr lang="en-US" sz="1100" dirty="0">
+              <a:rPr lang="en-US" sz="1000" dirty="0">
                 <a:solidFill>
                   <a:srgbClr val="FFFFFF"/>
                 </a:solidFill>
@@ -7697,8 +8390,8 @@
         </p:nvSpPr>
         <p:spPr>
           <a:xfrm>
-            <a:off x="1645920" y="1280160"/>
-            <a:ext cx="1097280" cy="1371600"/>
+            <a:off x="1497330" y="1280160"/>
+            <a:ext cx="948690" cy="1371600"/>
           </a:xfrm>
           <a:prstGeom prst="roundRect">
             <a:avLst>
@@ -7712,7 +8405,6 @@
             <a:solidFill>
               <a:srgbClr val="2F6FB5"/>
             </a:solidFill>
-            <a:prstDash val="solid"/>
           </a:ln>
         </p:spPr>
       </p:sp>
@@ -7724,8 +8416,8 @@
         </p:nvSpPr>
         <p:spPr>
           <a:xfrm>
-            <a:off x="1645920" y="1280160"/>
-            <a:ext cx="1097280" cy="1371600"/>
+            <a:off x="1497330" y="1280160"/>
+            <a:ext cx="948690" cy="1371600"/>
           </a:xfrm>
           <a:prstGeom prst="rect">
             <a:avLst/>
@@ -7758,7 +8450,7 @@
               <a:buNone/>
             </a:pPr>
             <a:r>
-              <a:rPr lang="en-US" sz="1200" b="1" dirty="0">
+              <a:rPr lang="en-US" sz="1000" b="1" dirty="0">
                 <a:solidFill>
                   <a:srgbClr val="FFFFFF"/>
                 </a:solidFill>
@@ -7772,7 +8464,7 @@
               <a:buNone/>
             </a:pPr>
             <a:r>
-              <a:rPr lang="en-US" sz="1100" dirty="0">
+              <a:rPr lang="en-US" sz="1000" dirty="0">
                 <a:solidFill>
                   <a:srgbClr val="FFFFFF"/>
                 </a:solidFill>
@@ -7791,8 +8483,8 @@
         </p:nvSpPr>
         <p:spPr>
           <a:xfrm>
-            <a:off x="2834640" y="1280160"/>
-            <a:ext cx="1097280" cy="1371600"/>
+            <a:off x="2537460" y="1280160"/>
+            <a:ext cx="948690" cy="1371600"/>
           </a:xfrm>
           <a:prstGeom prst="roundRect">
             <a:avLst>
@@ -7806,7 +8498,6 @@
             <a:solidFill>
               <a:srgbClr val="0B7A75"/>
             </a:solidFill>
-            <a:prstDash val="solid"/>
           </a:ln>
         </p:spPr>
       </p:sp>
@@ -7818,8 +8509,8 @@
         </p:nvSpPr>
         <p:spPr>
           <a:xfrm>
-            <a:off x="2834640" y="1280160"/>
-            <a:ext cx="1097280" cy="1371600"/>
+            <a:off x="2537460" y="1280160"/>
+            <a:ext cx="948690" cy="1371600"/>
           </a:xfrm>
           <a:prstGeom prst="rect">
             <a:avLst/>
@@ -7852,7 +8543,7 @@
               <a:buNone/>
             </a:pPr>
             <a:r>
-              <a:rPr lang="en-US" sz="1200" b="1" dirty="0">
+              <a:rPr lang="en-US" sz="1000" b="1" dirty="0">
                 <a:solidFill>
                   <a:srgbClr val="FFFFFF"/>
                 </a:solidFill>
@@ -7866,7 +8557,7 @@
               <a:buNone/>
             </a:pPr>
             <a:r>
-              <a:rPr lang="en-US" sz="1100" dirty="0">
+              <a:rPr lang="en-US" sz="1000" dirty="0">
                 <a:solidFill>
                   <a:srgbClr val="FFFFFF"/>
                 </a:solidFill>
@@ -7885,8 +8576,8 @@
         </p:nvSpPr>
         <p:spPr>
           <a:xfrm>
-            <a:off x="4023360" y="1280160"/>
-            <a:ext cx="1097280" cy="1371600"/>
+            <a:off x="3577590" y="1280160"/>
+            <a:ext cx="948690" cy="1371600"/>
           </a:xfrm>
           <a:prstGeom prst="roundRect">
             <a:avLst>
@@ -7900,7 +8591,6 @@
             <a:solidFill>
               <a:srgbClr val="8A4FB0"/>
             </a:solidFill>
-            <a:prstDash val="solid"/>
           </a:ln>
         </p:spPr>
       </p:sp>
@@ -7912,8 +8602,8 @@
         </p:nvSpPr>
         <p:spPr>
           <a:xfrm>
-            <a:off x="4023360" y="1280160"/>
-            <a:ext cx="1097280" cy="1371600"/>
+            <a:off x="3577590" y="1280160"/>
+            <a:ext cx="948690" cy="1371600"/>
           </a:xfrm>
           <a:prstGeom prst="rect">
             <a:avLst/>
@@ -7946,7 +8636,7 @@
               <a:buNone/>
             </a:pPr>
             <a:r>
-              <a:rPr lang="en-US" sz="1200" b="1" dirty="0">
+              <a:rPr lang="en-US" sz="1000" b="1" dirty="0">
                 <a:solidFill>
                   <a:srgbClr val="FFFFFF"/>
                 </a:solidFill>
@@ -7960,7 +8650,7 @@
               <a:buNone/>
             </a:pPr>
             <a:r>
-              <a:rPr lang="en-US" sz="1100" dirty="0">
+              <a:rPr lang="en-US" sz="1000" dirty="0">
                 <a:solidFill>
                   <a:srgbClr val="FFFFFF"/>
                 </a:solidFill>
@@ -7979,8 +8669,8 @@
         </p:nvSpPr>
         <p:spPr>
           <a:xfrm>
-            <a:off x="5212080" y="1280160"/>
-            <a:ext cx="1097280" cy="1371600"/>
+            <a:off x="4617720" y="1280160"/>
+            <a:ext cx="948690" cy="1371600"/>
           </a:xfrm>
           <a:prstGeom prst="roundRect">
             <a:avLst>
@@ -7988,26 +8678,118 @@
             </a:avLst>
           </a:prstGeom>
           <a:solidFill>
-            <a:srgbClr val="FFFFFF"/>
+            <a:srgbClr val="B58AD0"/>
+          </a:solidFill>
+          <a:ln w="19050">
+            <a:solidFill>
+              <a:srgbClr val="B58AD0"/>
+            </a:solidFill>
+          </a:ln>
+        </p:spPr>
+      </p:sp>
+      <p:sp>
+        <p:nvSpPr>
+          <p:cNvPr id="13" name="stage-text-3b"/>
+          <p:cNvSpPr txBox="1"/>
+          <p:nvPr/>
+        </p:nvSpPr>
+        <p:spPr>
+          <a:xfrm>
+            <a:off x="4617720" y="1280160"/>
+            <a:ext cx="948690" cy="1371600"/>
+          </a:xfrm>
+          <a:prstGeom prst="rect">
+            <a:avLst/>
+          </a:prstGeom>
+          <a:noFill/>
+          <a:ln/>
+        </p:spPr>
+        <p:txBody>
+          <a:bodyPr wrap="square" lIns="50800" tIns="50800" rIns="50800" bIns="50800" rtlCol="0" anchor="ctr"/>
+          <a:lstStyle/>
+          <a:p>
+            <a:pPr algn="ctr" indent="0" marL="0">
+              <a:buNone/>
+            </a:pPr>
+            <a:r>
+              <a:rPr lang="en-US" sz="2400" b="1" dirty="0">
+                <a:solidFill>
+                  <a:srgbClr val="FFFFFF"/>
+                </a:solidFill>
+                <a:latin typeface="Cambria" pitchFamily="34" charset="0"/>
+                <a:ea typeface="Cambria" pitchFamily="34" charset="-122"/>
+                <a:cs typeface="Cambria" pitchFamily="34" charset="-120"/>
+              </a:rPr>
+              <a:t>3b</a:t>
+            </a:r>
+            <a:endParaRPr lang="en-US" sz="2400" dirty="0"/>
+          </a:p>
+          <a:p>
+            <a:pPr algn="ctr" indent="0" marL="0">
+              <a:buNone/>
+            </a:pPr>
+            <a:r>
+              <a:rPr lang="en-US" sz="1000" b="1" dirty="0">
+                <a:solidFill>
+                  <a:srgbClr val="FFFFFF"/>
+                </a:solidFill>
+              </a:rPr>
+              <a:t>langchaingo</a:t>
+            </a:r>
+            <a:endParaRPr lang="en-US" sz="2400" dirty="0"/>
+          </a:p>
+          <a:p>
+            <a:pPr algn="ctr" indent="0" marL="0">
+              <a:buNone/>
+            </a:pPr>
+            <a:r>
+              <a:rPr lang="en-US" sz="1000" dirty="0">
+                <a:solidFill>
+                  <a:srgbClr val="FFFFFF"/>
+                </a:solidFill>
+              </a:rPr>
+              <a:t>same, framework</a:t>
+            </a:r>
+            <a:endParaRPr lang="en-US" sz="2400" dirty="0"/>
+          </a:p>
+        </p:txBody>
+      </p:sp>
+      <p:sp>
+        <p:nvSpPr>
+          <p:cNvPr id="14" name="stage-4"/>
+          <p:cNvSpPr/>
+          <p:nvPr/>
+        </p:nvSpPr>
+        <p:spPr>
+          <a:xfrm>
+            <a:off x="5657850" y="1280160"/>
+            <a:ext cx="948690" cy="1371600"/>
+          </a:xfrm>
+          <a:prstGeom prst="roundRect">
+            <a:avLst>
+              <a:gd name="adj" fmla="val 6667"/>
+            </a:avLst>
+          </a:prstGeom>
+          <a:solidFill>
+            <a:srgbClr val="B4561A"/>
           </a:solidFill>
           <a:ln w="19050">
             <a:solidFill>
               <a:srgbClr val="B4561A"/>
             </a:solidFill>
-            <a:prstDash val="dash"/>
           </a:ln>
         </p:spPr>
       </p:sp>
       <p:sp>
         <p:nvSpPr>
-          <p:cNvPr id="13" name="stage-text-3b"/>
+          <p:cNvPr id="15" name="stage-text-4"/>
           <p:cNvSpPr txBox="1"/>
           <p:nvPr/>
         </p:nvSpPr>
         <p:spPr>
           <a:xfrm>
-            <a:off x="5212080" y="1280160"/>
-            <a:ext cx="1097280" cy="1371600"/>
+            <a:off x="5657850" y="1280160"/>
+            <a:ext cx="948690" cy="1371600"/>
           </a:xfrm>
           <a:prstGeom prst="rect">
             <a:avLst/>
@@ -8025,13 +8807,13 @@
             <a:r>
               <a:rPr lang="en-US" sz="2400" b="1" dirty="0">
                 <a:solidFill>
-                  <a:srgbClr val="B4561A"/>
+                  <a:srgbClr val="FFFFFF"/>
                 </a:solidFill>
                 <a:latin typeface="Cambria" pitchFamily="34" charset="0"/>
                 <a:ea typeface="Cambria" pitchFamily="34" charset="-122"/>
                 <a:cs typeface="Cambria" pitchFamily="34" charset="-120"/>
               </a:rPr>
-              <a:t>3b</a:t>
+              <a:t>4</a:t>
             </a:r>
             <a:endParaRPr lang="en-US" sz="2400" dirty="0"/>
           </a:p>
@@ -8040,12 +8822,12 @@
               <a:buNone/>
             </a:pPr>
             <a:r>
-              <a:rPr lang="en-US" sz="1200" b="1" dirty="0">
-                <a:solidFill>
-                  <a:srgbClr val="B4561A"/>
-                </a:solidFill>
-              </a:rPr>
-              <a:t>langchaingo</a:t>
+              <a:rPr lang="en-US" sz="1000" b="1" dirty="0">
+                <a:solidFill>
+                  <a:srgbClr val="FFFFFF"/>
+                </a:solidFill>
+              </a:rPr>
+              <a:t>MCP server</a:t>
             </a:r>
             <a:endParaRPr lang="en-US" sz="2400" dirty="0"/>
           </a:p>
@@ -8054,12 +8836,12 @@
               <a:buNone/>
             </a:pPr>
             <a:r>
-              <a:rPr lang="en-US" sz="1100" dirty="0">
-                <a:solidFill>
-                  <a:srgbClr val="B4561A"/>
-                </a:solidFill>
-              </a:rPr>
-              <a:t>same, framework</a:t>
+              <a:rPr lang="en-US" sz="1000" dirty="0">
+                <a:solidFill>
+                  <a:srgbClr val="FFFFFF"/>
+                </a:solidFill>
+              </a:rPr>
+              <a:t>shared tools</a:t>
             </a:r>
             <a:endParaRPr lang="en-US" sz="2400" dirty="0"/>
           </a:p>
@@ -8067,14 +8849,14 @@
       </p:sp>
       <p:sp>
         <p:nvSpPr>
-          <p:cNvPr id="14" name="stage-4"/>
+          <p:cNvPr id="16" name="stage-5"/>
           <p:cNvSpPr/>
           <p:nvPr/>
         </p:nvSpPr>
         <p:spPr>
           <a:xfrm>
-            <a:off x="6400800" y="1280160"/>
-            <a:ext cx="1097280" cy="1371600"/>
+            <a:off x="6697980" y="1280160"/>
+            <a:ext cx="948690" cy="1371600"/>
           </a:xfrm>
           <a:prstGeom prst="roundRect">
             <a:avLst>
@@ -8082,26 +8864,25 @@
             </a:avLst>
           </a:prstGeom>
           <a:solidFill>
-            <a:srgbClr val="FFFFFF"/>
+            <a:srgbClr val="3F7D2A"/>
           </a:solidFill>
           <a:ln w="19050">
             <a:solidFill>
-              <a:srgbClr val="B4561A"/>
+              <a:srgbClr val="3F7D2A"/>
             </a:solidFill>
-            <a:prstDash val="dash"/>
           </a:ln>
         </p:spPr>
       </p:sp>
       <p:sp>
         <p:nvSpPr>
-          <p:cNvPr id="15" name="stage-text-4"/>
+          <p:cNvPr id="17" name="stage-text-5"/>
           <p:cNvSpPr txBox="1"/>
           <p:nvPr/>
         </p:nvSpPr>
         <p:spPr>
           <a:xfrm>
-            <a:off x="6400800" y="1280160"/>
-            <a:ext cx="1097280" cy="1371600"/>
+            <a:off x="6697980" y="1280160"/>
+            <a:ext cx="948690" cy="1371600"/>
           </a:xfrm>
           <a:prstGeom prst="rect">
             <a:avLst/>
@@ -8119,13 +8900,13 @@
             <a:r>
               <a:rPr lang="en-US" sz="2400" b="1" dirty="0">
                 <a:solidFill>
-                  <a:srgbClr val="B4561A"/>
+                  <a:srgbClr val="FFFFFF"/>
                 </a:solidFill>
                 <a:latin typeface="Cambria" pitchFamily="34" charset="0"/>
                 <a:ea typeface="Cambria" pitchFamily="34" charset="-122"/>
                 <a:cs typeface="Cambria" pitchFamily="34" charset="-120"/>
               </a:rPr>
-              <a:t>4</a:t>
+              <a:t>5</a:t>
             </a:r>
             <a:endParaRPr lang="en-US" sz="2400" dirty="0"/>
           </a:p>
@@ -8134,12 +8915,12 @@
               <a:buNone/>
             </a:pPr>
             <a:r>
-              <a:rPr lang="en-US" sz="1200" b="1" dirty="0">
-                <a:solidFill>
-                  <a:srgbClr val="B4561A"/>
-                </a:solidFill>
-              </a:rPr>
-              <a:t>MCP server</a:t>
+              <a:rPr lang="en-US" sz="1000" b="1" dirty="0">
+                <a:solidFill>
+                  <a:srgbClr val="FFFFFF"/>
+                </a:solidFill>
+              </a:rPr>
+              <a:t>Evals</a:t>
             </a:r>
             <a:endParaRPr lang="en-US" sz="2400" dirty="0"/>
           </a:p>
@@ -8148,12 +8929,12 @@
               <a:buNone/>
             </a:pPr>
             <a:r>
-              <a:rPr lang="en-US" sz="1100" dirty="0">
-                <a:solidFill>
-                  <a:srgbClr val="B4561A"/>
-                </a:solidFill>
-              </a:rPr>
-              <a:t>shared tools</a:t>
+              <a:rPr lang="en-US" sz="1000" dirty="0">
+                <a:solidFill>
+                  <a:srgbClr val="FFFFFF"/>
+                </a:solidFill>
+              </a:rPr>
+              <a:t>measure it</a:t>
             </a:r>
             <a:endParaRPr lang="en-US" sz="2400" dirty="0"/>
           </a:p>
@@ -8161,14 +8942,14 @@
       </p:sp>
       <p:sp>
         <p:nvSpPr>
-          <p:cNvPr id="16" name="stage-5"/>
+          <p:cNvPr id="90" name="stage-6"/>
           <p:cNvSpPr/>
           <p:nvPr/>
         </p:nvSpPr>
         <p:spPr>
           <a:xfrm>
-            <a:off x="7589520" y="1280160"/>
-            <a:ext cx="1097280" cy="1371600"/>
+            <a:off x="7738110" y="1280160"/>
+            <a:ext cx="948690" cy="1371600"/>
           </a:xfrm>
           <a:prstGeom prst="roundRect">
             <a:avLst>
@@ -8176,26 +8957,25 @@
             </a:avLst>
           </a:prstGeom>
           <a:solidFill>
-            <a:srgbClr val="FFFFFF"/>
+            <a:srgbClr val="B02F6B"/>
           </a:solidFill>
           <a:ln w="19050">
             <a:solidFill>
-              <a:srgbClr val="B4561A"/>
+              <a:srgbClr val="B02F6B"/>
             </a:solidFill>
-            <a:prstDash val="dash"/>
           </a:ln>
         </p:spPr>
       </p:sp>
       <p:sp>
         <p:nvSpPr>
-          <p:cNvPr id="17" name="stage-text-5"/>
+          <p:cNvPr id="91" name="stage-text-6"/>
           <p:cNvSpPr txBox="1"/>
           <p:nvPr/>
         </p:nvSpPr>
         <p:spPr>
           <a:xfrm>
-            <a:off x="7589520" y="1280160"/>
-            <a:ext cx="1097280" cy="1371600"/>
+            <a:off x="7738110" y="1280160"/>
+            <a:ext cx="948690" cy="1371600"/>
           </a:xfrm>
           <a:prstGeom prst="rect">
             <a:avLst/>
@@ -8213,13 +8993,13 @@
             <a:r>
               <a:rPr lang="en-US" sz="2400" b="1" dirty="0">
                 <a:solidFill>
-                  <a:srgbClr val="B4561A"/>
+                  <a:srgbClr val="FFFFFF"/>
                 </a:solidFill>
                 <a:latin typeface="Cambria" pitchFamily="34" charset="0"/>
                 <a:ea typeface="Cambria" pitchFamily="34" charset="-122"/>
                 <a:cs typeface="Cambria" pitchFamily="34" charset="-120"/>
               </a:rPr>
-              <a:t>5</a:t>
+              <a:t>6</a:t>
             </a:r>
             <a:endParaRPr lang="en-US" sz="2400" dirty="0"/>
           </a:p>
@@ -8228,12 +9008,12 @@
               <a:buNone/>
             </a:pPr>
             <a:r>
-              <a:rPr lang="en-US" sz="1200" b="1" dirty="0">
-                <a:solidFill>
-                  <a:srgbClr val="B4561A"/>
-                </a:solidFill>
-              </a:rPr>
-              <a:t>Evals</a:t>
+              <a:rPr lang="en-US" sz="1000" b="1" dirty="0">
+                <a:solidFill>
+                  <a:srgbClr val="FFFFFF"/>
+                </a:solidFill>
+              </a:rPr>
+              <a:t>Providers</a:t>
             </a:r>
             <a:endParaRPr lang="en-US" sz="2400" dirty="0"/>
           </a:p>
@@ -8242,12 +9022,12 @@
               <a:buNone/>
             </a:pPr>
             <a:r>
-              <a:rPr lang="en-US" sz="1100" dirty="0">
-                <a:solidFill>
-                  <a:srgbClr val="B4561A"/>
-                </a:solidFill>
-              </a:rPr>
-              <a:t>measure it</a:t>
+              <a:rPr lang="en-US" sz="1000" dirty="0">
+                <a:solidFill>
+                  <a:srgbClr val="FFFFFF"/>
+                </a:solidFill>
+              </a:rPr>
+              <a:t>any model</a:t>
             </a:r>
             <a:endParaRPr lang="en-US" sz="2400" dirty="0"/>
           </a:p>
@@ -8283,7 +9063,7 @@
                   <a:schemeClr val="tx1"/>
                 </a:solidFill>
               </a:rPr>
-              <a:t>Each stage hands a little more control from your code to the model.</a:t>
+              <a:t>Each stage hands a little more control from your code to the model, then measures the result.</a:t>
             </a:r>
             <a:endParaRPr lang="en-US" sz="1800" dirty="0"/>
           </a:p>

--- a/docs/agent-lab-guide.pptx
+++ b/docs/agent-lab-guide.pptx
@@ -18,13 +18,14 @@
     <p:sldId id="266" r:id="rId12"/>
     <p:sldId id="267" r:id="rId13"/>
     <p:sldId id="268" r:id="rId14"/>
-    <p:sldId id="271" r:id="rId22"/>
-    <p:sldId id="272" r:id="rId23"/>
     <p:sldId id="269" r:id="rId15"/>
     <p:sldId id="270" r:id="rId16"/>
+    <p:sldId id="271" r:id="rId17"/>
+    <p:sldId id="272" r:id="rId18"/>
+    <p:sldId id="273" r:id="rId19"/>
   </p:sldIdLst>
   <p:notesMasterIdLst>
-    <p:notesMasterId r:id="rId17"/>
+    <p:notesMasterId r:id="rId20"/>
   </p:notesMasterIdLst>
   <p:sldSz cx="9144000" cy="5143500"/>
   <p:notesSz cx="5143500" cy="9144000"/>
@@ -123,7 +124,7 @@
   <p:extLst>
     <p:ext uri="{521415D9-36F7-43E2-AB2F-B90AF26B5E84}">
       <p14:sectionLst xmlns:p14="http://schemas.microsoft.com/office/powerpoint/2010/main">
-        <p14:section name="Intro" id="{99a194ed-49d1-5798-b742-1b54875ef0cc}">
+        <p14:section name="Intro" id="{2ea3d4c8-040c-f307-5699-e8ca45fe050a}">
           <p14:sldIdLst>
             <p14:sldId id="256"/>
             <p14:sldId id="257"/>
@@ -131,7 +132,7 @@
             <p14:sldId id="259"/>
           </p14:sldIdLst>
         </p14:section>
-        <p14:section name="Stages" id="{fdff43a9-cafe-21fc-d9f6-6e4b62b4dc57}">
+        <p14:section name="Stages 0 to 3" id="{7cc68873-1bb3-4d61-ab82-7a2e9d7baf37}">
           <p14:sldIdLst>
             <p14:sldId id="260"/>
             <p14:sldId id="261"/>
@@ -142,12 +143,19 @@
             <p14:sldId id="266"/>
           </p14:sldIdLst>
         </p14:section>
-        <p14:section name="Next and beyond" id="{f8cb0247-28f1-1c01-8e6e-e3773ffa7158}">
+        <p14:section name="Stages 3b to 6" id="{f65ebac6-41d6-389c-2478-15b87b176f9b}">
           <p14:sldIdLst>
             <p14:sldId id="267"/>
             <p14:sldId id="268"/>
             <p14:sldId id="269"/>
             <p14:sldId id="270"/>
+            <p14:sldId id="271"/>
+          </p14:sldIdLst>
+        </p14:section>
+        <p14:section name="Beyond jokes" id="{ecc248ec-6389-fc0f-2003-d0c8fe3825eb}">
+          <p14:sldIdLst>
+            <p14:sldId id="272"/>
+            <p14:sldId id="273"/>
           </p14:sldIdLst>
         </p14:section>
       </p14:sectionLst>
@@ -554,7 +562,7 @@
           <a:p>
             <a:r>
               <a:rPr lang="en-US" dirty="0"/>
-              <a:t>agent-lab is a learning project. Each stage teaches one LLM or agent concept in a tiny domain.</a:t>
+              <a:t/>
             </a:r>
             <a:endParaRPr lang="en-US" dirty="0"/>
           </a:p>
@@ -817,8 +825,10 @@
           <a:lstStyle/>
           <a:p>
             <a:r>
-              <a:t>Stage 3b findings. The native langchaingo Ollama client ignores tool definitions, so we use its OpenAI client against Ollama /v1, which cannot set num_ctx or keep_alive. Tools take a single string. The executor aborts on tool errors. Memory is flattened text.</a:t>
+              <a:rPr lang="en-US" dirty="0"/>
+              <a:t>A framework removes code, not decisions. Stage 3 and 3b are both about 275 lines.</a:t>
             </a:r>
+            <a:endParaRPr lang="en-US" dirty="0"/>
           </a:p>
         </p:txBody>
       </p:sp>
@@ -903,8 +913,10 @@
           <a:lstStyle/>
           <a:p>
             <a:r>
-              <a:t>The MCP server exposes get_joke and search_dad_jokes. Claude Code can connect to it. Stage 6 reuses the same tool code in-process.</a:t>
+              <a:rPr lang="en-US" dirty="0"/>
+              <a:t>MCP separates what can be done from who decides.</a:t>
             </a:r>
+            <a:endParaRPr lang="en-US" dirty="0"/>
           </a:p>
         </p:txBody>
       </p:sp>
@@ -990,7 +1002,7 @@
           <a:p>
             <a:r>
               <a:rPr lang="en-US" dirty="0"/>
-              <a:t>Example domain is a support-ticket bot.</a:t>
+              <a:t>Single runs on one day. Use -n 3 for pass rates. Stage 0 is exact.</a:t>
             </a:r>
             <a:endParaRPr lang="en-US" dirty="0"/>
           </a:p>
@@ -1078,7 +1090,7 @@
           <a:p>
             <a:r>
               <a:rPr lang="en-US" dirty="0"/>
-              <a:t/>
+              <a:t>OpenAI and Claude adapters are tested on fakes only, not live.</a:t>
             </a:r>
             <a:endParaRPr lang="en-US" dirty="0"/>
           </a:p>
@@ -1121,7 +1133,7 @@
 </file>
 
 <file path=ppt/notesSlides/notesSlide16.xml><?xml version="1.0" encoding="utf-8"?>
-<p:notes xmlns:a="http://schemas.openxmlformats.org/drawingml/2006/main" xmlns:p="http://schemas.openxmlformats.org/presentationml/2006/main" xmlns:r="http://schemas.openxmlformats.org/officeDocument/2006/relationships">
+<p:notes xmlns:a="http://schemas.openxmlformats.org/drawingml/2006/main" xmlns:r="http://schemas.openxmlformats.org/officeDocument/2006/relationships" xmlns:p="http://schemas.openxmlformats.org/presentationml/2006/main">
   <p:cSld>
     <p:spTree>
       <p:nvGrpSpPr>
@@ -1141,10 +1153,10 @@
         <p:nvSpPr>
           <p:cNvPr id="2" name="Slide Image Placeholder 1"/>
           <p:cNvSpPr>
-            <a:spLocks noGrp="1"/>
+            <a:spLocks noGrp="1" noRot="1" noChangeAspect="1"/>
           </p:cNvSpPr>
           <p:nvPr>
-            <p:ph type="sldImg" idx="2"/>
+            <p:ph type="sldImg"/>
           </p:nvPr>
         </p:nvSpPr>
         <p:spPr/>
@@ -1156,7 +1168,7 @@
             <a:spLocks noGrp="1"/>
           </p:cNvSpPr>
           <p:nvPr>
-            <p:ph type="body" idx="3" sz="quarter"/>
+            <p:ph type="body" idx="1"/>
           </p:nvPr>
         </p:nvSpPr>
         <p:spPr/>
@@ -1165,8 +1177,10 @@
           <a:lstStyle/>
           <a:p>
             <a:r>
-              <a:t>Scores are single runs on the local model on 2026-10-06. The stage 0 score is exact. The stage 6 failure was the known unasked-explanation weakness.</a:t>
+              <a:rPr lang="en-US" dirty="0"/>
+              <a:t/>
             </a:r>
+            <a:endParaRPr lang="en-US" dirty="0"/>
           </a:p>
         </p:txBody>
       </p:sp>
@@ -1177,12 +1191,28 @@
             <a:spLocks noGrp="1"/>
           </p:cNvSpPr>
           <p:nvPr>
-            <p:ph type="sldNum" idx="5" sz="quarter"/>
+            <p:ph type="sldNum" sz="quarter" idx="10"/>
           </p:nvPr>
         </p:nvSpPr>
         <p:spPr/>
+        <p:txBody>
+          <a:bodyPr/>
+          <a:lstStyle/>
+          <a:p>
+            <a:fld id="{F7021451-1387-4CA6-816F-3879F97B5CBC}" type="slidenum">
+              <a:rPr lang="en-US"/>
+              <a:t>16</a:t>
+            </a:fld>
+            <a:endParaRPr lang="en-US"/>
+          </a:p>
+        </p:txBody>
       </p:sp>
     </p:spTree>
+    <p:extLst>
+      <p:ext uri="{BB962C8B-B14F-4D97-AF65-F5344CB8AC3E}">
+        <p14:creationId xmlns:p14="http://schemas.microsoft.com/office/powerpoint/2010/main" val="1024086991"/>
+      </p:ext>
+    </p:extLst>
   </p:cSld>
   <p:clrMapOvr>
     <a:masterClrMapping/>
@@ -1191,7 +1221,7 @@
 </file>
 
 <file path=ppt/notesSlides/notesSlide17.xml><?xml version="1.0" encoding="utf-8"?>
-<p:notes xmlns:a="http://schemas.openxmlformats.org/drawingml/2006/main" xmlns:p="http://schemas.openxmlformats.org/presentationml/2006/main" xmlns:r="http://schemas.openxmlformats.org/officeDocument/2006/relationships">
+<p:notes xmlns:a="http://schemas.openxmlformats.org/drawingml/2006/main" xmlns:r="http://schemas.openxmlformats.org/officeDocument/2006/relationships" xmlns:p="http://schemas.openxmlformats.org/presentationml/2006/main">
   <p:cSld>
     <p:spTree>
       <p:nvGrpSpPr>
@@ -1211,10 +1241,10 @@
         <p:nvSpPr>
           <p:cNvPr id="2" name="Slide Image Placeholder 1"/>
           <p:cNvSpPr>
-            <a:spLocks noGrp="1"/>
+            <a:spLocks noGrp="1" noRot="1" noChangeAspect="1"/>
           </p:cNvSpPr>
           <p:nvPr>
-            <p:ph type="sldImg" idx="2"/>
+            <p:ph type="sldImg"/>
           </p:nvPr>
         </p:nvSpPr>
         <p:spPr/>
@@ -1226,7 +1256,7 @@
             <a:spLocks noGrp="1"/>
           </p:cNvSpPr>
           <p:nvPr>
-            <p:ph type="body" idx="3" sz="quarter"/>
+            <p:ph type="body" idx="1"/>
           </p:nvPr>
         </p:nvSpPr>
         <p:spPr/>
@@ -1235,8 +1265,10 @@
           <a:lstStyle/>
           <a:p>
             <a:r>
-              <a:t>Adapters hide the wire differences: system prompt placement, argument encoding, tool result placement and call IDs. Run the same eval per provider to compare.</a:t>
+              <a:rPr lang="en-US" dirty="0"/>
+              <a:t>Example domain is a support-ticket bot.</a:t>
             </a:r>
+            <a:endParaRPr lang="en-US" dirty="0"/>
           </a:p>
         </p:txBody>
       </p:sp>
@@ -1247,12 +1279,116 @@
             <a:spLocks noGrp="1"/>
           </p:cNvSpPr>
           <p:nvPr>
-            <p:ph type="sldNum" idx="5" sz="quarter"/>
+            <p:ph type="sldNum" sz="quarter" idx="10"/>
           </p:nvPr>
         </p:nvSpPr>
         <p:spPr/>
+        <p:txBody>
+          <a:bodyPr/>
+          <a:lstStyle/>
+          <a:p>
+            <a:fld id="{F7021451-1387-4CA6-816F-3879F97B5CBC}" type="slidenum">
+              <a:rPr lang="en-US"/>
+              <a:t>17</a:t>
+            </a:fld>
+            <a:endParaRPr lang="en-US"/>
+          </a:p>
+        </p:txBody>
       </p:sp>
     </p:spTree>
+    <p:extLst>
+      <p:ext uri="{BB962C8B-B14F-4D97-AF65-F5344CB8AC3E}">
+        <p14:creationId xmlns:p14="http://schemas.microsoft.com/office/powerpoint/2010/main" val="1024086991"/>
+      </p:ext>
+    </p:extLst>
+  </p:cSld>
+  <p:clrMapOvr>
+    <a:masterClrMapping/>
+  </p:clrMapOvr>
+</p:notes>
+</file>
+
+<file path=ppt/notesSlides/notesSlide18.xml><?xml version="1.0" encoding="utf-8"?>
+<p:notes xmlns:a="http://schemas.openxmlformats.org/drawingml/2006/main" xmlns:r="http://schemas.openxmlformats.org/officeDocument/2006/relationships" xmlns:p="http://schemas.openxmlformats.org/presentationml/2006/main">
+  <p:cSld>
+    <p:spTree>
+      <p:nvGrpSpPr>
+        <p:cNvPr id="1" name=""/>
+        <p:cNvGrpSpPr/>
+        <p:nvPr/>
+      </p:nvGrpSpPr>
+      <p:grpSpPr>
+        <a:xfrm>
+          <a:off x="0" y="0"/>
+          <a:ext cx="0" cy="0"/>
+          <a:chOff x="0" y="0"/>
+          <a:chExt cx="0" cy="0"/>
+        </a:xfrm>
+      </p:grpSpPr>
+      <p:sp>
+        <p:nvSpPr>
+          <p:cNvPr id="2" name="Slide Image Placeholder 1"/>
+          <p:cNvSpPr>
+            <a:spLocks noGrp="1" noRot="1" noChangeAspect="1"/>
+          </p:cNvSpPr>
+          <p:nvPr>
+            <p:ph type="sldImg"/>
+          </p:nvPr>
+        </p:nvSpPr>
+        <p:spPr/>
+      </p:sp>
+      <p:sp>
+        <p:nvSpPr>
+          <p:cNvPr id="3" name="Notes Placeholder 2"/>
+          <p:cNvSpPr>
+            <a:spLocks noGrp="1"/>
+          </p:cNvSpPr>
+          <p:nvPr>
+            <p:ph type="body" idx="1"/>
+          </p:nvPr>
+        </p:nvSpPr>
+        <p:spPr/>
+        <p:txBody>
+          <a:bodyPr/>
+          <a:lstStyle/>
+          <a:p>
+            <a:r>
+              <a:rPr lang="en-US" dirty="0"/>
+              <a:t/>
+            </a:r>
+            <a:endParaRPr lang="en-US" dirty="0"/>
+          </a:p>
+        </p:txBody>
+      </p:sp>
+      <p:sp>
+        <p:nvSpPr>
+          <p:cNvPr id="4" name="Slide Number Placeholder 3"/>
+          <p:cNvSpPr>
+            <a:spLocks noGrp="1"/>
+          </p:cNvSpPr>
+          <p:nvPr>
+            <p:ph type="sldNum" sz="quarter" idx="10"/>
+          </p:nvPr>
+        </p:nvSpPr>
+        <p:spPr/>
+        <p:txBody>
+          <a:bodyPr/>
+          <a:lstStyle/>
+          <a:p>
+            <a:fld id="{F7021451-1387-4CA6-816F-3879F97B5CBC}" type="slidenum">
+              <a:rPr lang="en-US"/>
+              <a:t>18</a:t>
+            </a:fld>
+            <a:endParaRPr lang="en-US"/>
+          </a:p>
+        </p:txBody>
+      </p:sp>
+    </p:spTree>
+    <p:extLst>
+      <p:ext uri="{BB962C8B-B14F-4D97-AF65-F5344CB8AC3E}">
+        <p14:creationId xmlns:p14="http://schemas.microsoft.com/office/powerpoint/2010/main" val="1024086991"/>
+      </p:ext>
+    </p:extLst>
   </p:cSld>
   <p:clrMapOvr>
     <a:masterClrMapping/>
@@ -1305,8 +1441,10 @@
           <a:lstStyle/>
           <a:p>
             <a:r>
-              <a:t>All eight stages are built and tested offline. Stage 6 OpenAI and Claude adapters have not run against the live APIs.</a:t>
+              <a:rPr lang="en-US" dirty="0"/>
+              <a:t>Every stage is built and tested offline. Stage 6 OpenAI and Claude adapters have not run against live APIs.</a:t>
             </a:r>
+            <a:endParaRPr lang="en-US" dirty="0"/>
           </a:p>
         </p:txBody>
       </p:sp>
@@ -1568,7 +1706,7 @@
           <a:p>
             <a:r>
               <a:rPr lang="en-US" dirty="0"/>
-              <a:t>No LLM. strings.Contains for categories, type, and no-flag patterns.</a:t>
+              <a:t>strings.Contains for categories, type and no-flag patterns.</a:t>
             </a:r>
             <a:endParaRPr lang="en-US" dirty="0"/>
           </a:p>
@@ -2574,7 +2712,7 @@
         <p:spPr>
           <a:xfrm>
             <a:off x="548640" y="2240280"/>
-            <a:ext cx="7132320" cy="822960"/>
+            <a:ext cx="7132320" cy="1005840"/>
           </a:xfrm>
           <a:prstGeom prst="rect">
             <a:avLst/>
@@ -3965,8 +4103,8 @@
         </p:blipFill>
         <p:spPr>
           <a:xfrm>
-            <a:off x="5533010" y="1005840"/>
-            <a:ext cx="3015739" cy="3749040"/>
+            <a:off x="5507615" y="1005840"/>
+            <a:ext cx="3066531" cy="3749040"/>
           </a:xfrm>
           <a:prstGeom prst="rect">
             <a:avLst/>
@@ -4083,7 +4221,7 @@
       </p:sp>
       <p:graphicFrame>
         <p:nvGraphicFramePr>
-          <p:cNvPr id="13" name="framework-table"/>
+          <p:cNvPr id="13" name="Table 0"/>
           <p:cNvGraphicFramePr>
             <a:graphicFrameLocks noGrp="1"/>
           </p:cNvGraphicFramePr>
@@ -4096,19 +4234,19 @@
           </p:nvPr>
         </p:nvGraphicFramePr>
         <p:xfrm>
-          <a:off x="457200" y="1280160"/>
-          <a:ext cx="8229600" cy="1981200"/>
+          <a:off x="457200" y="1097280"/>
+          <a:ext cx="8229600" cy="914400"/>
         </p:xfrm>
         <a:graphic>
           <a:graphicData uri="http://schemas.openxmlformats.org/drawingml/2006/table">
             <a:tbl>
               <a:tblPr/>
               <a:tblGrid>
-                <a:gridCol w="2560320"/>
-                <a:gridCol w="2377440"/>
-                <a:gridCol w="3291840"/>
+                <a:gridCol w="1920240"/>
+                <a:gridCol w="1828800"/>
+                <a:gridCol w="4480560"/>
               </a:tblGrid>
-              <a:tr h="330200">
+              <a:tr h="384048">
                 <a:tc>
                   <a:txBody>
                     <a:bodyPr/>
@@ -4118,7 +4256,7 @@
                         <a:buNone/>
                       </a:pPr>
                       <a:r>
-                        <a:rPr lang="en-US" sz="1000" b="1" dirty="0">
+                        <a:rPr lang="en-US" sz="1200" b="1" dirty="0">
                           <a:solidFill>
                             <a:srgbClr val="FFFFFF"/>
                           </a:solidFill>
@@ -4179,12 +4317,12 @@
                         <a:buNone/>
                       </a:pPr>
                       <a:r>
-                        <a:rPr lang="en-US" sz="1000" b="1" dirty="0">
+                        <a:rPr lang="en-US" sz="1200" b="1" dirty="0">
                           <a:solidFill>
                             <a:srgbClr val="FFFFFF"/>
                           </a:solidFill>
                         </a:rPr>
-                        <a:t>Framework concept</a:t>
+                        <a:t>In langchaingo</a:t>
                       </a:r>
                       <a:endParaRPr lang="en-US" sz="1200" dirty="0"/>
                     </a:p>
@@ -4240,7 +4378,7 @@
                         <a:buNone/>
                       </a:pPr>
                       <a:r>
-                        <a:rPr lang="en-US" sz="1000" b="1" dirty="0">
+                        <a:rPr lang="en-US" sz="1200" b="1" dirty="0">
                           <a:solidFill>
                             <a:srgbClr val="FFFFFF"/>
                           </a:solidFill>
@@ -4293,7 +4431,7 @@
                   </a:tcPr>
                 </a:tc>
               </a:tr>
-              <a:tr h="330200">
+              <a:tr h="384048">
                 <a:tc>
                   <a:txBody>
                     <a:bodyPr/>
@@ -4303,14 +4441,14 @@
                         <a:buNone/>
                       </a:pPr>
                       <a:r>
-                        <a:rPr lang="en-US" sz="1100" dirty="0">
+                        <a:rPr lang="en-US" sz="1200" dirty="0">
                           <a:solidFill>
                             <a:srgbClr val="14212B"/>
                           </a:solidFill>
                         </a:rPr>
                         <a:t>Ollama HTTP structs</a:t>
                       </a:r>
-                      <a:endParaRPr lang="en-US" sz="1400" dirty="0"/>
+                      <a:endParaRPr lang="en-US" sz="1200" dirty="0"/>
                     </a:p>
                   </a:txBody>
                   <a:tcPr marL="91440" marR="91440" marT="45720" marB="45720" anchor="ctr">
@@ -4361,14 +4499,14 @@
                         <a:buNone/>
                       </a:pPr>
                       <a:r>
-                        <a:rPr lang="en-US" sz="1100" dirty="0">
+                        <a:rPr lang="en-US" sz="1200" dirty="0">
                           <a:solidFill>
                             <a:srgbClr val="14212B"/>
                           </a:solidFill>
                         </a:rPr>
                         <a:t>openai client on /v1</a:t>
                       </a:r>
-                      <a:endParaRPr lang="en-US" sz="1400" dirty="0"/>
+                      <a:endParaRPr lang="en-US" sz="1200" dirty="0"/>
                     </a:p>
                   </a:txBody>
                   <a:tcPr marL="91440" marR="91440" marT="45720" marB="45720" anchor="ctr">
@@ -4419,14 +4557,14 @@
                         <a:buNone/>
                       </a:pPr>
                       <a:r>
-                        <a:rPr lang="en-US" sz="1100" dirty="0">
+                        <a:rPr lang="en-US" sz="1200" dirty="0">
                           <a:solidFill>
                             <a:srgbClr val="14212B"/>
                           </a:solidFill>
                         </a:rPr>
-                        <a:t>Native client drops tools; /v1 has no num_ctx</a:t>
+                        <a:t>Native client drops tools; /v1 has no num_ctx or keep_alive</a:t>
                       </a:r>
-                      <a:endParaRPr lang="en-US" sz="1400" dirty="0"/>
+                      <a:endParaRPr lang="en-US" sz="1200" dirty="0"/>
                     </a:p>
                   </a:txBody>
                   <a:tcPr marL="91440" marR="91440" marT="45720" marB="45720" anchor="ctr">
@@ -4469,7 +4607,7 @@
                   </a:tcPr>
                 </a:tc>
               </a:tr>
-              <a:tr h="330200">
+              <a:tr h="384048">
                 <a:tc>
                   <a:txBody>
                     <a:bodyPr/>
@@ -4479,14 +4617,14 @@
                         <a:buNone/>
                       </a:pPr>
                       <a:r>
-                        <a:rPr lang="en-US" sz="1100" dirty="0">
+                        <a:rPr lang="en-US" sz="1200" dirty="0">
                           <a:solidFill>
                             <a:srgbClr val="14212B"/>
                           </a:solidFill>
                         </a:rPr>
-                        <a:t>Tool{Def, Run} registry</a:t>
+                        <a:t>Tool{Def, Run}</a:t>
                       </a:r>
-                      <a:endParaRPr lang="en-US" sz="1400" dirty="0"/>
+                      <a:endParaRPr lang="en-US" sz="1200" dirty="0"/>
                     </a:p>
                   </a:txBody>
                   <a:tcPr marL="91440" marR="91440" marT="45720" marB="45720" anchor="ctr">
@@ -4537,14 +4675,14 @@
                         <a:buNone/>
                       </a:pPr>
                       <a:r>
-                        <a:rPr lang="en-US" sz="1100" dirty="0">
+                        <a:rPr lang="en-US" sz="1200" dirty="0">
                           <a:solidFill>
                             <a:srgbClr val="14212B"/>
                           </a:solidFill>
                         </a:rPr>
                         <a:t>tools.Tool, one string</a:t>
                       </a:r>
-                      <a:endParaRPr lang="en-US" sz="1400" dirty="0"/>
+                      <a:endParaRPr lang="en-US" sz="1200" dirty="0"/>
                     </a:p>
                   </a:txBody>
                   <a:tcPr marL="91440" marR="91440" marT="45720" marB="45720" anchor="ctr">
@@ -4595,14 +4733,14 @@
                         <a:buNone/>
                       </a:pPr>
                       <a:r>
-                        <a:rPr lang="en-US" sz="1100" dirty="0">
+                        <a:rPr lang="en-US" sz="1200" dirty="0">
                           <a:solidFill>
                             <a:srgbClr val="14212B"/>
                           </a:solidFill>
                         </a:rPr>
-                        <a:t>Typed schema becomes prose; JSON inside a string</a:t>
+                        <a:t>Typed schema becomes prose; model writes JSON in a string</a:t>
                       </a:r>
-                      <a:endParaRPr lang="en-US" sz="1400" dirty="0"/>
+                      <a:endParaRPr lang="en-US" sz="1200" dirty="0"/>
                     </a:p>
                   </a:txBody>
                   <a:tcPr marL="91440" marR="91440" marT="45720" marB="45720" anchor="ctr">
@@ -4645,7 +4783,7 @@
                   </a:tcPr>
                 </a:tc>
               </a:tr>
-              <a:tr h="330200">
+              <a:tr h="384048">
                 <a:tc>
                   <a:txBody>
                     <a:bodyPr/>
@@ -4655,14 +4793,14 @@
                         <a:buNone/>
                       </a:pPr>
                       <a:r>
-                        <a:rPr lang="en-US" sz="1100" dirty="0">
+                        <a:rPr lang="en-US" sz="1200" dirty="0">
                           <a:solidFill>
                             <a:srgbClr val="14212B"/>
                           </a:solidFill>
                         </a:rPr>
                         <a:t>for step loop</a:t>
                       </a:r>
-                      <a:endParaRPr lang="en-US" sz="1400" dirty="0"/>
+                      <a:endParaRPr lang="en-US" sz="1200" dirty="0"/>
                     </a:p>
                   </a:txBody>
                   <a:tcPr marL="91440" marR="91440" marT="45720" marB="45720" anchor="ctr">
@@ -4713,14 +4851,14 @@
                         <a:buNone/>
                       </a:pPr>
                       <a:r>
-                        <a:rPr lang="en-US" sz="1100" dirty="0">
+                        <a:rPr lang="en-US" sz="1200" dirty="0">
                           <a:solidFill>
                             <a:srgbClr val="14212B"/>
                           </a:solidFill>
                         </a:rPr>
                         <a:t>agents.Executor</a:t>
                       </a:r>
-                      <a:endParaRPr lang="en-US" sz="1400" dirty="0"/>
+                      <a:endParaRPr lang="en-US" sz="1200" dirty="0"/>
                     </a:p>
                   </a:txBody>
                   <a:tcPr marL="91440" marR="91440" marT="45720" marB="45720" anchor="ctr">
@@ -4771,14 +4909,14 @@
                         <a:buNone/>
                       </a:pPr>
                       <a:r>
-                        <a:rPr lang="en-US" sz="1100" dirty="0">
+                        <a:rPr lang="en-US" sz="1200" dirty="0">
                           <a:solidFill>
                             <a:srgbClr val="14212B"/>
                           </a:solidFill>
                         </a:rPr>
-                        <a:t>A tool Go error aborts the run; return text instead</a:t>
+                        <a:t>A Go error from a tool aborts the run; ours return text</a:t>
                       </a:r>
-                      <a:endParaRPr lang="en-US" sz="1400" dirty="0"/>
+                      <a:endParaRPr lang="en-US" sz="1200" dirty="0"/>
                     </a:p>
                   </a:txBody>
                   <a:tcPr marL="91440" marR="91440" marT="45720" marB="45720" anchor="ctr">
@@ -4821,7 +4959,7 @@
                   </a:tcPr>
                 </a:tc>
               </a:tr>
-              <a:tr h="330200">
+              <a:tr h="384048">
                 <a:tc>
                   <a:txBody>
                     <a:bodyPr/>
@@ -4831,14 +4969,14 @@
                         <a:buNone/>
                       </a:pPr>
                       <a:r>
-                        <a:rPr lang="en-US" sz="1100" dirty="0">
+                        <a:rPr lang="en-US" sz="1200" dirty="0">
                           <a:solidFill>
                             <a:srgbClr val="14212B"/>
                           </a:solidFill>
                         </a:rPr>
                         <a:t>history + trim()</a:t>
                       </a:r>
-                      <a:endParaRPr lang="en-US" sz="1400" dirty="0"/>
+                      <a:endParaRPr lang="en-US" sz="1200" dirty="0"/>
                     </a:p>
                   </a:txBody>
                   <a:tcPr marL="91440" marR="91440" marT="45720" marB="45720" anchor="ctr">
@@ -4889,14 +5027,14 @@
                         <a:buNone/>
                       </a:pPr>
                       <a:r>
-                        <a:rPr lang="en-US" sz="1100" dirty="0">
+                        <a:rPr lang="en-US" sz="1200" dirty="0">
                           <a:solidFill>
                             <a:srgbClr val="14212B"/>
                           </a:solidFill>
                         </a:rPr>
                         <a:t>Window buffer</a:t>
                       </a:r>
-                      <a:endParaRPr lang="en-US" sz="1400" dirty="0"/>
+                      <a:endParaRPr lang="en-US" sz="1200" dirty="0"/>
                     </a:p>
                   </a:txBody>
                   <a:tcPr marL="91440" marR="91440" marT="45720" marB="45720" anchor="ctr">
@@ -4947,14 +5085,14 @@
                         <a:buNone/>
                       </a:pPr>
                       <a:r>
-                        <a:rPr lang="en-US" sz="1100" dirty="0">
+                        <a:rPr lang="en-US" sz="1200" dirty="0">
                           <a:solidFill>
                             <a:srgbClr val="14212B"/>
                           </a:solidFill>
                         </a:rPr>
-                        <a:t>Text only, flattened into the system prompt</a:t>
+                        <a:t>Text only, flattened into the system prompt, no token budget</a:t>
                       </a:r>
-                      <a:endParaRPr lang="en-US" sz="1400" dirty="0"/>
+                      <a:endParaRPr lang="en-US" sz="1200" dirty="0"/>
                     </a:p>
                   </a:txBody>
                   <a:tcPr marL="91440" marR="91440" marT="45720" marB="45720" anchor="ctr">
@@ -4997,7 +5135,7 @@
                   </a:tcPr>
                 </a:tc>
               </a:tr>
-              <a:tr h="330200">
+              <a:tr h="384048">
                 <a:tc>
                   <a:txBody>
                     <a:bodyPr/>
@@ -5007,14 +5145,14 @@
                         <a:buNone/>
                       </a:pPr>
                       <a:r>
-                        <a:rPr lang="en-US" sz="1100" dirty="0">
+                        <a:rPr lang="en-US" sz="1200" dirty="0">
                           <a:solidFill>
                             <a:srgbClr val="14212B"/>
                           </a:solidFill>
                         </a:rPr>
                         <a:t>-trace</a:t>
                       </a:r>
-                      <a:endParaRPr lang="en-US" sz="1400" dirty="0"/>
+                      <a:endParaRPr lang="en-US" sz="1200" dirty="0"/>
                     </a:p>
                   </a:txBody>
                   <a:tcPr marL="91440" marR="91440" marT="45720" marB="45720" anchor="ctr">
@@ -5065,14 +5203,14 @@
                         <a:buNone/>
                       </a:pPr>
                       <a:r>
-                        <a:rPr lang="en-US" sz="1100" dirty="0">
+                        <a:rPr lang="en-US" sz="1200" dirty="0">
                           <a:solidFill>
                             <a:srgbClr val="14212B"/>
                           </a:solidFill>
                         </a:rPr>
                         <a:t>Callbacks</a:t>
                       </a:r>
-                      <a:endParaRPr lang="en-US" sz="1400" dirty="0"/>
+                      <a:endParaRPr lang="en-US" sz="1200" dirty="0"/>
                     </a:p>
                   </a:txBody>
                   <a:tcPr marL="91440" marR="91440" marT="45720" marB="45720" anchor="ctr">
@@ -5123,14 +5261,14 @@
                         <a:buNone/>
                       </a:pPr>
                       <a:r>
-                        <a:rPr lang="en-US" sz="1100" dirty="0">
+                        <a:rPr lang="en-US" sz="1200" dirty="0">
                           <a:solidFill>
                             <a:srgbClr val="14212B"/>
                           </a:solidFill>
                         </a:rPr>
                         <a:t>Works; token counts hide in GenerationInfo</a:t>
                       </a:r>
-                      <a:endParaRPr lang="en-US" sz="1400" dirty="0"/>
+                      <a:endParaRPr lang="en-US" sz="1200" dirty="0"/>
                     </a:p>
                   </a:txBody>
                   <a:tcPr marL="91440" marR="91440" marT="45720" marB="45720" anchor="ctr">
@@ -5179,14 +5317,41 @@
       </p:graphicFrame>
       <p:sp>
         <p:nvSpPr>
-          <p:cNvPr id="5" name="note"/>
+          <p:cNvPr id="5" name="callout-bg"/>
+          <p:cNvSpPr/>
+          <p:nvPr/>
+        </p:nvSpPr>
+        <p:spPr>
+          <a:xfrm>
+            <a:off x="457200" y="4206240"/>
+            <a:ext cx="7863840" cy="566928"/>
+          </a:xfrm>
+          <a:prstGeom prst="roundRect">
+            <a:avLst>
+              <a:gd name="adj" fmla="val 12903"/>
+            </a:avLst>
+          </a:prstGeom>
+          <a:solidFill>
+            <a:srgbClr val="EEF3F4"/>
+          </a:solidFill>
+          <a:ln w="12700">
+            <a:solidFill>
+              <a:srgbClr val="EEF3F4"/>
+            </a:solidFill>
+            <a:prstDash val="solid"/>
+          </a:ln>
+        </p:spPr>
+      </p:sp>
+      <p:sp>
+        <p:nvSpPr>
+          <p:cNvPr id="6" name="callout"/>
           <p:cNvSpPr txBox="1"/>
           <p:nvPr/>
         </p:nvSpPr>
         <p:spPr>
           <a:xfrm>
-            <a:off x="457200" y="4297680"/>
-            <a:ext cx="8229600" cy="365760"/>
+            <a:off x="594360" y="4279392"/>
+            <a:ext cx="7589520" cy="420624"/>
           </a:xfrm>
           <a:prstGeom prst="rect">
             <a:avLst/>
@@ -5195,21 +5360,35 @@
           <a:ln/>
         </p:spPr>
         <p:txBody>
-          <a:bodyPr wrap="square" lIns="0" tIns="0" rIns="0" bIns="0" rtlCol="0" anchor="ctr"/>
+          <a:bodyPr wrap="square" lIns="0" tIns="0" rIns="0" bIns="0" rtlCol="0" anchor="t"/>
           <a:lstStyle/>
           <a:p>
             <a:pPr indent="0" marL="0">
               <a:buNone/>
             </a:pPr>
             <a:r>
-              <a:rPr lang="en-US" sz="1400" i="1" dirty="0">
+              <a:rPr lang="en-US" sz="1200" b="1" dirty="0">
                 <a:solidFill>
-                  <a:srgbClr val="5A6B78"/>
+                  <a:srgbClr val="8A4FB0"/>
                 </a:solidFill>
               </a:rPr>
-              <a:t>Built. A framework removes code, not decisions: stage 3 and 3b are both about 275 lines.</a:t>
+              <a:t>LESSON</a:t>
             </a:r>
-            <a:endParaRPr lang="en-US" sz="1400" dirty="0"/>
+            <a:endParaRPr lang="en-US" sz="1200" dirty="0"/>
+          </a:p>
+          <a:p>
+            <a:pPr indent="0" marL="0">
+              <a:buNone/>
+            </a:pPr>
+            <a:r>
+              <a:rPr lang="en-US" sz="1400" dirty="0">
+                <a:solidFill>
+                  <a:srgbClr val="14212B"/>
+                </a:solidFill>
+              </a:rPr>
+              <a:t>String-only tool input, flattened history and aborting on tool errors are decisions you inherit.</a:t>
+            </a:r>
+            <a:endParaRPr lang="en-US" sz="1200" dirty="0"/>
           </a:p>
         </p:txBody>
       </p:sp>
@@ -5315,12 +5494,36 @@
                   <a:srgbClr val="0B3B3C"/>
                 </a:solidFill>
               </a:rPr>
-              <a:t>Stage 4: tools behind an MCP server</a:t>
+              <a:t>Stage 4: the tools leave the agent</a:t>
             </a:r>
             <a:endParaRPr lang="en-US" sz="3000" dirty="0"/>
           </a:p>
         </p:txBody>
       </p:sp>
+      <p:pic>
+        <p:nvPicPr>
+          <p:cNvPr id="4" name="MCP sequence" descr="MCP sequence">    </p:cNvPr>
+          <p:cNvPicPr>
+            <a:picLocks noChangeAspect="1"/>
+          </p:cNvPicPr>
+          <p:nvPr/>
+        </p:nvPicPr>
+        <p:blipFill>
+          <a:blip r:embed="rId1"/>
+          <a:stretch>
+            <a:fillRect/>
+          </a:stretch>
+        </p:blipFill>
+        <p:spPr>
+          <a:xfrm>
+            <a:off x="365760" y="1217969"/>
+            <a:ext cx="4937760" cy="2867581"/>
+          </a:xfrm>
+          <a:prstGeom prst="rect">
+            <a:avLst/>
+          </a:prstGeom>
+        </p:spPr>
+      </p:pic>
       <p:sp>
         <p:nvSpPr>
           <p:cNvPr id="5" name="bullets"/>
@@ -5329,8 +5532,8 @@
         </p:nvSpPr>
         <p:spPr>
           <a:xfrm>
-            <a:off x="5120640" y="1280160"/>
-            <a:ext cx="3657600" cy="3017520"/>
+            <a:off x="5486400" y="1188720"/>
+            <a:ext cx="3291840" cy="3291840"/>
           </a:xfrm>
           <a:prstGeom prst="rect">
             <a:avLst/>
@@ -5350,14 +5553,14 @@
               <a:buChar char="•"/>
             </a:pPr>
             <a:r>
-              <a:rPr lang="en-US" sz="1300" dirty="0">
+              <a:rPr lang="en-US" sz="1400" dirty="0">
                 <a:solidFill>
                   <a:schemeClr val="tx1"/>
                 </a:solidFill>
               </a:rPr>
-              <a:t>Hand-written JSON-RPC over stdio, about 160 lines, no SDK</a:t>
+              <a:t>About 160 lines of hand-written JSON-RPC over stdio, no SDK</a:t>
             </a:r>
-            <a:endParaRPr lang="en-US" sz="1500" dirty="0"/>
+            <a:endParaRPr lang="en-US" sz="1400" dirty="0"/>
           </a:p>
           <a:p>
             <a:pPr marL="342900" indent="-342900">
@@ -5368,14 +5571,14 @@
               <a:buChar char="•"/>
             </a:pPr>
             <a:r>
-              <a:rPr lang="en-US" sz="1300" dirty="0">
+              <a:rPr lang="en-US" sz="1400" dirty="0">
                 <a:solidFill>
                   <a:schemeClr val="tx1"/>
                 </a:solidFill>
               </a:rPr>
-              <a:t>initialize, tools/list, tools/call; notifications get no reply</a:t>
+              <a:t>The client owns the model and the loop</a:t>
             </a:r>
-            <a:endParaRPr lang="en-US" sz="1500" dirty="0"/>
+            <a:endParaRPr lang="en-US" sz="1400" dirty="0"/>
           </a:p>
           <a:p>
             <a:pPr marL="342900" indent="-342900">
@@ -5386,14 +5589,14 @@
               <a:buChar char="•"/>
             </a:pPr>
             <a:r>
-              <a:rPr lang="en-US" sz="1300" dirty="0">
+              <a:rPr lang="en-US" sz="1400" dirty="0">
                 <a:solidFill>
                   <a:schemeClr val="tx1"/>
                 </a:solidFill>
               </a:rPr>
               <a:t>stdout is the protocol, so -trace logs to stderr</a:t>
             </a:r>
-            <a:endParaRPr lang="en-US" sz="1500" dirty="0"/>
+            <a:endParaRPr lang="en-US" sz="1400" dirty="0"/>
           </a:p>
           <a:p>
             <a:pPr marL="342900" indent="-342900">
@@ -5404,45 +5607,27 @@
               <a:buChar char="•"/>
             </a:pPr>
             <a:r>
-              <a:rPr lang="en-US" sz="1300" dirty="0">
+              <a:rPr lang="en-US" sz="1400" dirty="0">
                 <a:solidFill>
                   <a:schemeClr val="tx1"/>
                 </a:solidFill>
               </a:rPr>
-              <a:t>A failing tool returns isError, not a protocol error</a:t>
+              <a:t>Tool failures return isError: true so the model can retry</a:t>
             </a:r>
-            <a:endParaRPr lang="en-US" sz="1500" dirty="0"/>
-          </a:p>
-          <a:p>
-            <a:pPr marL="342900" indent="-342900">
-              <a:spcAft>
-                <a:spcPts val="800"/>
-              </a:spcAft>
-              <a:buSzPct val="100000"/>
-              <a:buChar char="•"/>
-            </a:pPr>
-            <a:r>
-              <a:rPr lang="en-US" sz="1300" dirty="0">
-                <a:solidFill>
-                  <a:schemeClr val="tx1"/>
-                </a:solidFill>
-              </a:rPr>
-              <a:t>claude mcp add jokes -- go run ./cmd/jokes-mcp</a:t>
-            </a:r>
-            <a:endParaRPr lang="en-US" sz="1500" dirty="0"/>
+            <a:endParaRPr lang="en-US" sz="1400" dirty="0"/>
           </a:p>
         </p:txBody>
       </p:sp>
       <p:sp>
         <p:nvSpPr>
-          <p:cNvPr id="6" name="caption"/>
+          <p:cNvPr id="6" name="cmd"/>
           <p:cNvSpPr txBox="1"/>
           <p:nvPr/>
         </p:nvSpPr>
         <p:spPr>
           <a:xfrm>
-            <a:off x="457200" y="4000000"/>
-            <a:ext cx="4389120" cy="365760"/>
+            <a:off x="457200" y="4343400"/>
+            <a:ext cx="8229600" cy="365760"/>
           </a:xfrm>
           <a:prstGeom prst="rect">
             <a:avLst/>
@@ -5458,14 +5643,17 @@
               <a:buNone/>
             </a:pPr>
             <a:r>
-              <a:rPr lang="en-US" sz="1200" dirty="0">
+              <a:rPr lang="en-US" sz="1300" dirty="0">
                 <a:solidFill>
-                  <a:srgbClr val="5A6B78"/>
+                  <a:srgbClr val="0B7A75"/>
                 </a:solidFill>
+                <a:latin typeface="Courier New" pitchFamily="34" charset="0"/>
+                <a:ea typeface="Courier New" pitchFamily="34" charset="-122"/>
+                <a:cs typeface="Courier New" pitchFamily="34" charset="-120"/>
               </a:rPr>
-              <a:t>The client owns the model and the loop; the server only runs tools.</a:t>
+              <a:t>claude mcp add jokes -- go run ./cmd/jokes-mcp</a:t>
             </a:r>
-            <a:endParaRPr lang="en-US" sz="1200" dirty="0"/>
+            <a:endParaRPr lang="en-US" sz="1300" dirty="0"/>
           </a:p>
         </p:txBody>
       </p:sp>
@@ -5514,30 +5702,6 @@
           </a:p>
         </p:txBody>
       </p:sp>
-      <p:pic>
-        <p:nvPicPr>
-          <p:cNvPr id="26" name="Picture 25" descr="d4.png"/>
-          <p:cNvPicPr>
-            <a:picLocks noChangeAspect="1"/>
-          </p:cNvPicPr>
-          <p:nvPr/>
-        </p:nvPicPr>
-        <p:blipFill>
-          <a:blip r:embed="rId4"/>
-          <a:stretch>
-            <a:fillRect/>
-          </a:stretch>
-        </p:blipFill>
-        <p:spPr>
-          <a:xfrm>
-            <a:off x="365760" y="1280160"/>
-            <a:ext cx="4480000" cy="2691204"/>
-          </a:xfrm>
-          <a:prstGeom prst="rect">
-            <a:avLst/>
-          </a:prstGeom>
-        </p:spPr>
-      </p:pic>
     </p:spTree>
   </p:cSld>
   <p:clrMapOvr>
@@ -5547,15 +5711,22 @@
 </file>
 
 <file path=ppt/slides/slide14.xml><?xml version="1.0" encoding="utf-8"?>
-<p:sld xmlns:a="http://schemas.openxmlformats.org/drawingml/2006/main" xmlns:p="http://schemas.openxmlformats.org/presentationml/2006/main" xmlns:r="http://schemas.openxmlformats.org/officeDocument/2006/relationships">
-  <p:cSld>
+<p:sld xmlns:a="http://schemas.openxmlformats.org/drawingml/2006/main" xmlns:r="http://schemas.openxmlformats.org/officeDocument/2006/relationships" xmlns:p="http://schemas.openxmlformats.org/presentationml/2006/main">
+  <p:cSld name="Slide 14">
     <p:spTree>
       <p:nvGrpSpPr>
         <p:cNvPr id="1" name=""/>
         <p:cNvGrpSpPr/>
         <p:nvPr/>
       </p:nvGrpSpPr>
-      <p:grpSpPr/>
+      <p:grpSpPr>
+        <a:xfrm>
+          <a:off x="0" y="0"/>
+          <a:ext cx="0" cy="0"/>
+          <a:chOff x="0" y="0"/>
+          <a:chExt cx="0" cy="0"/>
+        </a:xfrm>
+      </p:grpSpPr>
       <p:sp>
         <p:nvSpPr>
           <p:cNvPr id="2" name="Text 0"/>
@@ -5588,22 +5759,817 @@
                   <a:srgbClr val="0B3B3C"/>
                 </a:solidFill>
               </a:rPr>
-              <a:t>Stage 5: evals</a:t>
+              <a:t>Stage 5: evals, a number not a hunch</a:t>
             </a:r>
             <a:endParaRPr lang="en-US" sz="3000" dirty="0"/>
           </a:p>
         </p:txBody>
       </p:sp>
-      <p:sp>
-        <p:nvSpPr>
-          <p:cNvPr id="5" name="bullets"/>
+      <p:pic>
+        <p:nvPicPr>
+          <p:cNvPr id="4" name="Eval flow" descr="Eval flow">    </p:cNvPr>
+          <p:cNvPicPr>
+            <a:picLocks noChangeAspect="1"/>
+          </p:cNvPicPr>
+          <p:nvPr/>
+        </p:nvPicPr>
+        <p:blipFill>
+          <a:blip r:embed="rId1"/>
+          <a:stretch>
+            <a:fillRect/>
+          </a:stretch>
+        </p:blipFill>
+        <p:spPr>
+          <a:xfrm>
+            <a:off x="1439694" y="1051560"/>
+            <a:ext cx="6264613" cy="914400"/>
+          </a:xfrm>
+          <a:prstGeom prst="rect">
+            <a:avLst/>
+          </a:prstGeom>
+        </p:spPr>
+      </p:pic>
+      <p:graphicFrame>
+        <p:nvGraphicFramePr>
+          <p:cNvPr id="15" name="Table 0"/>
+          <p:cNvGraphicFramePr>
+            <a:graphicFrameLocks noGrp="1"/>
+          </p:cNvGraphicFramePr>
+          <p:nvPr>
+            <p:extLst>
+              <p:ext uri="{D42A27DB-BD31-4B8C-83A1-F6EECF244321}">
+                <p14:modId xmlns:p14="http://schemas.microsoft.com/office/powerpoint/2010/main" val="1579011935"/>
+              </p:ext>
+            </p:extLst>
+          </p:nvPr>
+        </p:nvGraphicFramePr>
+        <p:xfrm>
+          <a:off x="457200" y="2194560"/>
+          <a:ext cx="8229600" cy="914400"/>
+        </p:xfrm>
+        <a:graphic>
+          <a:graphicData uri="http://schemas.openxmlformats.org/drawingml/2006/table">
+            <a:tbl>
+              <a:tblPr/>
+              <a:tblGrid>
+                <a:gridCol w="1554480"/>
+                <a:gridCol w="914400"/>
+                <a:gridCol w="5760720"/>
+              </a:tblGrid>
+              <a:tr h="411480">
+                <a:tc>
+                  <a:txBody>
+                    <a:bodyPr/>
+                    <a:lstStyle/>
+                    <a:p>
+                      <a:pPr indent="0" marL="0">
+                        <a:buNone/>
+                      </a:pPr>
+                      <a:r>
+                        <a:rPr lang="en-US" sz="1200" b="1" dirty="0">
+                          <a:solidFill>
+                            <a:srgbClr val="FFFFFF"/>
+                          </a:solidFill>
+                        </a:rPr>
+                        <a:t>Stage</a:t>
+                      </a:r>
+                      <a:endParaRPr lang="en-US" sz="1200" dirty="0"/>
+                    </a:p>
+                  </a:txBody>
+                  <a:tcPr marL="91440" marR="91440" marT="45720" marB="45720" anchor="ctr">
+                    <a:lnL w="6350" cap="flat" cmpd="sng" algn="ctr">
+                      <a:solidFill>
+                        <a:srgbClr val="D8E0E5"/>
+                      </a:solidFill>
+                      <a:prstDash val="solid"/>
+                      <a:round/>
+                      <a:headEnd type="none" w="med" len="med"/>
+                      <a:tailEnd type="none" w="med" len="med"/>
+                    </a:lnL>
+                    <a:lnR w="6350" cap="flat" cmpd="sng" algn="ctr">
+                      <a:solidFill>
+                        <a:srgbClr val="D8E0E5"/>
+                      </a:solidFill>
+                      <a:prstDash val="solid"/>
+                      <a:round/>
+                      <a:headEnd type="none" w="med" len="med"/>
+                      <a:tailEnd type="none" w="med" len="med"/>
+                    </a:lnR>
+                    <a:lnT w="6350" cap="flat" cmpd="sng" algn="ctr">
+                      <a:solidFill>
+                        <a:srgbClr val="D8E0E5"/>
+                      </a:solidFill>
+                      <a:prstDash val="solid"/>
+                      <a:round/>
+                      <a:headEnd type="none" w="med" len="med"/>
+                      <a:tailEnd type="none" w="med" len="med"/>
+                    </a:lnT>
+                    <a:lnB w="6350" cap="flat" cmpd="sng" algn="ctr">
+                      <a:solidFill>
+                        <a:srgbClr val="D8E0E5"/>
+                      </a:solidFill>
+                      <a:prstDash val="solid"/>
+                      <a:round/>
+                      <a:headEnd type="none" w="med" len="med"/>
+                      <a:tailEnd type="none" w="med" len="med"/>
+                    </a:lnB>
+                    <a:solidFill>
+                      <a:srgbClr val="0B3B3C"/>
+                    </a:solidFill>
+                  </a:tcPr>
+                </a:tc>
+                <a:tc>
+                  <a:txBody>
+                    <a:bodyPr/>
+                    <a:lstStyle/>
+                    <a:p>
+                      <a:pPr indent="0" marL="0">
+                        <a:buNone/>
+                      </a:pPr>
+                      <a:r>
+                        <a:rPr lang="en-US" sz="1200" b="1" dirty="0">
+                          <a:solidFill>
+                            <a:srgbClr val="FFFFFF"/>
+                          </a:solidFill>
+                        </a:rPr>
+                        <a:t>Passed</a:t>
+                      </a:r>
+                      <a:endParaRPr lang="en-US" sz="1200" dirty="0"/>
+                    </a:p>
+                  </a:txBody>
+                  <a:tcPr marL="91440" marR="91440" marT="45720" marB="45720" anchor="ctr">
+                    <a:lnL w="6350" cap="flat" cmpd="sng" algn="ctr">
+                      <a:solidFill>
+                        <a:srgbClr val="D8E0E5"/>
+                      </a:solidFill>
+                      <a:prstDash val="solid"/>
+                      <a:round/>
+                      <a:headEnd type="none" w="med" len="med"/>
+                      <a:tailEnd type="none" w="med" len="med"/>
+                    </a:lnL>
+                    <a:lnR w="6350" cap="flat" cmpd="sng" algn="ctr">
+                      <a:solidFill>
+                        <a:srgbClr val="D8E0E5"/>
+                      </a:solidFill>
+                      <a:prstDash val="solid"/>
+                      <a:round/>
+                      <a:headEnd type="none" w="med" len="med"/>
+                      <a:tailEnd type="none" w="med" len="med"/>
+                    </a:lnR>
+                    <a:lnT w="6350" cap="flat" cmpd="sng" algn="ctr">
+                      <a:solidFill>
+                        <a:srgbClr val="D8E0E5"/>
+                      </a:solidFill>
+                      <a:prstDash val="solid"/>
+                      <a:round/>
+                      <a:headEnd type="none" w="med" len="med"/>
+                      <a:tailEnd type="none" w="med" len="med"/>
+                    </a:lnT>
+                    <a:lnB w="6350" cap="flat" cmpd="sng" algn="ctr">
+                      <a:solidFill>
+                        <a:srgbClr val="D8E0E5"/>
+                      </a:solidFill>
+                      <a:prstDash val="solid"/>
+                      <a:round/>
+                      <a:headEnd type="none" w="med" len="med"/>
+                      <a:tailEnd type="none" w="med" len="med"/>
+                    </a:lnB>
+                    <a:solidFill>
+                      <a:srgbClr val="0B3B3C"/>
+                    </a:solidFill>
+                  </a:tcPr>
+                </a:tc>
+                <a:tc>
+                  <a:txBody>
+                    <a:bodyPr/>
+                    <a:lstStyle/>
+                    <a:p>
+                      <a:pPr indent="0" marL="0">
+                        <a:buNone/>
+                      </a:pPr>
+                      <a:r>
+                        <a:rPr lang="en-US" sz="1200" b="1" dirty="0">
+                          <a:solidFill>
+                            <a:srgbClr val="FFFFFF"/>
+                          </a:solidFill>
+                        </a:rPr>
+                        <a:t>What failed</a:t>
+                      </a:r>
+                      <a:endParaRPr lang="en-US" sz="1200" dirty="0"/>
+                    </a:p>
+                  </a:txBody>
+                  <a:tcPr marL="91440" marR="91440" marT="45720" marB="45720" anchor="ctr">
+                    <a:lnL w="6350" cap="flat" cmpd="sng" algn="ctr">
+                      <a:solidFill>
+                        <a:srgbClr val="D8E0E5"/>
+                      </a:solidFill>
+                      <a:prstDash val="solid"/>
+                      <a:round/>
+                      <a:headEnd type="none" w="med" len="med"/>
+                      <a:tailEnd type="none" w="med" len="med"/>
+                    </a:lnL>
+                    <a:lnR w="6350" cap="flat" cmpd="sng" algn="ctr">
+                      <a:solidFill>
+                        <a:srgbClr val="D8E0E5"/>
+                      </a:solidFill>
+                      <a:prstDash val="solid"/>
+                      <a:round/>
+                      <a:headEnd type="none" w="med" len="med"/>
+                      <a:tailEnd type="none" w="med" len="med"/>
+                    </a:lnR>
+                    <a:lnT w="6350" cap="flat" cmpd="sng" algn="ctr">
+                      <a:solidFill>
+                        <a:srgbClr val="D8E0E5"/>
+                      </a:solidFill>
+                      <a:prstDash val="solid"/>
+                      <a:round/>
+                      <a:headEnd type="none" w="med" len="med"/>
+                      <a:tailEnd type="none" w="med" len="med"/>
+                    </a:lnT>
+                    <a:lnB w="6350" cap="flat" cmpd="sng" algn="ctr">
+                      <a:solidFill>
+                        <a:srgbClr val="D8E0E5"/>
+                      </a:solidFill>
+                      <a:prstDash val="solid"/>
+                      <a:round/>
+                      <a:headEnd type="none" w="med" len="med"/>
+                      <a:tailEnd type="none" w="med" len="med"/>
+                    </a:lnB>
+                    <a:solidFill>
+                      <a:srgbClr val="0B3B3C"/>
+                    </a:solidFill>
+                  </a:tcPr>
+                </a:tc>
+              </a:tr>
+              <a:tr h="411480">
+                <a:tc>
+                  <a:txBody>
+                    <a:bodyPr/>
+                    <a:lstStyle/>
+                    <a:p>
+                      <a:pPr indent="0" marL="0">
+                        <a:buNone/>
+                      </a:pPr>
+                      <a:r>
+                        <a:rPr lang="en-US" sz="1300" dirty="0">
+                          <a:solidFill>
+                            <a:srgbClr val="14212B"/>
+                          </a:solidFill>
+                        </a:rPr>
+                        <a:t>0 Keywords</a:t>
+                      </a:r>
+                      <a:endParaRPr lang="en-US" sz="1300" dirty="0"/>
+                    </a:p>
+                  </a:txBody>
+                  <a:tcPr marL="91440" marR="91440" marT="45720" marB="45720" anchor="ctr">
+                    <a:lnL w="6350" cap="flat" cmpd="sng" algn="ctr">
+                      <a:solidFill>
+                        <a:srgbClr val="D8E0E5"/>
+                      </a:solidFill>
+                      <a:prstDash val="solid"/>
+                      <a:round/>
+                      <a:headEnd type="none" w="med" len="med"/>
+                      <a:tailEnd type="none" w="med" len="med"/>
+                    </a:lnL>
+                    <a:lnR w="6350" cap="flat" cmpd="sng" algn="ctr">
+                      <a:solidFill>
+                        <a:srgbClr val="D8E0E5"/>
+                      </a:solidFill>
+                      <a:prstDash val="solid"/>
+                      <a:round/>
+                      <a:headEnd type="none" w="med" len="med"/>
+                      <a:tailEnd type="none" w="med" len="med"/>
+                    </a:lnR>
+                    <a:lnT w="6350" cap="flat" cmpd="sng" algn="ctr">
+                      <a:solidFill>
+                        <a:srgbClr val="D8E0E5"/>
+                      </a:solidFill>
+                      <a:prstDash val="solid"/>
+                      <a:round/>
+                      <a:headEnd type="none" w="med" len="med"/>
+                      <a:tailEnd type="none" w="med" len="med"/>
+                    </a:lnT>
+                    <a:lnB w="6350" cap="flat" cmpd="sng" algn="ctr">
+                      <a:solidFill>
+                        <a:srgbClr val="D8E0E5"/>
+                      </a:solidFill>
+                      <a:prstDash val="solid"/>
+                      <a:round/>
+                      <a:headEnd type="none" w="med" len="med"/>
+                      <a:tailEnd type="none" w="med" len="med"/>
+                    </a:lnB>
+                  </a:tcPr>
+                </a:tc>
+                <a:tc>
+                  <a:txBody>
+                    <a:bodyPr/>
+                    <a:lstStyle/>
+                    <a:p>
+                      <a:pPr indent="0" marL="0">
+                        <a:buNone/>
+                      </a:pPr>
+                      <a:r>
+                        <a:rPr lang="en-US" sz="1300" dirty="0">
+                          <a:solidFill>
+                            <a:srgbClr val="14212B"/>
+                          </a:solidFill>
+                        </a:rPr>
+                        <a:t>7 of 13</a:t>
+                      </a:r>
+                      <a:endParaRPr lang="en-US" sz="1300" dirty="0"/>
+                    </a:p>
+                  </a:txBody>
+                  <a:tcPr marL="91440" marR="91440" marT="45720" marB="45720" anchor="ctr">
+                    <a:lnL w="6350" cap="flat" cmpd="sng" algn="ctr">
+                      <a:solidFill>
+                        <a:srgbClr val="D8E0E5"/>
+                      </a:solidFill>
+                      <a:prstDash val="solid"/>
+                      <a:round/>
+                      <a:headEnd type="none" w="med" len="med"/>
+                      <a:tailEnd type="none" w="med" len="med"/>
+                    </a:lnL>
+                    <a:lnR w="6350" cap="flat" cmpd="sng" algn="ctr">
+                      <a:solidFill>
+                        <a:srgbClr val="D8E0E5"/>
+                      </a:solidFill>
+                      <a:prstDash val="solid"/>
+                      <a:round/>
+                      <a:headEnd type="none" w="med" len="med"/>
+                      <a:tailEnd type="none" w="med" len="med"/>
+                    </a:lnR>
+                    <a:lnT w="6350" cap="flat" cmpd="sng" algn="ctr">
+                      <a:solidFill>
+                        <a:srgbClr val="D8E0E5"/>
+                      </a:solidFill>
+                      <a:prstDash val="solid"/>
+                      <a:round/>
+                      <a:headEnd type="none" w="med" len="med"/>
+                      <a:tailEnd type="none" w="med" len="med"/>
+                    </a:lnT>
+                    <a:lnB w="6350" cap="flat" cmpd="sng" algn="ctr">
+                      <a:solidFill>
+                        <a:srgbClr val="D8E0E5"/>
+                      </a:solidFill>
+                      <a:prstDash val="solid"/>
+                      <a:round/>
+                      <a:headEnd type="none" w="med" len="med"/>
+                      <a:tailEnd type="none" w="med" len="med"/>
+                    </a:lnB>
+                  </a:tcPr>
+                </a:tc>
+                <a:tc>
+                  <a:txBody>
+                    <a:bodyPr/>
+                    <a:lstStyle/>
+                    <a:p>
+                      <a:pPr indent="0" marL="0">
+                        <a:buNone/>
+                      </a:pPr>
+                      <a:r>
+                        <a:rPr lang="en-US" sz="1300" dirty="0">
+                          <a:solidFill>
+                            <a:srgbClr val="14212B"/>
+                          </a:solidFill>
+                        </a:rPr>
+                        <a:t>"clean" and "family friendly" do not expand; politics or religion missed</a:t>
+                      </a:r>
+                      <a:endParaRPr lang="en-US" sz="1300" dirty="0"/>
+                    </a:p>
+                  </a:txBody>
+                  <a:tcPr marL="91440" marR="91440" marT="45720" marB="45720" anchor="ctr">
+                    <a:lnL w="6350" cap="flat" cmpd="sng" algn="ctr">
+                      <a:solidFill>
+                        <a:srgbClr val="D8E0E5"/>
+                      </a:solidFill>
+                      <a:prstDash val="solid"/>
+                      <a:round/>
+                      <a:headEnd type="none" w="med" len="med"/>
+                      <a:tailEnd type="none" w="med" len="med"/>
+                    </a:lnL>
+                    <a:lnR w="6350" cap="flat" cmpd="sng" algn="ctr">
+                      <a:solidFill>
+                        <a:srgbClr val="D8E0E5"/>
+                      </a:solidFill>
+                      <a:prstDash val="solid"/>
+                      <a:round/>
+                      <a:headEnd type="none" w="med" len="med"/>
+                      <a:tailEnd type="none" w="med" len="med"/>
+                    </a:lnR>
+                    <a:lnT w="6350" cap="flat" cmpd="sng" algn="ctr">
+                      <a:solidFill>
+                        <a:srgbClr val="D8E0E5"/>
+                      </a:solidFill>
+                      <a:prstDash val="solid"/>
+                      <a:round/>
+                      <a:headEnd type="none" w="med" len="med"/>
+                      <a:tailEnd type="none" w="med" len="med"/>
+                    </a:lnT>
+                    <a:lnB w="6350" cap="flat" cmpd="sng" algn="ctr">
+                      <a:solidFill>
+                        <a:srgbClr val="D8E0E5"/>
+                      </a:solidFill>
+                      <a:prstDash val="solid"/>
+                      <a:round/>
+                      <a:headEnd type="none" w="med" len="med"/>
+                      <a:tailEnd type="none" w="med" len="med"/>
+                    </a:lnB>
+                  </a:tcPr>
+                </a:tc>
+              </a:tr>
+              <a:tr h="411480">
+                <a:tc>
+                  <a:txBody>
+                    <a:bodyPr/>
+                    <a:lstStyle/>
+                    <a:p>
+                      <a:pPr indent="0" marL="0">
+                        <a:buNone/>
+                      </a:pPr>
+                      <a:r>
+                        <a:rPr lang="en-US" sz="1300" dirty="0">
+                          <a:solidFill>
+                            <a:srgbClr val="14212B"/>
+                          </a:solidFill>
+                        </a:rPr>
+                        <a:t>1 Structured</a:t>
+                      </a:r>
+                      <a:endParaRPr lang="en-US" sz="1300" dirty="0"/>
+                    </a:p>
+                  </a:txBody>
+                  <a:tcPr marL="91440" marR="91440" marT="45720" marB="45720" anchor="ctr">
+                    <a:lnL w="6350" cap="flat" cmpd="sng" algn="ctr">
+                      <a:solidFill>
+                        <a:srgbClr val="D8E0E5"/>
+                      </a:solidFill>
+                      <a:prstDash val="solid"/>
+                      <a:round/>
+                      <a:headEnd type="none" w="med" len="med"/>
+                      <a:tailEnd type="none" w="med" len="med"/>
+                    </a:lnL>
+                    <a:lnR w="6350" cap="flat" cmpd="sng" algn="ctr">
+                      <a:solidFill>
+                        <a:srgbClr val="D8E0E5"/>
+                      </a:solidFill>
+                      <a:prstDash val="solid"/>
+                      <a:round/>
+                      <a:headEnd type="none" w="med" len="med"/>
+                      <a:tailEnd type="none" w="med" len="med"/>
+                    </a:lnR>
+                    <a:lnT w="6350" cap="flat" cmpd="sng" algn="ctr">
+                      <a:solidFill>
+                        <a:srgbClr val="D8E0E5"/>
+                      </a:solidFill>
+                      <a:prstDash val="solid"/>
+                      <a:round/>
+                      <a:headEnd type="none" w="med" len="med"/>
+                      <a:tailEnd type="none" w="med" len="med"/>
+                    </a:lnT>
+                    <a:lnB w="6350" cap="flat" cmpd="sng" algn="ctr">
+                      <a:solidFill>
+                        <a:srgbClr val="D8E0E5"/>
+                      </a:solidFill>
+                      <a:prstDash val="solid"/>
+                      <a:round/>
+                      <a:headEnd type="none" w="med" len="med"/>
+                      <a:tailEnd type="none" w="med" len="med"/>
+                    </a:lnB>
+                  </a:tcPr>
+                </a:tc>
+                <a:tc>
+                  <a:txBody>
+                    <a:bodyPr/>
+                    <a:lstStyle/>
+                    <a:p>
+                      <a:pPr indent="0" marL="0">
+                        <a:buNone/>
+                      </a:pPr>
+                      <a:r>
+                        <a:rPr lang="en-US" sz="1300" dirty="0">
+                          <a:solidFill>
+                            <a:srgbClr val="14212B"/>
+                          </a:solidFill>
+                        </a:rPr>
+                        <a:t>8 of 13</a:t>
+                      </a:r>
+                      <a:endParaRPr lang="en-US" sz="1300" dirty="0"/>
+                    </a:p>
+                  </a:txBody>
+                  <a:tcPr marL="91440" marR="91440" marT="45720" marB="45720" anchor="ctr">
+                    <a:lnL w="6350" cap="flat" cmpd="sng" algn="ctr">
+                      <a:solidFill>
+                        <a:srgbClr val="D8E0E5"/>
+                      </a:solidFill>
+                      <a:prstDash val="solid"/>
+                      <a:round/>
+                      <a:headEnd type="none" w="med" len="med"/>
+                      <a:tailEnd type="none" w="med" len="med"/>
+                    </a:lnL>
+                    <a:lnR w="6350" cap="flat" cmpd="sng" algn="ctr">
+                      <a:solidFill>
+                        <a:srgbClr val="D8E0E5"/>
+                      </a:solidFill>
+                      <a:prstDash val="solid"/>
+                      <a:round/>
+                      <a:headEnd type="none" w="med" len="med"/>
+                      <a:tailEnd type="none" w="med" len="med"/>
+                    </a:lnR>
+                    <a:lnT w="6350" cap="flat" cmpd="sng" algn="ctr">
+                      <a:solidFill>
+                        <a:srgbClr val="D8E0E5"/>
+                      </a:solidFill>
+                      <a:prstDash val="solid"/>
+                      <a:round/>
+                      <a:headEnd type="none" w="med" len="med"/>
+                      <a:tailEnd type="none" w="med" len="med"/>
+                    </a:lnT>
+                    <a:lnB w="6350" cap="flat" cmpd="sng" algn="ctr">
+                      <a:solidFill>
+                        <a:srgbClr val="D8E0E5"/>
+                      </a:solidFill>
+                      <a:prstDash val="solid"/>
+                      <a:round/>
+                      <a:headEnd type="none" w="med" len="med"/>
+                      <a:tailEnd type="none" w="med" len="med"/>
+                    </a:lnB>
+                  </a:tcPr>
+                </a:tc>
+                <a:tc>
+                  <a:txBody>
+                    <a:bodyPr/>
+                    <a:lstStyle/>
+                    <a:p>
+                      <a:pPr indent="0" marL="0">
+                        <a:buNone/>
+                      </a:pPr>
+                      <a:r>
+                        <a:rPr lang="en-US" sz="1300" dirty="0">
+                          <a:solidFill>
+                            <a:srgbClr val="14212B"/>
+                          </a:solidFill>
+                        </a:rPr>
+                        <a:t>Same "clean" weakness; lost Pun, Misc for spooky, lost Christmas</a:t>
+                      </a:r>
+                      <a:endParaRPr lang="en-US" sz="1300" dirty="0"/>
+                    </a:p>
+                  </a:txBody>
+                  <a:tcPr marL="91440" marR="91440" marT="45720" marB="45720" anchor="ctr">
+                    <a:lnL w="6350" cap="flat" cmpd="sng" algn="ctr">
+                      <a:solidFill>
+                        <a:srgbClr val="D8E0E5"/>
+                      </a:solidFill>
+                      <a:prstDash val="solid"/>
+                      <a:round/>
+                      <a:headEnd type="none" w="med" len="med"/>
+                      <a:tailEnd type="none" w="med" len="med"/>
+                    </a:lnL>
+                    <a:lnR w="6350" cap="flat" cmpd="sng" algn="ctr">
+                      <a:solidFill>
+                        <a:srgbClr val="D8E0E5"/>
+                      </a:solidFill>
+                      <a:prstDash val="solid"/>
+                      <a:round/>
+                      <a:headEnd type="none" w="med" len="med"/>
+                      <a:tailEnd type="none" w="med" len="med"/>
+                    </a:lnR>
+                    <a:lnT w="6350" cap="flat" cmpd="sng" algn="ctr">
+                      <a:solidFill>
+                        <a:srgbClr val="D8E0E5"/>
+                      </a:solidFill>
+                      <a:prstDash val="solid"/>
+                      <a:round/>
+                      <a:headEnd type="none" w="med" len="med"/>
+                      <a:tailEnd type="none" w="med" len="med"/>
+                    </a:lnT>
+                    <a:lnB w="6350" cap="flat" cmpd="sng" algn="ctr">
+                      <a:solidFill>
+                        <a:srgbClr val="D8E0E5"/>
+                      </a:solidFill>
+                      <a:prstDash val="solid"/>
+                      <a:round/>
+                      <a:headEnd type="none" w="med" len="med"/>
+                      <a:tailEnd type="none" w="med" len="med"/>
+                    </a:lnB>
+                  </a:tcPr>
+                </a:tc>
+              </a:tr>
+              <a:tr h="411480">
+                <a:tc>
+                  <a:txBody>
+                    <a:bodyPr/>
+                    <a:lstStyle/>
+                    <a:p>
+                      <a:pPr indent="0" marL="0">
+                        <a:buNone/>
+                      </a:pPr>
+                      <a:r>
+                        <a:rPr lang="en-US" sz="1300" dirty="0">
+                          <a:solidFill>
+                            <a:srgbClr val="14212B"/>
+                          </a:solidFill>
+                        </a:rPr>
+                        <a:t>6 Agent</a:t>
+                      </a:r>
+                      <a:endParaRPr lang="en-US" sz="1300" dirty="0"/>
+                    </a:p>
+                  </a:txBody>
+                  <a:tcPr marL="91440" marR="91440" marT="45720" marB="45720" anchor="ctr">
+                    <a:lnL w="6350" cap="flat" cmpd="sng" algn="ctr">
+                      <a:solidFill>
+                        <a:srgbClr val="D8E0E5"/>
+                      </a:solidFill>
+                      <a:prstDash val="solid"/>
+                      <a:round/>
+                      <a:headEnd type="none" w="med" len="med"/>
+                      <a:tailEnd type="none" w="med" len="med"/>
+                    </a:lnL>
+                    <a:lnR w="6350" cap="flat" cmpd="sng" algn="ctr">
+                      <a:solidFill>
+                        <a:srgbClr val="D8E0E5"/>
+                      </a:solidFill>
+                      <a:prstDash val="solid"/>
+                      <a:round/>
+                      <a:headEnd type="none" w="med" len="med"/>
+                      <a:tailEnd type="none" w="med" len="med"/>
+                    </a:lnR>
+                    <a:lnT w="6350" cap="flat" cmpd="sng" algn="ctr">
+                      <a:solidFill>
+                        <a:srgbClr val="D8E0E5"/>
+                      </a:solidFill>
+                      <a:prstDash val="solid"/>
+                      <a:round/>
+                      <a:headEnd type="none" w="med" len="med"/>
+                      <a:tailEnd type="none" w="med" len="med"/>
+                    </a:lnT>
+                    <a:lnB w="6350" cap="flat" cmpd="sng" algn="ctr">
+                      <a:solidFill>
+                        <a:srgbClr val="D8E0E5"/>
+                      </a:solidFill>
+                      <a:prstDash val="solid"/>
+                      <a:round/>
+                      <a:headEnd type="none" w="med" len="med"/>
+                      <a:tailEnd type="none" w="med" len="med"/>
+                    </a:lnB>
+                  </a:tcPr>
+                </a:tc>
+                <a:tc>
+                  <a:txBody>
+                    <a:bodyPr/>
+                    <a:lstStyle/>
+                    <a:p>
+                      <a:pPr indent="0" marL="0">
+                        <a:buNone/>
+                      </a:pPr>
+                      <a:r>
+                        <a:rPr lang="en-US" sz="1300" dirty="0">
+                          <a:solidFill>
+                            <a:srgbClr val="14212B"/>
+                          </a:solidFill>
+                        </a:rPr>
+                        <a:t>5 of 6</a:t>
+                      </a:r>
+                      <a:endParaRPr lang="en-US" sz="1300" dirty="0"/>
+                    </a:p>
+                  </a:txBody>
+                  <a:tcPr marL="91440" marR="91440" marT="45720" marB="45720" anchor="ctr">
+                    <a:lnL w="6350" cap="flat" cmpd="sng" algn="ctr">
+                      <a:solidFill>
+                        <a:srgbClr val="D8E0E5"/>
+                      </a:solidFill>
+                      <a:prstDash val="solid"/>
+                      <a:round/>
+                      <a:headEnd type="none" w="med" len="med"/>
+                      <a:tailEnd type="none" w="med" len="med"/>
+                    </a:lnL>
+                    <a:lnR w="6350" cap="flat" cmpd="sng" algn="ctr">
+                      <a:solidFill>
+                        <a:srgbClr val="D8E0E5"/>
+                      </a:solidFill>
+                      <a:prstDash val="solid"/>
+                      <a:round/>
+                      <a:headEnd type="none" w="med" len="med"/>
+                      <a:tailEnd type="none" w="med" len="med"/>
+                    </a:lnR>
+                    <a:lnT w="6350" cap="flat" cmpd="sng" algn="ctr">
+                      <a:solidFill>
+                        <a:srgbClr val="D8E0E5"/>
+                      </a:solidFill>
+                      <a:prstDash val="solid"/>
+                      <a:round/>
+                      <a:headEnd type="none" w="med" len="med"/>
+                      <a:tailEnd type="none" w="med" len="med"/>
+                    </a:lnT>
+                    <a:lnB w="6350" cap="flat" cmpd="sng" algn="ctr">
+                      <a:solidFill>
+                        <a:srgbClr val="D8E0E5"/>
+                      </a:solidFill>
+                      <a:prstDash val="solid"/>
+                      <a:round/>
+                      <a:headEnd type="none" w="med" len="med"/>
+                      <a:tailEnd type="none" w="med" len="med"/>
+                    </a:lnB>
+                  </a:tcPr>
+                </a:tc>
+                <a:tc>
+                  <a:txBody>
+                    <a:bodyPr/>
+                    <a:lstStyle/>
+                    <a:p>
+                      <a:pPr indent="0" marL="0">
+                        <a:buNone/>
+                      </a:pPr>
+                      <a:r>
+                        <a:rPr lang="en-US" sz="1300" dirty="0">
+                          <a:solidFill>
+                            <a:srgbClr val="14212B"/>
+                          </a:solidFill>
+                        </a:rPr>
+                        <a:t>Explained the joke unasked after an "explain it" turn</a:t>
+                      </a:r>
+                      <a:endParaRPr lang="en-US" sz="1300" dirty="0"/>
+                    </a:p>
+                  </a:txBody>
+                  <a:tcPr marL="91440" marR="91440" marT="45720" marB="45720" anchor="ctr">
+                    <a:lnL w="6350" cap="flat" cmpd="sng" algn="ctr">
+                      <a:solidFill>
+                        <a:srgbClr val="D8E0E5"/>
+                      </a:solidFill>
+                      <a:prstDash val="solid"/>
+                      <a:round/>
+                      <a:headEnd type="none" w="med" len="med"/>
+                      <a:tailEnd type="none" w="med" len="med"/>
+                    </a:lnL>
+                    <a:lnR w="6350" cap="flat" cmpd="sng" algn="ctr">
+                      <a:solidFill>
+                        <a:srgbClr val="D8E0E5"/>
+                      </a:solidFill>
+                      <a:prstDash val="solid"/>
+                      <a:round/>
+                      <a:headEnd type="none" w="med" len="med"/>
+                      <a:tailEnd type="none" w="med" len="med"/>
+                    </a:lnR>
+                    <a:lnT w="6350" cap="flat" cmpd="sng" algn="ctr">
+                      <a:solidFill>
+                        <a:srgbClr val="D8E0E5"/>
+                      </a:solidFill>
+                      <a:prstDash val="solid"/>
+                      <a:round/>
+                      <a:headEnd type="none" w="med" len="med"/>
+                      <a:tailEnd type="none" w="med" len="med"/>
+                    </a:lnT>
+                    <a:lnB w="6350" cap="flat" cmpd="sng" algn="ctr">
+                      <a:solidFill>
+                        <a:srgbClr val="D8E0E5"/>
+                      </a:solidFill>
+                      <a:prstDash val="solid"/>
+                      <a:round/>
+                      <a:headEnd type="none" w="med" len="med"/>
+                      <a:tailEnd type="none" w="med" len="med"/>
+                    </a:lnB>
+                  </a:tcPr>
+                </a:tc>
+              </a:tr>
+            </a:tbl>
+          </a:graphicData>
+        </a:graphic>
+      </p:graphicFrame>
+      <p:sp>
+        <p:nvSpPr>
+          <p:cNvPr id="6" name="callout-bg"/>
+          <p:cNvSpPr/>
+          <p:nvPr/>
+        </p:nvSpPr>
+        <p:spPr>
+          <a:xfrm>
+            <a:off x="457200" y="3977640"/>
+            <a:ext cx="8229600" cy="777240"/>
+          </a:xfrm>
+          <a:prstGeom prst="roundRect">
+            <a:avLst>
+              <a:gd name="adj" fmla="val 9412"/>
+            </a:avLst>
+          </a:prstGeom>
+          <a:solidFill>
+            <a:srgbClr val="EEF3F4"/>
+          </a:solidFill>
+          <a:ln w="12700">
+            <a:solidFill>
+              <a:srgbClr val="EEF3F4"/>
+            </a:solidFill>
+            <a:prstDash val="solid"/>
+          </a:ln>
+        </p:spPr>
+      </p:sp>
+      <p:sp>
+        <p:nvSpPr>
+          <p:cNvPr id="7" name="callout"/>
           <p:cNvSpPr txBox="1"/>
           <p:nvPr/>
         </p:nvSpPr>
         <p:spPr>
           <a:xfrm>
-            <a:off x="457200" y="1280160"/>
-            <a:ext cx="8229600" cy="3017520"/>
+            <a:off x="594360" y="4050792"/>
+            <a:ext cx="7955280" cy="630936"/>
           </a:xfrm>
           <a:prstGeom prst="rect">
             <a:avLst/>
@@ -5615,128 +6581,30 @@
           <a:bodyPr wrap="square" lIns="0" tIns="0" rIns="0" bIns="0" rtlCol="0" anchor="t"/>
           <a:lstStyle/>
           <a:p>
-            <a:pPr marL="342900" indent="-342900">
-              <a:spcAft>
-                <a:spcPts val="800"/>
-              </a:spcAft>
-              <a:buSzPct val="100000"/>
-              <a:buChar char="•"/>
+            <a:pPr indent="0" marL="0">
+              <a:buNone/>
+            </a:pPr>
+            <a:r>
+              <a:rPr lang="en-US" sz="1200" b="1" dirty="0">
+                <a:solidFill>
+                  <a:srgbClr val="3F7D2A"/>
+                </a:solidFill>
+              </a:rPr>
+              <a:t>LESSON</a:t>
+            </a:r>
+            <a:endParaRPr lang="en-US" sz="1200" dirty="0"/>
+          </a:p>
+          <a:p>
+            <a:pPr indent="0" marL="0">
+              <a:buNone/>
             </a:pPr>
             <a:r>
               <a:rPr lang="en-US" sz="1400" dirty="0">
                 <a:solidFill>
-                  <a:schemeClr val="tx1"/>
+                  <a:srgbClr val="14212B"/>
                 </a:solidFill>
               </a:rPr>
-              <a:t>13 request cases and 6 conversation cases, with plain Go checks</a:t>
-            </a:r>
-            <a:endParaRPr lang="en-US" sz="1500" dirty="0"/>
-          </a:p>
-          <a:p>
-            <a:pPr marL="342900" indent="-342900">
-              <a:spcAft>
-                <a:spcPts val="800"/>
-              </a:spcAft>
-              <a:buSzPct val="100000"/>
-              <a:buChar char="•"/>
-            </a:pPr>
-            <a:r>
-              <a:rPr lang="en-US" sz="1400" dirty="0">
-                <a:solidFill>
-                  <a:schemeClr val="tx1"/>
-                </a:solidFill>
-              </a:rPr>
-              <a:t>Checks read typed requests and tool calls, not reply prose</a:t>
-            </a:r>
-            <a:endParaRPr lang="en-US" sz="1500" dirty="0"/>
-          </a:p>
-          <a:p>
-            <a:pPr marL="342900" indent="-342900">
-              <a:spcAft>
-                <a:spcPts val="800"/>
-              </a:spcAft>
-              <a:buSzPct val="100000"/>
-              <a:buChar char="•"/>
-            </a:pPr>
-            <a:r>
-              <a:rPr lang="en-US" sz="1400" dirty="0">
-                <a:solidFill>
-                  <a:schemeClr val="tx1"/>
-                </a:solidFill>
-              </a:rPr>
-              <a:t>Stage 0: 7 of 13.  Stage 1 (qwen3.5:9b-mlx): 8 of 13.  Stage 6 agent: 5 of 6</a:t>
-            </a:r>
-            <a:endParaRPr lang="en-US" sz="1500" dirty="0"/>
-          </a:p>
-          <a:p>
-            <a:pPr marL="342900" indent="-342900">
-              <a:spcAft>
-                <a:spcPts val="800"/>
-              </a:spcAft>
-              <a:buSzPct val="100000"/>
-              <a:buChar char="•"/>
-            </a:pPr>
-            <a:r>
-              <a:rPr lang="en-US" sz="1400" dirty="0">
-                <a:solidFill>
-                  <a:schemeClr val="tx1"/>
-                </a:solidFill>
-              </a:rPr>
-              <a:t>Known weaknesses are cases on purpose: clean, no-unasked-explanations</a:t>
-            </a:r>
-            <a:endParaRPr lang="en-US" sz="1500" dirty="0"/>
-          </a:p>
-          <a:p>
-            <a:pPr marL="342900" indent="-342900">
-              <a:spcAft>
-                <a:spcPts val="800"/>
-              </a:spcAft>
-              <a:buSzPct val="100000"/>
-              <a:buChar char="•"/>
-            </a:pPr>
-            <a:r>
-              <a:rPr lang="en-US" sz="1400" dirty="0">
-                <a:solidFill>
-                  <a:schemeClr val="tx1"/>
-                </a:solidFill>
-              </a:rPr>
-              <a:t>One run each; use -n 3 for pass rates</a:t>
-            </a:r>
-            <a:endParaRPr lang="en-US" sz="1500" dirty="0"/>
-          </a:p>
-        </p:txBody>
-      </p:sp>
-      <p:sp>
-        <p:nvSpPr>
-          <p:cNvPr id="6" name="caption"/>
-          <p:cNvSpPr txBox="1"/>
-          <p:nvPr/>
-        </p:nvSpPr>
-        <p:spPr>
-          <a:xfrm>
-            <a:off x="457200" y="4297680"/>
-            <a:ext cx="4389120" cy="365760"/>
-          </a:xfrm>
-          <a:prstGeom prst="rect">
-            <a:avLst/>
-          </a:prstGeom>
-          <a:noFill/>
-          <a:ln/>
-        </p:spPr>
-        <p:txBody>
-          <a:bodyPr wrap="square" lIns="0" tIns="0" rIns="0" bIns="0" rtlCol="0" anchor="ctr"/>
-          <a:lstStyle/>
-          <a:p>
-            <a:pPr indent="0" marL="0">
-              <a:buNone/>
-            </a:pPr>
-            <a:r>
-              <a:rPr lang="en-US" sz="1200" dirty="0">
-                <a:solidFill>
-                  <a:srgbClr val="5A6B78"/>
-                </a:solidFill>
-              </a:rPr>
-              <a:t>make eval  ·  go run ./cmd/jokes-eval -stage 1 -n 3</a:t>
+              <a:t>A 9B model beat strings.Contains by one case. That is the argument for measuring before and after every prompt change.</a:t>
             </a:r>
             <a:endParaRPr lang="en-US" sz="1200" dirty="0"/>
           </a:p>
@@ -5781,7 +6649,7 @@
             <a:pPr algn="l"/>
             <a:fld id="{F7021451-1387-4CA6-816F-3879F97B5CBC}" type="slidenum">
               <a:rPr b="0" lang="en-US"/>
-              <a:t>13</a:t>
+              <a:t>14</a:t>
             </a:fld>
             <a:endParaRPr lang="en-US"/>
           </a:p>
@@ -5796,15 +6664,22 @@
 </file>
 
 <file path=ppt/slides/slide15.xml><?xml version="1.0" encoding="utf-8"?>
-<p:sld xmlns:a="http://schemas.openxmlformats.org/drawingml/2006/main" xmlns:p="http://schemas.openxmlformats.org/presentationml/2006/main" xmlns:r="http://schemas.openxmlformats.org/officeDocument/2006/relationships">
-  <p:cSld>
+<p:sld xmlns:a="http://schemas.openxmlformats.org/drawingml/2006/main" xmlns:r="http://schemas.openxmlformats.org/officeDocument/2006/relationships" xmlns:p="http://schemas.openxmlformats.org/presentationml/2006/main">
+  <p:cSld name="Slide 15">
     <p:spTree>
       <p:nvGrpSpPr>
         <p:cNvPr id="1" name=""/>
         <p:cNvGrpSpPr/>
         <p:nvPr/>
       </p:nvGrpSpPr>
-      <p:grpSpPr/>
+      <p:grpSpPr>
+        <a:xfrm>
+          <a:off x="0" y="0"/>
+          <a:ext cx="0" cy="0"/>
+          <a:chOff x="0" y="0"/>
+          <a:chExt cx="0" cy="0"/>
+        </a:xfrm>
+      </p:grpSpPr>
       <p:sp>
         <p:nvSpPr>
           <p:cNvPr id="2" name="Text 0"/>
@@ -5843,6 +6718,30 @@
           </a:p>
         </p:txBody>
       </p:sp>
+      <p:pic>
+        <p:nvPicPr>
+          <p:cNvPr id="4" name="Provider diagram" descr="Provider diagram">    </p:cNvPr>
+          <p:cNvPicPr>
+            <a:picLocks noChangeAspect="1"/>
+          </p:cNvPicPr>
+          <p:nvPr/>
+        </p:nvPicPr>
+        <p:blipFill>
+          <a:blip r:embed="rId1"/>
+          <a:stretch>
+            <a:fillRect/>
+          </a:stretch>
+        </p:blipFill>
+        <p:spPr>
+          <a:xfrm>
+            <a:off x="867795" y="1051560"/>
+            <a:ext cx="7408410" cy="2377440"/>
+          </a:xfrm>
+          <a:prstGeom prst="rect">
+            <a:avLst/>
+          </a:prstGeom>
+        </p:spPr>
+      </p:pic>
       <p:sp>
         <p:nvSpPr>
           <p:cNvPr id="5" name="bullets"/>
@@ -5851,8 +6750,8 @@
         </p:nvSpPr>
         <p:spPr>
           <a:xfrm>
-            <a:off x="5120640" y="1280160"/>
-            <a:ext cx="3657600" cy="3017520"/>
+            <a:off x="457200" y="3566160"/>
+            <a:ext cx="5486400" cy="1188720"/>
           </a:xfrm>
           <a:prstGeom prst="rect">
             <a:avLst/>
@@ -5872,14 +6771,14 @@
               <a:buChar char="•"/>
             </a:pPr>
             <a:r>
-              <a:rPr lang="en-US" sz="1200" dirty="0">
+              <a:rPr lang="en-US" sz="1400" dirty="0">
                 <a:solidFill>
                   <a:schemeClr val="tx1"/>
                 </a:solidFill>
               </a:rPr>
-              <a:t>provider.Provider: system, messages, tools in; one message out</a:t>
+              <a:t>Stage 3 agent over one provider.Provider interface; switching is a flag</a:t>
             </a:r>
-            <a:endParaRPr lang="en-US" sz="1500" dirty="0"/>
+            <a:endParaRPr lang="en-US" sz="1400" dirty="0"/>
           </a:p>
           <a:p>
             <a:pPr marL="342900" indent="-342900">
@@ -5890,14 +6789,14 @@
               <a:buChar char="•"/>
             </a:pPr>
             <a:r>
-              <a:rPr lang="en-US" sz="1200" dirty="0">
+              <a:rPr lang="en-US" sz="1400" dirty="0">
                 <a:solidFill>
                   <a:schemeClr val="tx1"/>
                 </a:solidFill>
               </a:rPr>
-              <a:t>Ollama, OpenAI and Claude adapters in plain HTTP</a:t>
+              <a:t>Each adapter is plain net/http with its own wire-format structs</a:t>
             </a:r>
-            <a:endParaRPr lang="en-US" sz="1500" dirty="0"/>
+            <a:endParaRPr lang="en-US" sz="1400" dirty="0"/>
           </a:p>
           <a:p>
             <a:pPr marL="342900" indent="-342900">
@@ -5908,63 +6807,54 @@
               <a:buChar char="•"/>
             </a:pPr>
             <a:r>
-              <a:rPr lang="en-US" sz="1200" dirty="0">
+              <a:rPr lang="en-US" sz="1400" dirty="0">
                 <a:solidFill>
                   <a:schemeClr val="tx1"/>
                 </a:solidFill>
               </a:rPr>
-              <a:t>OpenAI args are a JSON string; Claude wants tool results in a user message</a:t>
+              <a:t>The same eval can score all three models</a:t>
             </a:r>
-            <a:endParaRPr lang="en-US" sz="1500" dirty="0"/>
-          </a:p>
-          <a:p>
-            <a:pPr marL="342900" indent="-342900">
-              <a:spcAft>
-                <a:spcPts val="800"/>
-              </a:spcAft>
-              <a:buSzPct val="100000"/>
-              <a:buChar char="•"/>
-            </a:pPr>
-            <a:r>
-              <a:rPr lang="en-US" sz="1200" dirty="0">
-                <a:solidFill>
-                  <a:schemeClr val="tx1"/>
-                </a:solidFill>
-              </a:rPr>
-              <a:t>Tools are stage 4's; the repeat check moved into the loop</a:t>
-            </a:r>
-            <a:endParaRPr lang="en-US" sz="1500" dirty="0"/>
-          </a:p>
-          <a:p>
-            <a:pPr marL="342900" indent="-342900">
-              <a:spcAft>
-                <a:spcPts val="800"/>
-              </a:spcAft>
-              <a:buSzPct val="100000"/>
-              <a:buChar char="•"/>
-            </a:pPr>
-            <a:r>
-              <a:rPr lang="en-US" sz="1200" dirty="0">
-                <a:solidFill>
-                  <a:schemeClr val="tx1"/>
-                </a:solidFill>
-              </a:rPr>
-              <a:t>OpenAI and Claude tested on fakes only, not yet live</a:t>
-            </a:r>
-            <a:endParaRPr lang="en-US" sz="1500" dirty="0"/>
+            <a:endParaRPr lang="en-US" sz="1400" dirty="0"/>
           </a:p>
         </p:txBody>
       </p:sp>
       <p:sp>
         <p:nvSpPr>
-          <p:cNvPr id="6" name="caption"/>
+          <p:cNvPr id="6" name="callout-bg"/>
+          <p:cNvSpPr/>
+          <p:nvPr/>
+        </p:nvSpPr>
+        <p:spPr>
+          <a:xfrm>
+            <a:off x="6126480" y="3566160"/>
+            <a:ext cx="2560320" cy="1097280"/>
+          </a:xfrm>
+          <a:prstGeom prst="roundRect">
+            <a:avLst>
+              <a:gd name="adj" fmla="val 6667"/>
+            </a:avLst>
+          </a:prstGeom>
+          <a:solidFill>
+            <a:srgbClr val="EEF3F4"/>
+          </a:solidFill>
+          <a:ln w="12700">
+            <a:solidFill>
+              <a:srgbClr val="EEF3F4"/>
+            </a:solidFill>
+            <a:prstDash val="solid"/>
+          </a:ln>
+        </p:spPr>
+      </p:sp>
+      <p:sp>
+        <p:nvSpPr>
+          <p:cNvPr id="7" name="callout"/>
           <p:cNvSpPr txBox="1"/>
           <p:nvPr/>
         </p:nvSpPr>
         <p:spPr>
           <a:xfrm>
-            <a:off x="457200" y="3000000"/>
-            <a:ext cx="4389120" cy="365760"/>
+            <a:off x="6263640" y="3639312"/>
+            <a:ext cx="2286000" cy="950976"/>
           </a:xfrm>
           <a:prstGeom prst="rect">
             <a:avLst/>
@@ -5973,19 +6863,33 @@
           <a:ln/>
         </p:spPr>
         <p:txBody>
-          <a:bodyPr wrap="square" lIns="0" tIns="0" rIns="0" bIns="0" rtlCol="0" anchor="ctr"/>
+          <a:bodyPr wrap="square" lIns="0" tIns="0" rIns="0" bIns="0" rtlCol="0" anchor="t"/>
           <a:lstStyle/>
           <a:p>
             <a:pPr indent="0" marL="0">
               <a:buNone/>
             </a:pPr>
             <a:r>
-              <a:rPr lang="en-US" sz="1200" dirty="0">
+              <a:rPr lang="en-US" sz="1200" b="1" dirty="0">
                 <a:solidFill>
-                  <a:srgbClr val="5A6B78"/>
+                  <a:srgbClr val="B4561A"/>
                 </a:solidFill>
               </a:rPr>
-              <a:t>-stage 6 -provider ollama | openai | claude</a:t>
+              <a:t>NOT YET RUN LIVE</a:t>
+            </a:r>
+            <a:endParaRPr lang="en-US" sz="1200" dirty="0"/>
+          </a:p>
+          <a:p>
+            <a:pPr indent="0" marL="0">
+              <a:buNone/>
+            </a:pPr>
+            <a:r>
+              <a:rPr lang="en-US" sz="1400" dirty="0">
+                <a:solidFill>
+                  <a:srgbClr val="14212B"/>
+                </a:solidFill>
+              </a:rPr>
+              <a:t>No API keys on the dev machine.</a:t>
             </a:r>
             <a:endParaRPr lang="en-US" sz="1200" dirty="0"/>
           </a:p>
@@ -6030,36 +6934,12 @@
             <a:pPr algn="l"/>
             <a:fld id="{F7021451-1387-4CA6-816F-3879F97B5CBC}" type="slidenum">
               <a:rPr b="0" lang="en-US"/>
-              <a:t>13</a:t>
+              <a:t>15</a:t>
             </a:fld>
             <a:endParaRPr lang="en-US"/>
           </a:p>
         </p:txBody>
       </p:sp>
-      <p:pic>
-        <p:nvPicPr>
-          <p:cNvPr id="26" name="Picture 25" descr="d6.png"/>
-          <p:cNvPicPr>
-            <a:picLocks noChangeAspect="1"/>
-          </p:cNvPicPr>
-          <p:nvPr/>
-        </p:nvPicPr>
-        <p:blipFill>
-          <a:blip r:embed="rId2"/>
-          <a:stretch>
-            <a:fillRect/>
-          </a:stretch>
-        </p:blipFill>
-        <p:spPr>
-          <a:xfrm>
-            <a:off x="365760" y="1500000"/>
-            <a:ext cx="4480000" cy="1502243"/>
-          </a:xfrm>
-          <a:prstGeom prst="rect">
-            <a:avLst/>
-          </a:prstGeom>
-        </p:spPr>
-      </p:pic>
     </p:spTree>
   </p:cSld>
   <p:clrMapOvr>
@@ -6070,7 +6950,7 @@
 
 <file path=ppt/slides/slide16.xml><?xml version="1.0" encoding="utf-8"?>
 <p:sld xmlns:a="http://schemas.openxmlformats.org/drawingml/2006/main" xmlns:r="http://schemas.openxmlformats.org/officeDocument/2006/relationships" xmlns:p="http://schemas.openxmlformats.org/presentationml/2006/main">
-  <p:cSld name="Slide 14">
+  <p:cSld name="Slide 16">
     <p:spTree>
       <p:nvGrpSpPr>
         <p:cNvPr id="1" name=""/>
@@ -6117,6 +6997,1631 @@
                   <a:srgbClr val="0B3B3C"/>
                 </a:solidFill>
               </a:rPr>
+              <a:t>What the provider adapters hide</a:t>
+            </a:r>
+            <a:endParaRPr lang="en-US" sz="3000" dirty="0"/>
+          </a:p>
+        </p:txBody>
+      </p:sp>
+      <p:graphicFrame>
+        <p:nvGraphicFramePr>
+          <p:cNvPr id="17" name="Table 0"/>
+          <p:cNvGraphicFramePr>
+            <a:graphicFrameLocks noGrp="1"/>
+          </p:cNvGraphicFramePr>
+          <p:nvPr>
+            <p:extLst>
+              <p:ext uri="{D42A27DB-BD31-4B8C-83A1-F6EECF244321}">
+                <p14:modId xmlns:p14="http://schemas.microsoft.com/office/powerpoint/2010/main" val="1579011935"/>
+              </p:ext>
+            </p:extLst>
+          </p:nvPr>
+        </p:nvGraphicFramePr>
+        <p:xfrm>
+          <a:off x="457200" y="1097280"/>
+          <a:ext cx="8229600" cy="914400"/>
+        </p:xfrm>
+        <a:graphic>
+          <a:graphicData uri="http://schemas.openxmlformats.org/drawingml/2006/table">
+            <a:tbl>
+              <a:tblPr/>
+              <a:tblGrid>
+                <a:gridCol w="1737360"/>
+                <a:gridCol w="2103120"/>
+                <a:gridCol w="2194560"/>
+                <a:gridCol w="2194560"/>
+              </a:tblGrid>
+              <a:tr h="384048">
+                <a:tc>
+                  <a:txBody>
+                    <a:bodyPr/>
+                    <a:lstStyle/>
+                    <a:p>
+                      <a:pPr indent="0" marL="0">
+                        <a:buNone/>
+                      </a:pPr>
+                      <a:endParaRPr lang="en-US" sz="1200" dirty="0"/>
+                    </a:p>
+                  </a:txBody>
+                  <a:tcPr marL="91440" marR="91440" marT="45720" marB="45720" anchor="ctr">
+                    <a:lnL w="6350" cap="flat" cmpd="sng" algn="ctr">
+                      <a:solidFill>
+                        <a:srgbClr val="D8E0E5"/>
+                      </a:solidFill>
+                      <a:prstDash val="solid"/>
+                      <a:round/>
+                      <a:headEnd type="none" w="med" len="med"/>
+                      <a:tailEnd type="none" w="med" len="med"/>
+                    </a:lnL>
+                    <a:lnR w="6350" cap="flat" cmpd="sng" algn="ctr">
+                      <a:solidFill>
+                        <a:srgbClr val="D8E0E5"/>
+                      </a:solidFill>
+                      <a:prstDash val="solid"/>
+                      <a:round/>
+                      <a:headEnd type="none" w="med" len="med"/>
+                      <a:tailEnd type="none" w="med" len="med"/>
+                    </a:lnR>
+                    <a:lnT w="6350" cap="flat" cmpd="sng" algn="ctr">
+                      <a:solidFill>
+                        <a:srgbClr val="D8E0E5"/>
+                      </a:solidFill>
+                      <a:prstDash val="solid"/>
+                      <a:round/>
+                      <a:headEnd type="none" w="med" len="med"/>
+                      <a:tailEnd type="none" w="med" len="med"/>
+                    </a:lnT>
+                    <a:lnB w="6350" cap="flat" cmpd="sng" algn="ctr">
+                      <a:solidFill>
+                        <a:srgbClr val="D8E0E5"/>
+                      </a:solidFill>
+                      <a:prstDash val="solid"/>
+                      <a:round/>
+                      <a:headEnd type="none" w="med" len="med"/>
+                      <a:tailEnd type="none" w="med" len="med"/>
+                    </a:lnB>
+                    <a:solidFill>
+                      <a:srgbClr val="0B3B3C"/>
+                    </a:solidFill>
+                  </a:tcPr>
+                </a:tc>
+                <a:tc>
+                  <a:txBody>
+                    <a:bodyPr/>
+                    <a:lstStyle/>
+                    <a:p>
+                      <a:pPr indent="0" marL="0">
+                        <a:buNone/>
+                      </a:pPr>
+                      <a:r>
+                        <a:rPr lang="en-US" sz="1200" b="1" dirty="0">
+                          <a:solidFill>
+                            <a:srgbClr val="FFFFFF"/>
+                          </a:solidFill>
+                        </a:rPr>
+                        <a:t>Ollama</a:t>
+                      </a:r>
+                      <a:endParaRPr lang="en-US" sz="1200" dirty="0"/>
+                    </a:p>
+                  </a:txBody>
+                  <a:tcPr marL="91440" marR="91440" marT="45720" marB="45720" anchor="ctr">
+                    <a:lnL w="6350" cap="flat" cmpd="sng" algn="ctr">
+                      <a:solidFill>
+                        <a:srgbClr val="D8E0E5"/>
+                      </a:solidFill>
+                      <a:prstDash val="solid"/>
+                      <a:round/>
+                      <a:headEnd type="none" w="med" len="med"/>
+                      <a:tailEnd type="none" w="med" len="med"/>
+                    </a:lnL>
+                    <a:lnR w="6350" cap="flat" cmpd="sng" algn="ctr">
+                      <a:solidFill>
+                        <a:srgbClr val="D8E0E5"/>
+                      </a:solidFill>
+                      <a:prstDash val="solid"/>
+                      <a:round/>
+                      <a:headEnd type="none" w="med" len="med"/>
+                      <a:tailEnd type="none" w="med" len="med"/>
+                    </a:lnR>
+                    <a:lnT w="6350" cap="flat" cmpd="sng" algn="ctr">
+                      <a:solidFill>
+                        <a:srgbClr val="D8E0E5"/>
+                      </a:solidFill>
+                      <a:prstDash val="solid"/>
+                      <a:round/>
+                      <a:headEnd type="none" w="med" len="med"/>
+                      <a:tailEnd type="none" w="med" len="med"/>
+                    </a:lnT>
+                    <a:lnB w="6350" cap="flat" cmpd="sng" algn="ctr">
+                      <a:solidFill>
+                        <a:srgbClr val="D8E0E5"/>
+                      </a:solidFill>
+                      <a:prstDash val="solid"/>
+                      <a:round/>
+                      <a:headEnd type="none" w="med" len="med"/>
+                      <a:tailEnd type="none" w="med" len="med"/>
+                    </a:lnB>
+                    <a:solidFill>
+                      <a:srgbClr val="0B3B3C"/>
+                    </a:solidFill>
+                  </a:tcPr>
+                </a:tc>
+                <a:tc>
+                  <a:txBody>
+                    <a:bodyPr/>
+                    <a:lstStyle/>
+                    <a:p>
+                      <a:pPr indent="0" marL="0">
+                        <a:buNone/>
+                      </a:pPr>
+                      <a:r>
+                        <a:rPr lang="en-US" sz="1200" b="1" dirty="0">
+                          <a:solidFill>
+                            <a:srgbClr val="FFFFFF"/>
+                          </a:solidFill>
+                        </a:rPr>
+                        <a:t>OpenAI</a:t>
+                      </a:r>
+                      <a:endParaRPr lang="en-US" sz="1200" dirty="0"/>
+                    </a:p>
+                  </a:txBody>
+                  <a:tcPr marL="91440" marR="91440" marT="45720" marB="45720" anchor="ctr">
+                    <a:lnL w="6350" cap="flat" cmpd="sng" algn="ctr">
+                      <a:solidFill>
+                        <a:srgbClr val="D8E0E5"/>
+                      </a:solidFill>
+                      <a:prstDash val="solid"/>
+                      <a:round/>
+                      <a:headEnd type="none" w="med" len="med"/>
+                      <a:tailEnd type="none" w="med" len="med"/>
+                    </a:lnL>
+                    <a:lnR w="6350" cap="flat" cmpd="sng" algn="ctr">
+                      <a:solidFill>
+                        <a:srgbClr val="D8E0E5"/>
+                      </a:solidFill>
+                      <a:prstDash val="solid"/>
+                      <a:round/>
+                      <a:headEnd type="none" w="med" len="med"/>
+                      <a:tailEnd type="none" w="med" len="med"/>
+                    </a:lnR>
+                    <a:lnT w="6350" cap="flat" cmpd="sng" algn="ctr">
+                      <a:solidFill>
+                        <a:srgbClr val="D8E0E5"/>
+                      </a:solidFill>
+                      <a:prstDash val="solid"/>
+                      <a:round/>
+                      <a:headEnd type="none" w="med" len="med"/>
+                      <a:tailEnd type="none" w="med" len="med"/>
+                    </a:lnT>
+                    <a:lnB w="6350" cap="flat" cmpd="sng" algn="ctr">
+                      <a:solidFill>
+                        <a:srgbClr val="D8E0E5"/>
+                      </a:solidFill>
+                      <a:prstDash val="solid"/>
+                      <a:round/>
+                      <a:headEnd type="none" w="med" len="med"/>
+                      <a:tailEnd type="none" w="med" len="med"/>
+                    </a:lnB>
+                    <a:solidFill>
+                      <a:srgbClr val="0B3B3C"/>
+                    </a:solidFill>
+                  </a:tcPr>
+                </a:tc>
+                <a:tc>
+                  <a:txBody>
+                    <a:bodyPr/>
+                    <a:lstStyle/>
+                    <a:p>
+                      <a:pPr indent="0" marL="0">
+                        <a:buNone/>
+                      </a:pPr>
+                      <a:r>
+                        <a:rPr lang="en-US" sz="1200" b="1" dirty="0">
+                          <a:solidFill>
+                            <a:srgbClr val="FFFFFF"/>
+                          </a:solidFill>
+                        </a:rPr>
+                        <a:t>Claude</a:t>
+                      </a:r>
+                      <a:endParaRPr lang="en-US" sz="1200" dirty="0"/>
+                    </a:p>
+                  </a:txBody>
+                  <a:tcPr marL="91440" marR="91440" marT="45720" marB="45720" anchor="ctr">
+                    <a:lnL w="6350" cap="flat" cmpd="sng" algn="ctr">
+                      <a:solidFill>
+                        <a:srgbClr val="D8E0E5"/>
+                      </a:solidFill>
+                      <a:prstDash val="solid"/>
+                      <a:round/>
+                      <a:headEnd type="none" w="med" len="med"/>
+                      <a:tailEnd type="none" w="med" len="med"/>
+                    </a:lnL>
+                    <a:lnR w="6350" cap="flat" cmpd="sng" algn="ctr">
+                      <a:solidFill>
+                        <a:srgbClr val="D8E0E5"/>
+                      </a:solidFill>
+                      <a:prstDash val="solid"/>
+                      <a:round/>
+                      <a:headEnd type="none" w="med" len="med"/>
+                      <a:tailEnd type="none" w="med" len="med"/>
+                    </a:lnR>
+                    <a:lnT w="6350" cap="flat" cmpd="sng" algn="ctr">
+                      <a:solidFill>
+                        <a:srgbClr val="D8E0E5"/>
+                      </a:solidFill>
+                      <a:prstDash val="solid"/>
+                      <a:round/>
+                      <a:headEnd type="none" w="med" len="med"/>
+                      <a:tailEnd type="none" w="med" len="med"/>
+                    </a:lnT>
+                    <a:lnB w="6350" cap="flat" cmpd="sng" algn="ctr">
+                      <a:solidFill>
+                        <a:srgbClr val="D8E0E5"/>
+                      </a:solidFill>
+                      <a:prstDash val="solid"/>
+                      <a:round/>
+                      <a:headEnd type="none" w="med" len="med"/>
+                      <a:tailEnd type="none" w="med" len="med"/>
+                    </a:lnB>
+                    <a:solidFill>
+                      <a:srgbClr val="0B3B3C"/>
+                    </a:solidFill>
+                  </a:tcPr>
+                </a:tc>
+              </a:tr>
+              <a:tr h="384048">
+                <a:tc>
+                  <a:txBody>
+                    <a:bodyPr/>
+                    <a:lstStyle/>
+                    <a:p>
+                      <a:pPr indent="0" marL="0">
+                        <a:buNone/>
+                      </a:pPr>
+                      <a:r>
+                        <a:rPr lang="en-US" sz="1200" dirty="0">
+                          <a:solidFill>
+                            <a:srgbClr val="14212B"/>
+                          </a:solidFill>
+                        </a:rPr>
+                        <a:t>System prompt</a:t>
+                      </a:r>
+                      <a:endParaRPr lang="en-US" sz="1200" dirty="0"/>
+                    </a:p>
+                  </a:txBody>
+                  <a:tcPr marL="91440" marR="91440" marT="45720" marB="45720" anchor="ctr">
+                    <a:lnL w="6350" cap="flat" cmpd="sng" algn="ctr">
+                      <a:solidFill>
+                        <a:srgbClr val="D8E0E5"/>
+                      </a:solidFill>
+                      <a:prstDash val="solid"/>
+                      <a:round/>
+                      <a:headEnd type="none" w="med" len="med"/>
+                      <a:tailEnd type="none" w="med" len="med"/>
+                    </a:lnL>
+                    <a:lnR w="6350" cap="flat" cmpd="sng" algn="ctr">
+                      <a:solidFill>
+                        <a:srgbClr val="D8E0E5"/>
+                      </a:solidFill>
+                      <a:prstDash val="solid"/>
+                      <a:round/>
+                      <a:headEnd type="none" w="med" len="med"/>
+                      <a:tailEnd type="none" w="med" len="med"/>
+                    </a:lnR>
+                    <a:lnT w="6350" cap="flat" cmpd="sng" algn="ctr">
+                      <a:solidFill>
+                        <a:srgbClr val="D8E0E5"/>
+                      </a:solidFill>
+                      <a:prstDash val="solid"/>
+                      <a:round/>
+                      <a:headEnd type="none" w="med" len="med"/>
+                      <a:tailEnd type="none" w="med" len="med"/>
+                    </a:lnT>
+                    <a:lnB w="6350" cap="flat" cmpd="sng" algn="ctr">
+                      <a:solidFill>
+                        <a:srgbClr val="D8E0E5"/>
+                      </a:solidFill>
+                      <a:prstDash val="solid"/>
+                      <a:round/>
+                      <a:headEnd type="none" w="med" len="med"/>
+                      <a:tailEnd type="none" w="med" len="med"/>
+                    </a:lnB>
+                  </a:tcPr>
+                </a:tc>
+                <a:tc>
+                  <a:txBody>
+                    <a:bodyPr/>
+                    <a:lstStyle/>
+                    <a:p>
+                      <a:pPr indent="0" marL="0">
+                        <a:buNone/>
+                      </a:pPr>
+                      <a:r>
+                        <a:rPr lang="en-US" sz="1200" dirty="0">
+                          <a:solidFill>
+                            <a:srgbClr val="14212B"/>
+                          </a:solidFill>
+                        </a:rPr>
+                        <a:t>a system message</a:t>
+                      </a:r>
+                      <a:endParaRPr lang="en-US" sz="1200" dirty="0"/>
+                    </a:p>
+                  </a:txBody>
+                  <a:tcPr marL="91440" marR="91440" marT="45720" marB="45720" anchor="ctr">
+                    <a:lnL w="6350" cap="flat" cmpd="sng" algn="ctr">
+                      <a:solidFill>
+                        <a:srgbClr val="D8E0E5"/>
+                      </a:solidFill>
+                      <a:prstDash val="solid"/>
+                      <a:round/>
+                      <a:headEnd type="none" w="med" len="med"/>
+                      <a:tailEnd type="none" w="med" len="med"/>
+                    </a:lnL>
+                    <a:lnR w="6350" cap="flat" cmpd="sng" algn="ctr">
+                      <a:solidFill>
+                        <a:srgbClr val="D8E0E5"/>
+                      </a:solidFill>
+                      <a:prstDash val="solid"/>
+                      <a:round/>
+                      <a:headEnd type="none" w="med" len="med"/>
+                      <a:tailEnd type="none" w="med" len="med"/>
+                    </a:lnR>
+                    <a:lnT w="6350" cap="flat" cmpd="sng" algn="ctr">
+                      <a:solidFill>
+                        <a:srgbClr val="D8E0E5"/>
+                      </a:solidFill>
+                      <a:prstDash val="solid"/>
+                      <a:round/>
+                      <a:headEnd type="none" w="med" len="med"/>
+                      <a:tailEnd type="none" w="med" len="med"/>
+                    </a:lnT>
+                    <a:lnB w="6350" cap="flat" cmpd="sng" algn="ctr">
+                      <a:solidFill>
+                        <a:srgbClr val="D8E0E5"/>
+                      </a:solidFill>
+                      <a:prstDash val="solid"/>
+                      <a:round/>
+                      <a:headEnd type="none" w="med" len="med"/>
+                      <a:tailEnd type="none" w="med" len="med"/>
+                    </a:lnB>
+                  </a:tcPr>
+                </a:tc>
+                <a:tc>
+                  <a:txBody>
+                    <a:bodyPr/>
+                    <a:lstStyle/>
+                    <a:p>
+                      <a:pPr indent="0" marL="0">
+                        <a:buNone/>
+                      </a:pPr>
+                      <a:r>
+                        <a:rPr lang="en-US" sz="1200" dirty="0">
+                          <a:solidFill>
+                            <a:srgbClr val="14212B"/>
+                          </a:solidFill>
+                        </a:rPr>
+                        <a:t>a system message</a:t>
+                      </a:r>
+                      <a:endParaRPr lang="en-US" sz="1200" dirty="0"/>
+                    </a:p>
+                  </a:txBody>
+                  <a:tcPr marL="91440" marR="91440" marT="45720" marB="45720" anchor="ctr">
+                    <a:lnL w="6350" cap="flat" cmpd="sng" algn="ctr">
+                      <a:solidFill>
+                        <a:srgbClr val="D8E0E5"/>
+                      </a:solidFill>
+                      <a:prstDash val="solid"/>
+                      <a:round/>
+                      <a:headEnd type="none" w="med" len="med"/>
+                      <a:tailEnd type="none" w="med" len="med"/>
+                    </a:lnL>
+                    <a:lnR w="6350" cap="flat" cmpd="sng" algn="ctr">
+                      <a:solidFill>
+                        <a:srgbClr val="D8E0E5"/>
+                      </a:solidFill>
+                      <a:prstDash val="solid"/>
+                      <a:round/>
+                      <a:headEnd type="none" w="med" len="med"/>
+                      <a:tailEnd type="none" w="med" len="med"/>
+                    </a:lnR>
+                    <a:lnT w="6350" cap="flat" cmpd="sng" algn="ctr">
+                      <a:solidFill>
+                        <a:srgbClr val="D8E0E5"/>
+                      </a:solidFill>
+                      <a:prstDash val="solid"/>
+                      <a:round/>
+                      <a:headEnd type="none" w="med" len="med"/>
+                      <a:tailEnd type="none" w="med" len="med"/>
+                    </a:lnT>
+                    <a:lnB w="6350" cap="flat" cmpd="sng" algn="ctr">
+                      <a:solidFill>
+                        <a:srgbClr val="D8E0E5"/>
+                      </a:solidFill>
+                      <a:prstDash val="solid"/>
+                      <a:round/>
+                      <a:headEnd type="none" w="med" len="med"/>
+                      <a:tailEnd type="none" w="med" len="med"/>
+                    </a:lnB>
+                  </a:tcPr>
+                </a:tc>
+                <a:tc>
+                  <a:txBody>
+                    <a:bodyPr/>
+                    <a:lstStyle/>
+                    <a:p>
+                      <a:pPr indent="0" marL="0">
+                        <a:buNone/>
+                      </a:pPr>
+                      <a:r>
+                        <a:rPr lang="en-US" sz="1200" dirty="0">
+                          <a:solidFill>
+                            <a:srgbClr val="14212B"/>
+                          </a:solidFill>
+                        </a:rPr>
+                        <a:t>top-level system field</a:t>
+                      </a:r>
+                      <a:endParaRPr lang="en-US" sz="1200" dirty="0"/>
+                    </a:p>
+                  </a:txBody>
+                  <a:tcPr marL="91440" marR="91440" marT="45720" marB="45720" anchor="ctr">
+                    <a:lnL w="6350" cap="flat" cmpd="sng" algn="ctr">
+                      <a:solidFill>
+                        <a:srgbClr val="D8E0E5"/>
+                      </a:solidFill>
+                      <a:prstDash val="solid"/>
+                      <a:round/>
+                      <a:headEnd type="none" w="med" len="med"/>
+                      <a:tailEnd type="none" w="med" len="med"/>
+                    </a:lnL>
+                    <a:lnR w="6350" cap="flat" cmpd="sng" algn="ctr">
+                      <a:solidFill>
+                        <a:srgbClr val="D8E0E5"/>
+                      </a:solidFill>
+                      <a:prstDash val="solid"/>
+                      <a:round/>
+                      <a:headEnd type="none" w="med" len="med"/>
+                      <a:tailEnd type="none" w="med" len="med"/>
+                    </a:lnR>
+                    <a:lnT w="6350" cap="flat" cmpd="sng" algn="ctr">
+                      <a:solidFill>
+                        <a:srgbClr val="D8E0E5"/>
+                      </a:solidFill>
+                      <a:prstDash val="solid"/>
+                      <a:round/>
+                      <a:headEnd type="none" w="med" len="med"/>
+                      <a:tailEnd type="none" w="med" len="med"/>
+                    </a:lnT>
+                    <a:lnB w="6350" cap="flat" cmpd="sng" algn="ctr">
+                      <a:solidFill>
+                        <a:srgbClr val="D8E0E5"/>
+                      </a:solidFill>
+                      <a:prstDash val="solid"/>
+                      <a:round/>
+                      <a:headEnd type="none" w="med" len="med"/>
+                      <a:tailEnd type="none" w="med" len="med"/>
+                    </a:lnB>
+                  </a:tcPr>
+                </a:tc>
+              </a:tr>
+              <a:tr h="384048">
+                <a:tc>
+                  <a:txBody>
+                    <a:bodyPr/>
+                    <a:lstStyle/>
+                    <a:p>
+                      <a:pPr indent="0" marL="0">
+                        <a:buNone/>
+                      </a:pPr>
+                      <a:r>
+                        <a:rPr lang="en-US" sz="1200" dirty="0">
+                          <a:solidFill>
+                            <a:srgbClr val="14212B"/>
+                          </a:solidFill>
+                        </a:rPr>
+                        <a:t>Tool arguments</a:t>
+                      </a:r>
+                      <a:endParaRPr lang="en-US" sz="1200" dirty="0"/>
+                    </a:p>
+                  </a:txBody>
+                  <a:tcPr marL="91440" marR="91440" marT="45720" marB="45720" anchor="ctr">
+                    <a:lnL w="6350" cap="flat" cmpd="sng" algn="ctr">
+                      <a:solidFill>
+                        <a:srgbClr val="D8E0E5"/>
+                      </a:solidFill>
+                      <a:prstDash val="solid"/>
+                      <a:round/>
+                      <a:headEnd type="none" w="med" len="med"/>
+                      <a:tailEnd type="none" w="med" len="med"/>
+                    </a:lnL>
+                    <a:lnR w="6350" cap="flat" cmpd="sng" algn="ctr">
+                      <a:solidFill>
+                        <a:srgbClr val="D8E0E5"/>
+                      </a:solidFill>
+                      <a:prstDash val="solid"/>
+                      <a:round/>
+                      <a:headEnd type="none" w="med" len="med"/>
+                      <a:tailEnd type="none" w="med" len="med"/>
+                    </a:lnR>
+                    <a:lnT w="6350" cap="flat" cmpd="sng" algn="ctr">
+                      <a:solidFill>
+                        <a:srgbClr val="D8E0E5"/>
+                      </a:solidFill>
+                      <a:prstDash val="solid"/>
+                      <a:round/>
+                      <a:headEnd type="none" w="med" len="med"/>
+                      <a:tailEnd type="none" w="med" len="med"/>
+                    </a:lnT>
+                    <a:lnB w="6350" cap="flat" cmpd="sng" algn="ctr">
+                      <a:solidFill>
+                        <a:srgbClr val="D8E0E5"/>
+                      </a:solidFill>
+                      <a:prstDash val="solid"/>
+                      <a:round/>
+                      <a:headEnd type="none" w="med" len="med"/>
+                      <a:tailEnd type="none" w="med" len="med"/>
+                    </a:lnB>
+                  </a:tcPr>
+                </a:tc>
+                <a:tc>
+                  <a:txBody>
+                    <a:bodyPr/>
+                    <a:lstStyle/>
+                    <a:p>
+                      <a:pPr indent="0" marL="0">
+                        <a:buNone/>
+                      </a:pPr>
+                      <a:r>
+                        <a:rPr lang="en-US" sz="1200" dirty="0">
+                          <a:solidFill>
+                            <a:srgbClr val="14212B"/>
+                          </a:solidFill>
+                        </a:rPr>
+                        <a:t>JSON object</a:t>
+                      </a:r>
+                      <a:endParaRPr lang="en-US" sz="1200" dirty="0"/>
+                    </a:p>
+                  </a:txBody>
+                  <a:tcPr marL="91440" marR="91440" marT="45720" marB="45720" anchor="ctr">
+                    <a:lnL w="6350" cap="flat" cmpd="sng" algn="ctr">
+                      <a:solidFill>
+                        <a:srgbClr val="D8E0E5"/>
+                      </a:solidFill>
+                      <a:prstDash val="solid"/>
+                      <a:round/>
+                      <a:headEnd type="none" w="med" len="med"/>
+                      <a:tailEnd type="none" w="med" len="med"/>
+                    </a:lnL>
+                    <a:lnR w="6350" cap="flat" cmpd="sng" algn="ctr">
+                      <a:solidFill>
+                        <a:srgbClr val="D8E0E5"/>
+                      </a:solidFill>
+                      <a:prstDash val="solid"/>
+                      <a:round/>
+                      <a:headEnd type="none" w="med" len="med"/>
+                      <a:tailEnd type="none" w="med" len="med"/>
+                    </a:lnR>
+                    <a:lnT w="6350" cap="flat" cmpd="sng" algn="ctr">
+                      <a:solidFill>
+                        <a:srgbClr val="D8E0E5"/>
+                      </a:solidFill>
+                      <a:prstDash val="solid"/>
+                      <a:round/>
+                      <a:headEnd type="none" w="med" len="med"/>
+                      <a:tailEnd type="none" w="med" len="med"/>
+                    </a:lnT>
+                    <a:lnB w="6350" cap="flat" cmpd="sng" algn="ctr">
+                      <a:solidFill>
+                        <a:srgbClr val="D8E0E5"/>
+                      </a:solidFill>
+                      <a:prstDash val="solid"/>
+                      <a:round/>
+                      <a:headEnd type="none" w="med" len="med"/>
+                      <a:tailEnd type="none" w="med" len="med"/>
+                    </a:lnB>
+                  </a:tcPr>
+                </a:tc>
+                <a:tc>
+                  <a:txBody>
+                    <a:bodyPr/>
+                    <a:lstStyle/>
+                    <a:p>
+                      <a:pPr indent="0" marL="0">
+                        <a:buNone/>
+                      </a:pPr>
+                      <a:r>
+                        <a:rPr lang="en-US" sz="1200" dirty="0">
+                          <a:solidFill>
+                            <a:srgbClr val="14212B"/>
+                          </a:solidFill>
+                        </a:rPr>
+                        <a:t>JSON string inside JSON</a:t>
+                      </a:r>
+                      <a:endParaRPr lang="en-US" sz="1200" dirty="0"/>
+                    </a:p>
+                  </a:txBody>
+                  <a:tcPr marL="91440" marR="91440" marT="45720" marB="45720" anchor="ctr">
+                    <a:lnL w="6350" cap="flat" cmpd="sng" algn="ctr">
+                      <a:solidFill>
+                        <a:srgbClr val="D8E0E5"/>
+                      </a:solidFill>
+                      <a:prstDash val="solid"/>
+                      <a:round/>
+                      <a:headEnd type="none" w="med" len="med"/>
+                      <a:tailEnd type="none" w="med" len="med"/>
+                    </a:lnL>
+                    <a:lnR w="6350" cap="flat" cmpd="sng" algn="ctr">
+                      <a:solidFill>
+                        <a:srgbClr val="D8E0E5"/>
+                      </a:solidFill>
+                      <a:prstDash val="solid"/>
+                      <a:round/>
+                      <a:headEnd type="none" w="med" len="med"/>
+                      <a:tailEnd type="none" w="med" len="med"/>
+                    </a:lnR>
+                    <a:lnT w="6350" cap="flat" cmpd="sng" algn="ctr">
+                      <a:solidFill>
+                        <a:srgbClr val="D8E0E5"/>
+                      </a:solidFill>
+                      <a:prstDash val="solid"/>
+                      <a:round/>
+                      <a:headEnd type="none" w="med" len="med"/>
+                      <a:tailEnd type="none" w="med" len="med"/>
+                    </a:lnT>
+                    <a:lnB w="6350" cap="flat" cmpd="sng" algn="ctr">
+                      <a:solidFill>
+                        <a:srgbClr val="D8E0E5"/>
+                      </a:solidFill>
+                      <a:prstDash val="solid"/>
+                      <a:round/>
+                      <a:headEnd type="none" w="med" len="med"/>
+                      <a:tailEnd type="none" w="med" len="med"/>
+                    </a:lnB>
+                  </a:tcPr>
+                </a:tc>
+                <a:tc>
+                  <a:txBody>
+                    <a:bodyPr/>
+                    <a:lstStyle/>
+                    <a:p>
+                      <a:pPr indent="0" marL="0">
+                        <a:buNone/>
+                      </a:pPr>
+                      <a:r>
+                        <a:rPr lang="en-US" sz="1200" dirty="0">
+                          <a:solidFill>
+                            <a:srgbClr val="14212B"/>
+                          </a:solidFill>
+                        </a:rPr>
+                        <a:t>JSON object (input)</a:t>
+                      </a:r>
+                      <a:endParaRPr lang="en-US" sz="1200" dirty="0"/>
+                    </a:p>
+                  </a:txBody>
+                  <a:tcPr marL="91440" marR="91440" marT="45720" marB="45720" anchor="ctr">
+                    <a:lnL w="6350" cap="flat" cmpd="sng" algn="ctr">
+                      <a:solidFill>
+                        <a:srgbClr val="D8E0E5"/>
+                      </a:solidFill>
+                      <a:prstDash val="solid"/>
+                      <a:round/>
+                      <a:headEnd type="none" w="med" len="med"/>
+                      <a:tailEnd type="none" w="med" len="med"/>
+                    </a:lnL>
+                    <a:lnR w="6350" cap="flat" cmpd="sng" algn="ctr">
+                      <a:solidFill>
+                        <a:srgbClr val="D8E0E5"/>
+                      </a:solidFill>
+                      <a:prstDash val="solid"/>
+                      <a:round/>
+                      <a:headEnd type="none" w="med" len="med"/>
+                      <a:tailEnd type="none" w="med" len="med"/>
+                    </a:lnR>
+                    <a:lnT w="6350" cap="flat" cmpd="sng" algn="ctr">
+                      <a:solidFill>
+                        <a:srgbClr val="D8E0E5"/>
+                      </a:solidFill>
+                      <a:prstDash val="solid"/>
+                      <a:round/>
+                      <a:headEnd type="none" w="med" len="med"/>
+                      <a:tailEnd type="none" w="med" len="med"/>
+                    </a:lnT>
+                    <a:lnB w="6350" cap="flat" cmpd="sng" algn="ctr">
+                      <a:solidFill>
+                        <a:srgbClr val="D8E0E5"/>
+                      </a:solidFill>
+                      <a:prstDash val="solid"/>
+                      <a:round/>
+                      <a:headEnd type="none" w="med" len="med"/>
+                      <a:tailEnd type="none" w="med" len="med"/>
+                    </a:lnB>
+                  </a:tcPr>
+                </a:tc>
+              </a:tr>
+              <a:tr h="384048">
+                <a:tc>
+                  <a:txBody>
+                    <a:bodyPr/>
+                    <a:lstStyle/>
+                    <a:p>
+                      <a:pPr indent="0" marL="0">
+                        <a:buNone/>
+                      </a:pPr>
+                      <a:r>
+                        <a:rPr lang="en-US" sz="1200" dirty="0">
+                          <a:solidFill>
+                            <a:srgbClr val="14212B"/>
+                          </a:solidFill>
+                        </a:rPr>
+                        <a:t>Tool result</a:t>
+                      </a:r>
+                      <a:endParaRPr lang="en-US" sz="1200" dirty="0"/>
+                    </a:p>
+                  </a:txBody>
+                  <a:tcPr marL="91440" marR="91440" marT="45720" marB="45720" anchor="ctr">
+                    <a:lnL w="6350" cap="flat" cmpd="sng" algn="ctr">
+                      <a:solidFill>
+                        <a:srgbClr val="D8E0E5"/>
+                      </a:solidFill>
+                      <a:prstDash val="solid"/>
+                      <a:round/>
+                      <a:headEnd type="none" w="med" len="med"/>
+                      <a:tailEnd type="none" w="med" len="med"/>
+                    </a:lnL>
+                    <a:lnR w="6350" cap="flat" cmpd="sng" algn="ctr">
+                      <a:solidFill>
+                        <a:srgbClr val="D8E0E5"/>
+                      </a:solidFill>
+                      <a:prstDash val="solid"/>
+                      <a:round/>
+                      <a:headEnd type="none" w="med" len="med"/>
+                      <a:tailEnd type="none" w="med" len="med"/>
+                    </a:lnR>
+                    <a:lnT w="6350" cap="flat" cmpd="sng" algn="ctr">
+                      <a:solidFill>
+                        <a:srgbClr val="D8E0E5"/>
+                      </a:solidFill>
+                      <a:prstDash val="solid"/>
+                      <a:round/>
+                      <a:headEnd type="none" w="med" len="med"/>
+                      <a:tailEnd type="none" w="med" len="med"/>
+                    </a:lnT>
+                    <a:lnB w="6350" cap="flat" cmpd="sng" algn="ctr">
+                      <a:solidFill>
+                        <a:srgbClr val="D8E0E5"/>
+                      </a:solidFill>
+                      <a:prstDash val="solid"/>
+                      <a:round/>
+                      <a:headEnd type="none" w="med" len="med"/>
+                      <a:tailEnd type="none" w="med" len="med"/>
+                    </a:lnB>
+                  </a:tcPr>
+                </a:tc>
+                <a:tc>
+                  <a:txBody>
+                    <a:bodyPr/>
+                    <a:lstStyle/>
+                    <a:p>
+                      <a:pPr indent="0" marL="0">
+                        <a:buNone/>
+                      </a:pPr>
+                      <a:r>
+                        <a:rPr lang="en-US" sz="1200" dirty="0">
+                          <a:solidFill>
+                            <a:srgbClr val="14212B"/>
+                          </a:solidFill>
+                        </a:rPr>
+                        <a:t>tool message, tool_name</a:t>
+                      </a:r>
+                      <a:endParaRPr lang="en-US" sz="1200" dirty="0"/>
+                    </a:p>
+                  </a:txBody>
+                  <a:tcPr marL="91440" marR="91440" marT="45720" marB="45720" anchor="ctr">
+                    <a:lnL w="6350" cap="flat" cmpd="sng" algn="ctr">
+                      <a:solidFill>
+                        <a:srgbClr val="D8E0E5"/>
+                      </a:solidFill>
+                      <a:prstDash val="solid"/>
+                      <a:round/>
+                      <a:headEnd type="none" w="med" len="med"/>
+                      <a:tailEnd type="none" w="med" len="med"/>
+                    </a:lnL>
+                    <a:lnR w="6350" cap="flat" cmpd="sng" algn="ctr">
+                      <a:solidFill>
+                        <a:srgbClr val="D8E0E5"/>
+                      </a:solidFill>
+                      <a:prstDash val="solid"/>
+                      <a:round/>
+                      <a:headEnd type="none" w="med" len="med"/>
+                      <a:tailEnd type="none" w="med" len="med"/>
+                    </a:lnR>
+                    <a:lnT w="6350" cap="flat" cmpd="sng" algn="ctr">
+                      <a:solidFill>
+                        <a:srgbClr val="D8E0E5"/>
+                      </a:solidFill>
+                      <a:prstDash val="solid"/>
+                      <a:round/>
+                      <a:headEnd type="none" w="med" len="med"/>
+                      <a:tailEnd type="none" w="med" len="med"/>
+                    </a:lnT>
+                    <a:lnB w="6350" cap="flat" cmpd="sng" algn="ctr">
+                      <a:solidFill>
+                        <a:srgbClr val="D8E0E5"/>
+                      </a:solidFill>
+                      <a:prstDash val="solid"/>
+                      <a:round/>
+                      <a:headEnd type="none" w="med" len="med"/>
+                      <a:tailEnd type="none" w="med" len="med"/>
+                    </a:lnB>
+                  </a:tcPr>
+                </a:tc>
+                <a:tc>
+                  <a:txBody>
+                    <a:bodyPr/>
+                    <a:lstStyle/>
+                    <a:p>
+                      <a:pPr indent="0" marL="0">
+                        <a:buNone/>
+                      </a:pPr>
+                      <a:r>
+                        <a:rPr lang="en-US" sz="1200" dirty="0">
+                          <a:solidFill>
+                            <a:srgbClr val="14212B"/>
+                          </a:solidFill>
+                        </a:rPr>
+                        <a:t>tool message, tool_call_id</a:t>
+                      </a:r>
+                      <a:endParaRPr lang="en-US" sz="1200" dirty="0"/>
+                    </a:p>
+                  </a:txBody>
+                  <a:tcPr marL="91440" marR="91440" marT="45720" marB="45720" anchor="ctr">
+                    <a:lnL w="6350" cap="flat" cmpd="sng" algn="ctr">
+                      <a:solidFill>
+                        <a:srgbClr val="D8E0E5"/>
+                      </a:solidFill>
+                      <a:prstDash val="solid"/>
+                      <a:round/>
+                      <a:headEnd type="none" w="med" len="med"/>
+                      <a:tailEnd type="none" w="med" len="med"/>
+                    </a:lnL>
+                    <a:lnR w="6350" cap="flat" cmpd="sng" algn="ctr">
+                      <a:solidFill>
+                        <a:srgbClr val="D8E0E5"/>
+                      </a:solidFill>
+                      <a:prstDash val="solid"/>
+                      <a:round/>
+                      <a:headEnd type="none" w="med" len="med"/>
+                      <a:tailEnd type="none" w="med" len="med"/>
+                    </a:lnR>
+                    <a:lnT w="6350" cap="flat" cmpd="sng" algn="ctr">
+                      <a:solidFill>
+                        <a:srgbClr val="D8E0E5"/>
+                      </a:solidFill>
+                      <a:prstDash val="solid"/>
+                      <a:round/>
+                      <a:headEnd type="none" w="med" len="med"/>
+                      <a:tailEnd type="none" w="med" len="med"/>
+                    </a:lnT>
+                    <a:lnB w="6350" cap="flat" cmpd="sng" algn="ctr">
+                      <a:solidFill>
+                        <a:srgbClr val="D8E0E5"/>
+                      </a:solidFill>
+                      <a:prstDash val="solid"/>
+                      <a:round/>
+                      <a:headEnd type="none" w="med" len="med"/>
+                      <a:tailEnd type="none" w="med" len="med"/>
+                    </a:lnB>
+                  </a:tcPr>
+                </a:tc>
+                <a:tc>
+                  <a:txBody>
+                    <a:bodyPr/>
+                    <a:lstStyle/>
+                    <a:p>
+                      <a:pPr indent="0" marL="0">
+                        <a:buNone/>
+                      </a:pPr>
+                      <a:r>
+                        <a:rPr lang="en-US" sz="1200" dirty="0">
+                          <a:solidFill>
+                            <a:srgbClr val="14212B"/>
+                          </a:solidFill>
+                        </a:rPr>
+                        <a:t>tool_result in a user message</a:t>
+                      </a:r>
+                      <a:endParaRPr lang="en-US" sz="1200" dirty="0"/>
+                    </a:p>
+                  </a:txBody>
+                  <a:tcPr marL="91440" marR="91440" marT="45720" marB="45720" anchor="ctr">
+                    <a:lnL w="6350" cap="flat" cmpd="sng" algn="ctr">
+                      <a:solidFill>
+                        <a:srgbClr val="D8E0E5"/>
+                      </a:solidFill>
+                      <a:prstDash val="solid"/>
+                      <a:round/>
+                      <a:headEnd type="none" w="med" len="med"/>
+                      <a:tailEnd type="none" w="med" len="med"/>
+                    </a:lnL>
+                    <a:lnR w="6350" cap="flat" cmpd="sng" algn="ctr">
+                      <a:solidFill>
+                        <a:srgbClr val="D8E0E5"/>
+                      </a:solidFill>
+                      <a:prstDash val="solid"/>
+                      <a:round/>
+                      <a:headEnd type="none" w="med" len="med"/>
+                      <a:tailEnd type="none" w="med" len="med"/>
+                    </a:lnR>
+                    <a:lnT w="6350" cap="flat" cmpd="sng" algn="ctr">
+                      <a:solidFill>
+                        <a:srgbClr val="D8E0E5"/>
+                      </a:solidFill>
+                      <a:prstDash val="solid"/>
+                      <a:round/>
+                      <a:headEnd type="none" w="med" len="med"/>
+                      <a:tailEnd type="none" w="med" len="med"/>
+                    </a:lnT>
+                    <a:lnB w="6350" cap="flat" cmpd="sng" algn="ctr">
+                      <a:solidFill>
+                        <a:srgbClr val="D8E0E5"/>
+                      </a:solidFill>
+                      <a:prstDash val="solid"/>
+                      <a:round/>
+                      <a:headEnd type="none" w="med" len="med"/>
+                      <a:tailEnd type="none" w="med" len="med"/>
+                    </a:lnB>
+                  </a:tcPr>
+                </a:tc>
+              </a:tr>
+              <a:tr h="384048">
+                <a:tc>
+                  <a:txBody>
+                    <a:bodyPr/>
+                    <a:lstStyle/>
+                    <a:p>
+                      <a:pPr indent="0" marL="0">
+                        <a:buNone/>
+                      </a:pPr>
+                      <a:r>
+                        <a:rPr lang="en-US" sz="1200" dirty="0">
+                          <a:solidFill>
+                            <a:srgbClr val="14212B"/>
+                          </a:solidFill>
+                        </a:rPr>
+                        <a:t>Call IDs</a:t>
+                      </a:r>
+                      <a:endParaRPr lang="en-US" sz="1200" dirty="0"/>
+                    </a:p>
+                  </a:txBody>
+                  <a:tcPr marL="91440" marR="91440" marT="45720" marB="45720" anchor="ctr">
+                    <a:lnL w="6350" cap="flat" cmpd="sng" algn="ctr">
+                      <a:solidFill>
+                        <a:srgbClr val="D8E0E5"/>
+                      </a:solidFill>
+                      <a:prstDash val="solid"/>
+                      <a:round/>
+                      <a:headEnd type="none" w="med" len="med"/>
+                      <a:tailEnd type="none" w="med" len="med"/>
+                    </a:lnL>
+                    <a:lnR w="6350" cap="flat" cmpd="sng" algn="ctr">
+                      <a:solidFill>
+                        <a:srgbClr val="D8E0E5"/>
+                      </a:solidFill>
+                      <a:prstDash val="solid"/>
+                      <a:round/>
+                      <a:headEnd type="none" w="med" len="med"/>
+                      <a:tailEnd type="none" w="med" len="med"/>
+                    </a:lnR>
+                    <a:lnT w="6350" cap="flat" cmpd="sng" algn="ctr">
+                      <a:solidFill>
+                        <a:srgbClr val="D8E0E5"/>
+                      </a:solidFill>
+                      <a:prstDash val="solid"/>
+                      <a:round/>
+                      <a:headEnd type="none" w="med" len="med"/>
+                      <a:tailEnd type="none" w="med" len="med"/>
+                    </a:lnT>
+                    <a:lnB w="6350" cap="flat" cmpd="sng" algn="ctr">
+                      <a:solidFill>
+                        <a:srgbClr val="D8E0E5"/>
+                      </a:solidFill>
+                      <a:prstDash val="solid"/>
+                      <a:round/>
+                      <a:headEnd type="none" w="med" len="med"/>
+                      <a:tailEnd type="none" w="med" len="med"/>
+                    </a:lnB>
+                  </a:tcPr>
+                </a:tc>
+                <a:tc>
+                  <a:txBody>
+                    <a:bodyPr/>
+                    <a:lstStyle/>
+                    <a:p>
+                      <a:pPr indent="0" marL="0">
+                        <a:buNone/>
+                      </a:pPr>
+                      <a:r>
+                        <a:rPr lang="en-US" sz="1200" dirty="0">
+                          <a:solidFill>
+                            <a:srgbClr val="14212B"/>
+                          </a:solidFill>
+                        </a:rPr>
+                        <a:t>none; agent invents</a:t>
+                      </a:r>
+                      <a:endParaRPr lang="en-US" sz="1200" dirty="0"/>
+                    </a:p>
+                  </a:txBody>
+                  <a:tcPr marL="91440" marR="91440" marT="45720" marB="45720" anchor="ctr">
+                    <a:lnL w="6350" cap="flat" cmpd="sng" algn="ctr">
+                      <a:solidFill>
+                        <a:srgbClr val="D8E0E5"/>
+                      </a:solidFill>
+                      <a:prstDash val="solid"/>
+                      <a:round/>
+                      <a:headEnd type="none" w="med" len="med"/>
+                      <a:tailEnd type="none" w="med" len="med"/>
+                    </a:lnL>
+                    <a:lnR w="6350" cap="flat" cmpd="sng" algn="ctr">
+                      <a:solidFill>
+                        <a:srgbClr val="D8E0E5"/>
+                      </a:solidFill>
+                      <a:prstDash val="solid"/>
+                      <a:round/>
+                      <a:headEnd type="none" w="med" len="med"/>
+                      <a:tailEnd type="none" w="med" len="med"/>
+                    </a:lnR>
+                    <a:lnT w="6350" cap="flat" cmpd="sng" algn="ctr">
+                      <a:solidFill>
+                        <a:srgbClr val="D8E0E5"/>
+                      </a:solidFill>
+                      <a:prstDash val="solid"/>
+                      <a:round/>
+                      <a:headEnd type="none" w="med" len="med"/>
+                      <a:tailEnd type="none" w="med" len="med"/>
+                    </a:lnT>
+                    <a:lnB w="6350" cap="flat" cmpd="sng" algn="ctr">
+                      <a:solidFill>
+                        <a:srgbClr val="D8E0E5"/>
+                      </a:solidFill>
+                      <a:prstDash val="solid"/>
+                      <a:round/>
+                      <a:headEnd type="none" w="med" len="med"/>
+                      <a:tailEnd type="none" w="med" len="med"/>
+                    </a:lnB>
+                  </a:tcPr>
+                </a:tc>
+                <a:tc>
+                  <a:txBody>
+                    <a:bodyPr/>
+                    <a:lstStyle/>
+                    <a:p>
+                      <a:pPr indent="0" marL="0">
+                        <a:buNone/>
+                      </a:pPr>
+                      <a:r>
+                        <a:rPr lang="en-US" sz="1200" dirty="0">
+                          <a:solidFill>
+                            <a:srgbClr val="14212B"/>
+                          </a:solidFill>
+                        </a:rPr>
+                        <a:t>required</a:t>
+                      </a:r>
+                      <a:endParaRPr lang="en-US" sz="1200" dirty="0"/>
+                    </a:p>
+                  </a:txBody>
+                  <a:tcPr marL="91440" marR="91440" marT="45720" marB="45720" anchor="ctr">
+                    <a:lnL w="6350" cap="flat" cmpd="sng" algn="ctr">
+                      <a:solidFill>
+                        <a:srgbClr val="D8E0E5"/>
+                      </a:solidFill>
+                      <a:prstDash val="solid"/>
+                      <a:round/>
+                      <a:headEnd type="none" w="med" len="med"/>
+                      <a:tailEnd type="none" w="med" len="med"/>
+                    </a:lnL>
+                    <a:lnR w="6350" cap="flat" cmpd="sng" algn="ctr">
+                      <a:solidFill>
+                        <a:srgbClr val="D8E0E5"/>
+                      </a:solidFill>
+                      <a:prstDash val="solid"/>
+                      <a:round/>
+                      <a:headEnd type="none" w="med" len="med"/>
+                      <a:tailEnd type="none" w="med" len="med"/>
+                    </a:lnR>
+                    <a:lnT w="6350" cap="flat" cmpd="sng" algn="ctr">
+                      <a:solidFill>
+                        <a:srgbClr val="D8E0E5"/>
+                      </a:solidFill>
+                      <a:prstDash val="solid"/>
+                      <a:round/>
+                      <a:headEnd type="none" w="med" len="med"/>
+                      <a:tailEnd type="none" w="med" len="med"/>
+                    </a:lnT>
+                    <a:lnB w="6350" cap="flat" cmpd="sng" algn="ctr">
+                      <a:solidFill>
+                        <a:srgbClr val="D8E0E5"/>
+                      </a:solidFill>
+                      <a:prstDash val="solid"/>
+                      <a:round/>
+                      <a:headEnd type="none" w="med" len="med"/>
+                      <a:tailEnd type="none" w="med" len="med"/>
+                    </a:lnB>
+                  </a:tcPr>
+                </a:tc>
+                <a:tc>
+                  <a:txBody>
+                    <a:bodyPr/>
+                    <a:lstStyle/>
+                    <a:p>
+                      <a:pPr indent="0" marL="0">
+                        <a:buNone/>
+                      </a:pPr>
+                      <a:r>
+                        <a:rPr lang="en-US" sz="1200" dirty="0">
+                          <a:solidFill>
+                            <a:srgbClr val="14212B"/>
+                          </a:solidFill>
+                        </a:rPr>
+                        <a:t>required</a:t>
+                      </a:r>
+                      <a:endParaRPr lang="en-US" sz="1200" dirty="0"/>
+                    </a:p>
+                  </a:txBody>
+                  <a:tcPr marL="91440" marR="91440" marT="45720" marB="45720" anchor="ctr">
+                    <a:lnL w="6350" cap="flat" cmpd="sng" algn="ctr">
+                      <a:solidFill>
+                        <a:srgbClr val="D8E0E5"/>
+                      </a:solidFill>
+                      <a:prstDash val="solid"/>
+                      <a:round/>
+                      <a:headEnd type="none" w="med" len="med"/>
+                      <a:tailEnd type="none" w="med" len="med"/>
+                    </a:lnL>
+                    <a:lnR w="6350" cap="flat" cmpd="sng" algn="ctr">
+                      <a:solidFill>
+                        <a:srgbClr val="D8E0E5"/>
+                      </a:solidFill>
+                      <a:prstDash val="solid"/>
+                      <a:round/>
+                      <a:headEnd type="none" w="med" len="med"/>
+                      <a:tailEnd type="none" w="med" len="med"/>
+                    </a:lnR>
+                    <a:lnT w="6350" cap="flat" cmpd="sng" algn="ctr">
+                      <a:solidFill>
+                        <a:srgbClr val="D8E0E5"/>
+                      </a:solidFill>
+                      <a:prstDash val="solid"/>
+                      <a:round/>
+                      <a:headEnd type="none" w="med" len="med"/>
+                      <a:tailEnd type="none" w="med" len="med"/>
+                    </a:lnT>
+                    <a:lnB w="6350" cap="flat" cmpd="sng" algn="ctr">
+                      <a:solidFill>
+                        <a:srgbClr val="D8E0E5"/>
+                      </a:solidFill>
+                      <a:prstDash val="solid"/>
+                      <a:round/>
+                      <a:headEnd type="none" w="med" len="med"/>
+                      <a:tailEnd type="none" w="med" len="med"/>
+                    </a:lnB>
+                  </a:tcPr>
+                </a:tc>
+              </a:tr>
+              <a:tr h="384048">
+                <a:tc>
+                  <a:txBody>
+                    <a:bodyPr/>
+                    <a:lstStyle/>
+                    <a:p>
+                      <a:pPr indent="0" marL="0">
+                        <a:buNone/>
+                      </a:pPr>
+                      <a:r>
+                        <a:rPr lang="en-US" sz="1200" dirty="0">
+                          <a:solidFill>
+                            <a:srgbClr val="14212B"/>
+                          </a:solidFill>
+                        </a:rPr>
+                        <a:t>Output cap</a:t>
+                      </a:r>
+                      <a:endParaRPr lang="en-US" sz="1200" dirty="0"/>
+                    </a:p>
+                  </a:txBody>
+                  <a:tcPr marL="91440" marR="91440" marT="45720" marB="45720" anchor="ctr">
+                    <a:lnL w="6350" cap="flat" cmpd="sng" algn="ctr">
+                      <a:solidFill>
+                        <a:srgbClr val="D8E0E5"/>
+                      </a:solidFill>
+                      <a:prstDash val="solid"/>
+                      <a:round/>
+                      <a:headEnd type="none" w="med" len="med"/>
+                      <a:tailEnd type="none" w="med" len="med"/>
+                    </a:lnL>
+                    <a:lnR w="6350" cap="flat" cmpd="sng" algn="ctr">
+                      <a:solidFill>
+                        <a:srgbClr val="D8E0E5"/>
+                      </a:solidFill>
+                      <a:prstDash val="solid"/>
+                      <a:round/>
+                      <a:headEnd type="none" w="med" len="med"/>
+                      <a:tailEnd type="none" w="med" len="med"/>
+                    </a:lnR>
+                    <a:lnT w="6350" cap="flat" cmpd="sng" algn="ctr">
+                      <a:solidFill>
+                        <a:srgbClr val="D8E0E5"/>
+                      </a:solidFill>
+                      <a:prstDash val="solid"/>
+                      <a:round/>
+                      <a:headEnd type="none" w="med" len="med"/>
+                      <a:tailEnd type="none" w="med" len="med"/>
+                    </a:lnT>
+                    <a:lnB w="6350" cap="flat" cmpd="sng" algn="ctr">
+                      <a:solidFill>
+                        <a:srgbClr val="D8E0E5"/>
+                      </a:solidFill>
+                      <a:prstDash val="solid"/>
+                      <a:round/>
+                      <a:headEnd type="none" w="med" len="med"/>
+                      <a:tailEnd type="none" w="med" len="med"/>
+                    </a:lnB>
+                  </a:tcPr>
+                </a:tc>
+                <a:tc>
+                  <a:txBody>
+                    <a:bodyPr/>
+                    <a:lstStyle/>
+                    <a:p>
+                      <a:pPr indent="0" marL="0">
+                        <a:buNone/>
+                      </a:pPr>
+                      <a:r>
+                        <a:rPr lang="en-US" sz="1200" dirty="0">
+                          <a:solidFill>
+                            <a:srgbClr val="14212B"/>
+                          </a:solidFill>
+                        </a:rPr>
+                        <a:t>num_predict</a:t>
+                      </a:r>
+                      <a:endParaRPr lang="en-US" sz="1200" dirty="0"/>
+                    </a:p>
+                  </a:txBody>
+                  <a:tcPr marL="91440" marR="91440" marT="45720" marB="45720" anchor="ctr">
+                    <a:lnL w="6350" cap="flat" cmpd="sng" algn="ctr">
+                      <a:solidFill>
+                        <a:srgbClr val="D8E0E5"/>
+                      </a:solidFill>
+                      <a:prstDash val="solid"/>
+                      <a:round/>
+                      <a:headEnd type="none" w="med" len="med"/>
+                      <a:tailEnd type="none" w="med" len="med"/>
+                    </a:lnL>
+                    <a:lnR w="6350" cap="flat" cmpd="sng" algn="ctr">
+                      <a:solidFill>
+                        <a:srgbClr val="D8E0E5"/>
+                      </a:solidFill>
+                      <a:prstDash val="solid"/>
+                      <a:round/>
+                      <a:headEnd type="none" w="med" len="med"/>
+                      <a:tailEnd type="none" w="med" len="med"/>
+                    </a:lnR>
+                    <a:lnT w="6350" cap="flat" cmpd="sng" algn="ctr">
+                      <a:solidFill>
+                        <a:srgbClr val="D8E0E5"/>
+                      </a:solidFill>
+                      <a:prstDash val="solid"/>
+                      <a:round/>
+                      <a:headEnd type="none" w="med" len="med"/>
+                      <a:tailEnd type="none" w="med" len="med"/>
+                    </a:lnT>
+                    <a:lnB w="6350" cap="flat" cmpd="sng" algn="ctr">
+                      <a:solidFill>
+                        <a:srgbClr val="D8E0E5"/>
+                      </a:solidFill>
+                      <a:prstDash val="solid"/>
+                      <a:round/>
+                      <a:headEnd type="none" w="med" len="med"/>
+                      <a:tailEnd type="none" w="med" len="med"/>
+                    </a:lnB>
+                  </a:tcPr>
+                </a:tc>
+                <a:tc>
+                  <a:txBody>
+                    <a:bodyPr/>
+                    <a:lstStyle/>
+                    <a:p>
+                      <a:pPr indent="0" marL="0">
+                        <a:buNone/>
+                      </a:pPr>
+                      <a:r>
+                        <a:rPr lang="en-US" sz="1200" dirty="0">
+                          <a:solidFill>
+                            <a:srgbClr val="14212B"/>
+                          </a:solidFill>
+                        </a:rPr>
+                        <a:t>max_tokens</a:t>
+                      </a:r>
+                      <a:endParaRPr lang="en-US" sz="1200" dirty="0"/>
+                    </a:p>
+                  </a:txBody>
+                  <a:tcPr marL="91440" marR="91440" marT="45720" marB="45720" anchor="ctr">
+                    <a:lnL w="6350" cap="flat" cmpd="sng" algn="ctr">
+                      <a:solidFill>
+                        <a:srgbClr val="D8E0E5"/>
+                      </a:solidFill>
+                      <a:prstDash val="solid"/>
+                      <a:round/>
+                      <a:headEnd type="none" w="med" len="med"/>
+                      <a:tailEnd type="none" w="med" len="med"/>
+                    </a:lnL>
+                    <a:lnR w="6350" cap="flat" cmpd="sng" algn="ctr">
+                      <a:solidFill>
+                        <a:srgbClr val="D8E0E5"/>
+                      </a:solidFill>
+                      <a:prstDash val="solid"/>
+                      <a:round/>
+                      <a:headEnd type="none" w="med" len="med"/>
+                      <a:tailEnd type="none" w="med" len="med"/>
+                    </a:lnR>
+                    <a:lnT w="6350" cap="flat" cmpd="sng" algn="ctr">
+                      <a:solidFill>
+                        <a:srgbClr val="D8E0E5"/>
+                      </a:solidFill>
+                      <a:prstDash val="solid"/>
+                      <a:round/>
+                      <a:headEnd type="none" w="med" len="med"/>
+                      <a:tailEnd type="none" w="med" len="med"/>
+                    </a:lnT>
+                    <a:lnB w="6350" cap="flat" cmpd="sng" algn="ctr">
+                      <a:solidFill>
+                        <a:srgbClr val="D8E0E5"/>
+                      </a:solidFill>
+                      <a:prstDash val="solid"/>
+                      <a:round/>
+                      <a:headEnd type="none" w="med" len="med"/>
+                      <a:tailEnd type="none" w="med" len="med"/>
+                    </a:lnB>
+                  </a:tcPr>
+                </a:tc>
+                <a:tc>
+                  <a:txBody>
+                    <a:bodyPr/>
+                    <a:lstStyle/>
+                    <a:p>
+                      <a:pPr indent="0" marL="0">
+                        <a:buNone/>
+                      </a:pPr>
+                      <a:r>
+                        <a:rPr lang="en-US" sz="1200" dirty="0">
+                          <a:solidFill>
+                            <a:srgbClr val="14212B"/>
+                          </a:solidFill>
+                        </a:rPr>
+                        <a:t>max_tokens, required</a:t>
+                      </a:r>
+                      <a:endParaRPr lang="en-US" sz="1200" dirty="0"/>
+                    </a:p>
+                  </a:txBody>
+                  <a:tcPr marL="91440" marR="91440" marT="45720" marB="45720" anchor="ctr">
+                    <a:lnL w="6350" cap="flat" cmpd="sng" algn="ctr">
+                      <a:solidFill>
+                        <a:srgbClr val="D8E0E5"/>
+                      </a:solidFill>
+                      <a:prstDash val="solid"/>
+                      <a:round/>
+                      <a:headEnd type="none" w="med" len="med"/>
+                      <a:tailEnd type="none" w="med" len="med"/>
+                    </a:lnL>
+                    <a:lnR w="6350" cap="flat" cmpd="sng" algn="ctr">
+                      <a:solidFill>
+                        <a:srgbClr val="D8E0E5"/>
+                      </a:solidFill>
+                      <a:prstDash val="solid"/>
+                      <a:round/>
+                      <a:headEnd type="none" w="med" len="med"/>
+                      <a:tailEnd type="none" w="med" len="med"/>
+                    </a:lnR>
+                    <a:lnT w="6350" cap="flat" cmpd="sng" algn="ctr">
+                      <a:solidFill>
+                        <a:srgbClr val="D8E0E5"/>
+                      </a:solidFill>
+                      <a:prstDash val="solid"/>
+                      <a:round/>
+                      <a:headEnd type="none" w="med" len="med"/>
+                      <a:tailEnd type="none" w="med" len="med"/>
+                    </a:lnT>
+                    <a:lnB w="6350" cap="flat" cmpd="sng" algn="ctr">
+                      <a:solidFill>
+                        <a:srgbClr val="D8E0E5"/>
+                      </a:solidFill>
+                      <a:prstDash val="solid"/>
+                      <a:round/>
+                      <a:headEnd type="none" w="med" len="med"/>
+                      <a:tailEnd type="none" w="med" len="med"/>
+                    </a:lnB>
+                  </a:tcPr>
+                </a:tc>
+              </a:tr>
+            </a:tbl>
+          </a:graphicData>
+        </a:graphic>
+      </p:graphicFrame>
+      <p:sp>
+        <p:nvSpPr>
+          <p:cNvPr id="4" name="callout-bg"/>
+          <p:cNvSpPr/>
+          <p:nvPr/>
+        </p:nvSpPr>
+        <p:spPr>
+          <a:xfrm>
+            <a:off x="457200" y="4206240"/>
+            <a:ext cx="7863840" cy="566928"/>
+          </a:xfrm>
+          <a:prstGeom prst="roundRect">
+            <a:avLst>
+              <a:gd name="adj" fmla="val 12903"/>
+            </a:avLst>
+          </a:prstGeom>
+          <a:solidFill>
+            <a:srgbClr val="EEF3F4"/>
+          </a:solidFill>
+          <a:ln w="12700">
+            <a:solidFill>
+              <a:srgbClr val="EEF3F4"/>
+            </a:solidFill>
+            <a:prstDash val="solid"/>
+          </a:ln>
+        </p:spPr>
+      </p:sp>
+      <p:sp>
+        <p:nvSpPr>
+          <p:cNvPr id="5" name="callout"/>
+          <p:cNvSpPr txBox="1"/>
+          <p:nvPr/>
+        </p:nvSpPr>
+        <p:spPr>
+          <a:xfrm>
+            <a:off x="594360" y="4279392"/>
+            <a:ext cx="7589520" cy="420624"/>
+          </a:xfrm>
+          <a:prstGeom prst="rect">
+            <a:avLst/>
+          </a:prstGeom>
+          <a:noFill/>
+          <a:ln/>
+        </p:spPr>
+        <p:txBody>
+          <a:bodyPr wrap="square" lIns="0" tIns="0" rIns="0" bIns="0" rtlCol="0" anchor="t"/>
+          <a:lstStyle/>
+          <a:p>
+            <a:pPr indent="0" marL="0">
+              <a:buNone/>
+            </a:pPr>
+            <a:r>
+              <a:rPr lang="en-US" sz="1200" b="1" dirty="0">
+                <a:solidFill>
+                  <a:srgbClr val="B02F6B"/>
+                </a:solidFill>
+              </a:rPr>
+              <a:t>LESSON</a:t>
+            </a:r>
+            <a:endParaRPr lang="en-US" sz="1200" dirty="0"/>
+          </a:p>
+          <a:p>
+            <a:pPr indent="0" marL="0">
+              <a:buNone/>
+            </a:pPr>
+            <a:r>
+              <a:rPr lang="en-US" sz="1400" dirty="0">
+                <a:solidFill>
+                  <a:srgbClr val="14212B"/>
+                </a:solidFill>
+              </a:rPr>
+              <a:t>Same loop everywhere. Providers differ in plumbing, then behaviour: run one eval on each.</a:t>
+            </a:r>
+            <a:endParaRPr lang="en-US" sz="1200" dirty="0"/>
+          </a:p>
+        </p:txBody>
+      </p:sp>
+      <p:sp>
+        <p:nvSpPr>
+          <p:cNvPr id="25" name="Slide Number Placeholder 0"/>
+          <p:cNvSpPr>
+            <a:spLocks noGrp="1"/>
+          </p:cNvSpPr>
+          <p:nvPr>
+            <p:ph type="sldNum" sz="quarter" idx="4294967295"/>
+          </p:nvPr>
+        </p:nvSpPr>
+        <p:spPr>
+          <a:xfrm>
+            <a:off x="8412480" y="4754880"/>
+            <a:ext cx="457200" cy="274320"/>
+          </a:xfrm>
+          <a:prstGeom prst="rect">
+            <a:avLst/>
+          </a:prstGeom>
+          <a:extLst>
+            <a:ext uri="{C572A759-6A51-4108-AA02-DFA0A04FC94B}">
+              <ma14:wrappingTextBoxFlag xmlns:ma14="http://schemas.microsoft.com/office/mac/drawingml/2011/main" val="0"/>
+            </a:ext>
+          </a:extLst>
+        </p:spPr>
+        <p:txBody>
+          <a:bodyPr/>
+          <a:lstStyle>
+            <a:lvl1pPr>
+              <a:defRPr sz="1000">
+                <a:solidFill>
+                  <a:srgbClr val="7A8A96"/>
+                </a:solidFill>
+              </a:defRPr>
+            </a:lvl1pPr>
+          </a:lstStyle>
+          <a:p>
+            <a:pPr algn="l"/>
+            <a:fld id="{F7021451-1387-4CA6-816F-3879F97B5CBC}" type="slidenum">
+              <a:rPr b="0" lang="en-US"/>
+              <a:t>16</a:t>
+            </a:fld>
+            <a:endParaRPr lang="en-US"/>
+          </a:p>
+        </p:txBody>
+      </p:sp>
+    </p:spTree>
+  </p:cSld>
+  <p:clrMapOvr>
+    <a:masterClrMapping/>
+  </p:clrMapOvr>
+</p:sld>
+</file>
+
+<file path=ppt/slides/slide17.xml><?xml version="1.0" encoding="utf-8"?>
+<p:sld xmlns:a="http://schemas.openxmlformats.org/drawingml/2006/main" xmlns:r="http://schemas.openxmlformats.org/officeDocument/2006/relationships" xmlns:p="http://schemas.openxmlformats.org/presentationml/2006/main">
+  <p:cSld name="Slide 17">
+    <p:spTree>
+      <p:nvGrpSpPr>
+        <p:cNvPr id="1" name=""/>
+        <p:cNvGrpSpPr/>
+        <p:nvPr/>
+      </p:nvGrpSpPr>
+      <p:grpSpPr>
+        <a:xfrm>
+          <a:off x="0" y="0"/>
+          <a:ext cx="0" cy="0"/>
+          <a:chOff x="0" y="0"/>
+          <a:chExt cx="0" cy="0"/>
+        </a:xfrm>
+      </p:grpSpPr>
+      <p:sp>
+        <p:nvSpPr>
+          <p:cNvPr id="2" name="Text 0"/>
+          <p:cNvSpPr/>
+          <p:nvPr>
+            <p:ph idx="100" type="title" hasCustomPrompt="1"/>
+          </p:nvPr>
+        </p:nvSpPr>
+        <p:spPr>
+          <a:xfrm>
+            <a:off x="457200" y="274320"/>
+            <a:ext cx="8229600" cy="731520"/>
+          </a:xfrm>
+          <a:prstGeom prst="rect">
+            <a:avLst/>
+          </a:prstGeom>
+          <a:noFill/>
+          <a:ln/>
+        </p:spPr>
+        <p:txBody>
+          <a:bodyPr wrap="square" lIns="0" tIns="0" rIns="0" bIns="0" rtlCol="0" anchor="ctr"/>
+          <a:lstStyle/>
+          <a:p>
+            <a:pPr algn="l" indent="0" marL="0">
+              <a:buNone/>
+            </a:pPr>
+            <a:r>
+              <a:rPr lang="en-US" sz="3000" b="1" dirty="0">
+                <a:solidFill>
+                  <a:srgbClr val="0B3B3C"/>
+                </a:solidFill>
+              </a:rPr>
               <a:t>Reuse it: swap the domain, keep the skeleton</a:t>
             </a:r>
             <a:endParaRPr lang="en-US" sz="3000" dirty="0"/>
@@ -6125,7 +8630,7 @@
       </p:sp>
       <p:graphicFrame>
         <p:nvGraphicFramePr>
-          <p:cNvPr id="15" name="reuse-table"/>
+          <p:cNvPr id="18" name="Table 0"/>
           <p:cNvGraphicFramePr>
             <a:graphicFrameLocks noGrp="1"/>
           </p:cNvGraphicFramePr>
@@ -7610,7 +10115,7 @@
             <a:pPr algn="l"/>
             <a:fld id="{F7021451-1387-4CA6-816F-3879F97B5CBC}" type="slidenum">
               <a:rPr b="0" lang="en-US"/>
-              <a:t>14</a:t>
+              <a:t>17</a:t>
             </a:fld>
             <a:endParaRPr lang="en-US"/>
           </a:p>
@@ -7624,9 +10129,9 @@
 </p:sld>
 </file>
 
-<file path=ppt/slides/slide17.xml><?xml version="1.0" encoding="utf-8"?>
+<file path=ppt/slides/slide18.xml><?xml version="1.0" encoding="utf-8"?>
 <p:sld xmlns:a="http://schemas.openxmlformats.org/drawingml/2006/main" xmlns:r="http://schemas.openxmlformats.org/officeDocument/2006/relationships" xmlns:p="http://schemas.openxmlformats.org/presentationml/2006/main">
-  <p:cSld name="Slide 15">
+  <p:cSld name="Slide 18">
     <p:spTree>
       <p:nvGrpSpPr>
         <p:cNvPr id="1" name=""/>
@@ -8220,7 +10725,7 @@
             <a:pPr algn="l"/>
             <a:fld id="{F7021451-1387-4CA6-816F-3879F97B5CBC}" type="slidenum">
               <a:rPr b="0" lang="en-US"/>
-              <a:t>15</a:t>
+              <a:t>18</a:t>
             </a:fld>
             <a:endParaRPr lang="en-US"/>
           </a:p>
@@ -8298,20 +10803,21 @@
         <p:spPr>
           <a:xfrm>
             <a:off x="457200" y="1280160"/>
-            <a:ext cx="948690" cy="1371600"/>
+            <a:ext cx="960120" cy="1371600"/>
           </a:xfrm>
           <a:prstGeom prst="roundRect">
             <a:avLst>
-              <a:gd name="adj" fmla="val 6667"/>
+              <a:gd name="adj" fmla="val 7619"/>
             </a:avLst>
           </a:prstGeom>
           <a:solidFill>
             <a:srgbClr val="7A8A96"/>
           </a:solidFill>
-          <a:ln w="19050">
+          <a:ln w="12700">
             <a:solidFill>
               <a:srgbClr val="7A8A96"/>
             </a:solidFill>
+            <a:prstDash val="solid"/>
           </a:ln>
         </p:spPr>
       </p:sp>
@@ -8324,7 +10830,7 @@
         <p:spPr>
           <a:xfrm>
             <a:off x="457200" y="1280160"/>
-            <a:ext cx="948690" cy="1371600"/>
+            <a:ext cx="960120" cy="1371600"/>
           </a:xfrm>
           <a:prstGeom prst="rect">
             <a:avLst/>
@@ -8333,7 +10839,7 @@
           <a:ln/>
         </p:spPr>
         <p:txBody>
-          <a:bodyPr wrap="square" lIns="50800" tIns="50800" rIns="50800" bIns="50800" rtlCol="0" anchor="ctr"/>
+          <a:bodyPr wrap="square" lIns="38100" tIns="38100" rIns="38100" bIns="38100" rtlCol="0" anchor="ctr"/>
           <a:lstStyle/>
           <a:p>
             <a:pPr algn="ctr" indent="0" marL="0">
@@ -8357,7 +10863,7 @@
               <a:buNone/>
             </a:pPr>
             <a:r>
-              <a:rPr lang="en-US" sz="1000" b="1" dirty="0">
+              <a:rPr lang="en-US" sz="1200" b="1" dirty="0">
                 <a:solidFill>
                   <a:srgbClr val="FFFFFF"/>
                 </a:solidFill>
@@ -8371,7 +10877,7 @@
               <a:buNone/>
             </a:pPr>
             <a:r>
-              <a:rPr lang="en-US" sz="1000" dirty="0">
+              <a:rPr lang="en-US" sz="1100" dirty="0">
                 <a:solidFill>
                   <a:srgbClr val="FFFFFF"/>
                 </a:solidFill>
@@ -8390,21 +10896,22 @@
         </p:nvSpPr>
         <p:spPr>
           <a:xfrm>
-            <a:off x="1497330" y="1280160"/>
-            <a:ext cx="948690" cy="1371600"/>
+            <a:off x="1490472" y="1280160"/>
+            <a:ext cx="960120" cy="1371600"/>
           </a:xfrm>
           <a:prstGeom prst="roundRect">
             <a:avLst>
-              <a:gd name="adj" fmla="val 6667"/>
+              <a:gd name="adj" fmla="val 7619"/>
             </a:avLst>
           </a:prstGeom>
           <a:solidFill>
             <a:srgbClr val="2F6FB5"/>
           </a:solidFill>
-          <a:ln w="19050">
+          <a:ln w="12700">
             <a:solidFill>
               <a:srgbClr val="2F6FB5"/>
             </a:solidFill>
+            <a:prstDash val="solid"/>
           </a:ln>
         </p:spPr>
       </p:sp>
@@ -8416,8 +10923,8 @@
         </p:nvSpPr>
         <p:spPr>
           <a:xfrm>
-            <a:off x="1497330" y="1280160"/>
-            <a:ext cx="948690" cy="1371600"/>
+            <a:off x="1490472" y="1280160"/>
+            <a:ext cx="960120" cy="1371600"/>
           </a:xfrm>
           <a:prstGeom prst="rect">
             <a:avLst/>
@@ -8426,7 +10933,7 @@
           <a:ln/>
         </p:spPr>
         <p:txBody>
-          <a:bodyPr wrap="square" lIns="50800" tIns="50800" rIns="50800" bIns="50800" rtlCol="0" anchor="ctr"/>
+          <a:bodyPr wrap="square" lIns="38100" tIns="38100" rIns="38100" bIns="38100" rtlCol="0" anchor="ctr"/>
           <a:lstStyle/>
           <a:p>
             <a:pPr algn="ctr" indent="0" marL="0">
@@ -8450,12 +10957,12 @@
               <a:buNone/>
             </a:pPr>
             <a:r>
-              <a:rPr lang="en-US" sz="1000" b="1" dirty="0">
+              <a:rPr lang="en-US" sz="1200" b="1" dirty="0">
                 <a:solidFill>
                   <a:srgbClr val="FFFFFF"/>
                 </a:solidFill>
               </a:rPr>
-              <a:t>Structured output</a:t>
+              <a:t>Structured</a:t>
             </a:r>
             <a:endParaRPr lang="en-US" sz="2400" dirty="0"/>
           </a:p>
@@ -8464,7 +10971,7 @@
               <a:buNone/>
             </a:pPr>
             <a:r>
-              <a:rPr lang="en-US" sz="1000" dirty="0">
+              <a:rPr lang="en-US" sz="1100" dirty="0">
                 <a:solidFill>
                   <a:srgbClr val="FFFFFF"/>
                 </a:solidFill>
@@ -8483,21 +10990,22 @@
         </p:nvSpPr>
         <p:spPr>
           <a:xfrm>
-            <a:off x="2537460" y="1280160"/>
-            <a:ext cx="948690" cy="1371600"/>
+            <a:off x="2523744" y="1280160"/>
+            <a:ext cx="960120" cy="1371600"/>
           </a:xfrm>
           <a:prstGeom prst="roundRect">
             <a:avLst>
-              <a:gd name="adj" fmla="val 6667"/>
+              <a:gd name="adj" fmla="val 7619"/>
             </a:avLst>
           </a:prstGeom>
           <a:solidFill>
             <a:srgbClr val="0B7A75"/>
           </a:solidFill>
-          <a:ln w="19050">
+          <a:ln w="12700">
             <a:solidFill>
               <a:srgbClr val="0B7A75"/>
             </a:solidFill>
+            <a:prstDash val="solid"/>
           </a:ln>
         </p:spPr>
       </p:sp>
@@ -8509,8 +11017,8 @@
         </p:nvSpPr>
         <p:spPr>
           <a:xfrm>
-            <a:off x="2537460" y="1280160"/>
-            <a:ext cx="948690" cy="1371600"/>
+            <a:off x="2523744" y="1280160"/>
+            <a:ext cx="960120" cy="1371600"/>
           </a:xfrm>
           <a:prstGeom prst="rect">
             <a:avLst/>
@@ -8519,7 +11027,7 @@
           <a:ln/>
         </p:spPr>
         <p:txBody>
-          <a:bodyPr wrap="square" lIns="50800" tIns="50800" rIns="50800" bIns="50800" rtlCol="0" anchor="ctr"/>
+          <a:bodyPr wrap="square" lIns="38100" tIns="38100" rIns="38100" bIns="38100" rtlCol="0" anchor="ctr"/>
           <a:lstStyle/>
           <a:p>
             <a:pPr algn="ctr" indent="0" marL="0">
@@ -8543,7 +11051,7 @@
               <a:buNone/>
             </a:pPr>
             <a:r>
-              <a:rPr lang="en-US" sz="1000" b="1" dirty="0">
+              <a:rPr lang="en-US" sz="1200" b="1" dirty="0">
                 <a:solidFill>
                   <a:srgbClr val="FFFFFF"/>
                 </a:solidFill>
@@ -8557,7 +11065,7 @@
               <a:buNone/>
             </a:pPr>
             <a:r>
-              <a:rPr lang="en-US" sz="1000" dirty="0">
+              <a:rPr lang="en-US" sz="1100" dirty="0">
                 <a:solidFill>
                   <a:srgbClr val="FFFFFF"/>
                 </a:solidFill>
@@ -8576,21 +11084,22 @@
         </p:nvSpPr>
         <p:spPr>
           <a:xfrm>
-            <a:off x="3577590" y="1280160"/>
-            <a:ext cx="948690" cy="1371600"/>
+            <a:off x="3557016" y="1280160"/>
+            <a:ext cx="960120" cy="1371600"/>
           </a:xfrm>
           <a:prstGeom prst="roundRect">
             <a:avLst>
-              <a:gd name="adj" fmla="val 6667"/>
+              <a:gd name="adj" fmla="val 7619"/>
             </a:avLst>
           </a:prstGeom>
           <a:solidFill>
             <a:srgbClr val="8A4FB0"/>
           </a:solidFill>
-          <a:ln w="19050">
+          <a:ln w="12700">
             <a:solidFill>
               <a:srgbClr val="8A4FB0"/>
             </a:solidFill>
+            <a:prstDash val="solid"/>
           </a:ln>
         </p:spPr>
       </p:sp>
@@ -8602,8 +11111,8 @@
         </p:nvSpPr>
         <p:spPr>
           <a:xfrm>
-            <a:off x="3577590" y="1280160"/>
-            <a:ext cx="948690" cy="1371600"/>
+            <a:off x="3557016" y="1280160"/>
+            <a:ext cx="960120" cy="1371600"/>
           </a:xfrm>
           <a:prstGeom prst="rect">
             <a:avLst/>
@@ -8612,7 +11121,7 @@
           <a:ln/>
         </p:spPr>
         <p:txBody>
-          <a:bodyPr wrap="square" lIns="50800" tIns="50800" rIns="50800" bIns="50800" rtlCol="0" anchor="ctr"/>
+          <a:bodyPr wrap="square" lIns="38100" tIns="38100" rIns="38100" bIns="38100" rtlCol="0" anchor="ctr"/>
           <a:lstStyle/>
           <a:p>
             <a:pPr algn="ctr" indent="0" marL="0">
@@ -8636,7 +11145,7 @@
               <a:buNone/>
             </a:pPr>
             <a:r>
-              <a:rPr lang="en-US" sz="1000" b="1" dirty="0">
+              <a:rPr lang="en-US" sz="1200" b="1" dirty="0">
                 <a:solidFill>
                   <a:srgbClr val="FFFFFF"/>
                 </a:solidFill>
@@ -8650,12 +11159,12 @@
               <a:buNone/>
             </a:pPr>
             <a:r>
-              <a:rPr lang="en-US" sz="1000" dirty="0">
+              <a:rPr lang="en-US" sz="1100" dirty="0">
                 <a:solidFill>
                   <a:srgbClr val="FFFFFF"/>
                 </a:solidFill>
               </a:rPr>
-              <a:t>LLM remembers</a:t>
+              <a:t>remembers</a:t>
             </a:r>
             <a:endParaRPr lang="en-US" sz="2400" dirty="0"/>
           </a:p>
@@ -8669,21 +11178,22 @@
         </p:nvSpPr>
         <p:spPr>
           <a:xfrm>
-            <a:off x="4617720" y="1280160"/>
-            <a:ext cx="948690" cy="1371600"/>
+            <a:off x="4590288" y="1280160"/>
+            <a:ext cx="960120" cy="1371600"/>
           </a:xfrm>
           <a:prstGeom prst="roundRect">
             <a:avLst>
-              <a:gd name="adj" fmla="val 6667"/>
+              <a:gd name="adj" fmla="val 7619"/>
             </a:avLst>
           </a:prstGeom>
           <a:solidFill>
-            <a:srgbClr val="B58AD0"/>
+            <a:srgbClr val="8A4FB0"/>
           </a:solidFill>
-          <a:ln w="19050">
+          <a:ln w="12700">
             <a:solidFill>
-              <a:srgbClr val="B58AD0"/>
+              <a:srgbClr val="8A4FB0"/>
             </a:solidFill>
+            <a:prstDash val="solid"/>
           </a:ln>
         </p:spPr>
       </p:sp>
@@ -8695,8 +11205,8 @@
         </p:nvSpPr>
         <p:spPr>
           <a:xfrm>
-            <a:off x="4617720" y="1280160"/>
-            <a:ext cx="948690" cy="1371600"/>
+            <a:off x="4590288" y="1280160"/>
+            <a:ext cx="960120" cy="1371600"/>
           </a:xfrm>
           <a:prstGeom prst="rect">
             <a:avLst/>
@@ -8705,7 +11215,7 @@
           <a:ln/>
         </p:spPr>
         <p:txBody>
-          <a:bodyPr wrap="square" lIns="50800" tIns="50800" rIns="50800" bIns="50800" rtlCol="0" anchor="ctr"/>
+          <a:bodyPr wrap="square" lIns="38100" tIns="38100" rIns="38100" bIns="38100" rtlCol="0" anchor="ctr"/>
           <a:lstStyle/>
           <a:p>
             <a:pPr algn="ctr" indent="0" marL="0">
@@ -8729,7 +11239,7 @@
               <a:buNone/>
             </a:pPr>
             <a:r>
-              <a:rPr lang="en-US" sz="1000" b="1" dirty="0">
+              <a:rPr lang="en-US" sz="1200" b="1" dirty="0">
                 <a:solidFill>
                   <a:srgbClr val="FFFFFF"/>
                 </a:solidFill>
@@ -8743,12 +11253,12 @@
               <a:buNone/>
             </a:pPr>
             <a:r>
-              <a:rPr lang="en-US" sz="1000" dirty="0">
+              <a:rPr lang="en-US" sz="1100" dirty="0">
                 <a:solidFill>
                   <a:srgbClr val="FFFFFF"/>
                 </a:solidFill>
               </a:rPr>
-              <a:t>same, framework</a:t>
+              <a:t>framework</a:t>
             </a:r>
             <a:endParaRPr lang="en-US" sz="2400" dirty="0"/>
           </a:p>
@@ -8762,21 +11272,22 @@
         </p:nvSpPr>
         <p:spPr>
           <a:xfrm>
-            <a:off x="5657850" y="1280160"/>
-            <a:ext cx="948690" cy="1371600"/>
+            <a:off x="5623560" y="1280160"/>
+            <a:ext cx="960120" cy="1371600"/>
           </a:xfrm>
           <a:prstGeom prst="roundRect">
             <a:avLst>
-              <a:gd name="adj" fmla="val 6667"/>
+              <a:gd name="adj" fmla="val 7619"/>
             </a:avLst>
           </a:prstGeom>
           <a:solidFill>
             <a:srgbClr val="B4561A"/>
           </a:solidFill>
-          <a:ln w="19050">
+          <a:ln w="12700">
             <a:solidFill>
               <a:srgbClr val="B4561A"/>
             </a:solidFill>
+            <a:prstDash val="solid"/>
           </a:ln>
         </p:spPr>
       </p:sp>
@@ -8788,8 +11299,8 @@
         </p:nvSpPr>
         <p:spPr>
           <a:xfrm>
-            <a:off x="5657850" y="1280160"/>
-            <a:ext cx="948690" cy="1371600"/>
+            <a:off x="5623560" y="1280160"/>
+            <a:ext cx="960120" cy="1371600"/>
           </a:xfrm>
           <a:prstGeom prst="rect">
             <a:avLst/>
@@ -8798,7 +11309,7 @@
           <a:ln/>
         </p:spPr>
         <p:txBody>
-          <a:bodyPr wrap="square" lIns="50800" tIns="50800" rIns="50800" bIns="50800" rtlCol="0" anchor="ctr"/>
+          <a:bodyPr wrap="square" lIns="38100" tIns="38100" rIns="38100" bIns="38100" rtlCol="0" anchor="ctr"/>
           <a:lstStyle/>
           <a:p>
             <a:pPr algn="ctr" indent="0" marL="0">
@@ -8822,7 +11333,7 @@
               <a:buNone/>
             </a:pPr>
             <a:r>
-              <a:rPr lang="en-US" sz="1000" b="1" dirty="0">
+              <a:rPr lang="en-US" sz="1200" b="1" dirty="0">
                 <a:solidFill>
                   <a:srgbClr val="FFFFFF"/>
                 </a:solidFill>
@@ -8836,7 +11347,7 @@
               <a:buNone/>
             </a:pPr>
             <a:r>
-              <a:rPr lang="en-US" sz="1000" dirty="0">
+              <a:rPr lang="en-US" sz="1100" dirty="0">
                 <a:solidFill>
                   <a:srgbClr val="FFFFFF"/>
                 </a:solidFill>
@@ -8855,21 +11366,22 @@
         </p:nvSpPr>
         <p:spPr>
           <a:xfrm>
-            <a:off x="6697980" y="1280160"/>
-            <a:ext cx="948690" cy="1371600"/>
+            <a:off x="6656832" y="1280160"/>
+            <a:ext cx="960120" cy="1371600"/>
           </a:xfrm>
           <a:prstGeom prst="roundRect">
             <a:avLst>
-              <a:gd name="adj" fmla="val 6667"/>
+              <a:gd name="adj" fmla="val 7619"/>
             </a:avLst>
           </a:prstGeom>
           <a:solidFill>
             <a:srgbClr val="3F7D2A"/>
           </a:solidFill>
-          <a:ln w="19050">
+          <a:ln w="12700">
             <a:solidFill>
               <a:srgbClr val="3F7D2A"/>
             </a:solidFill>
+            <a:prstDash val="solid"/>
           </a:ln>
         </p:spPr>
       </p:sp>
@@ -8881,8 +11393,8 @@
         </p:nvSpPr>
         <p:spPr>
           <a:xfrm>
-            <a:off x="6697980" y="1280160"/>
-            <a:ext cx="948690" cy="1371600"/>
+            <a:off x="6656832" y="1280160"/>
+            <a:ext cx="960120" cy="1371600"/>
           </a:xfrm>
           <a:prstGeom prst="rect">
             <a:avLst/>
@@ -8891,7 +11403,7 @@
           <a:ln/>
         </p:spPr>
         <p:txBody>
-          <a:bodyPr wrap="square" lIns="50800" tIns="50800" rIns="50800" bIns="50800" rtlCol="0" anchor="ctr"/>
+          <a:bodyPr wrap="square" lIns="38100" tIns="38100" rIns="38100" bIns="38100" rtlCol="0" anchor="ctr"/>
           <a:lstStyle/>
           <a:p>
             <a:pPr algn="ctr" indent="0" marL="0">
@@ -8915,7 +11427,7 @@
               <a:buNone/>
             </a:pPr>
             <a:r>
-              <a:rPr lang="en-US" sz="1000" b="1" dirty="0">
+              <a:rPr lang="en-US" sz="1200" b="1" dirty="0">
                 <a:solidFill>
                   <a:srgbClr val="FFFFFF"/>
                 </a:solidFill>
@@ -8929,12 +11441,12 @@
               <a:buNone/>
             </a:pPr>
             <a:r>
-              <a:rPr lang="en-US" sz="1000" dirty="0">
+              <a:rPr lang="en-US" sz="1100" dirty="0">
                 <a:solidFill>
                   <a:srgbClr val="FFFFFF"/>
                 </a:solidFill>
               </a:rPr>
-              <a:t>measure it</a:t>
+              <a:t>measure</a:t>
             </a:r>
             <a:endParaRPr lang="en-US" sz="2400" dirty="0"/>
           </a:p>
@@ -8942,40 +11454,41 @@
       </p:sp>
       <p:sp>
         <p:nvSpPr>
-          <p:cNvPr id="90" name="stage-6"/>
+          <p:cNvPr id="18" name="stage-6"/>
           <p:cNvSpPr/>
           <p:nvPr/>
         </p:nvSpPr>
         <p:spPr>
           <a:xfrm>
-            <a:off x="7738110" y="1280160"/>
-            <a:ext cx="948690" cy="1371600"/>
+            <a:off x="7690104" y="1280160"/>
+            <a:ext cx="960120" cy="1371600"/>
           </a:xfrm>
           <a:prstGeom prst="roundRect">
             <a:avLst>
-              <a:gd name="adj" fmla="val 6667"/>
+              <a:gd name="adj" fmla="val 7619"/>
             </a:avLst>
           </a:prstGeom>
           <a:solidFill>
             <a:srgbClr val="B02F6B"/>
           </a:solidFill>
-          <a:ln w="19050">
+          <a:ln w="12700">
             <a:solidFill>
               <a:srgbClr val="B02F6B"/>
             </a:solidFill>
+            <a:prstDash val="solid"/>
           </a:ln>
         </p:spPr>
       </p:sp>
       <p:sp>
         <p:nvSpPr>
-          <p:cNvPr id="91" name="stage-text-6"/>
+          <p:cNvPr id="19" name="stage-text-6"/>
           <p:cNvSpPr txBox="1"/>
           <p:nvPr/>
         </p:nvSpPr>
         <p:spPr>
           <a:xfrm>
-            <a:off x="7738110" y="1280160"/>
-            <a:ext cx="948690" cy="1371600"/>
+            <a:off x="7690104" y="1280160"/>
+            <a:ext cx="960120" cy="1371600"/>
           </a:xfrm>
           <a:prstGeom prst="rect">
             <a:avLst/>
@@ -8984,7 +11497,7 @@
           <a:ln/>
         </p:spPr>
         <p:txBody>
-          <a:bodyPr wrap="square" lIns="50800" tIns="50800" rIns="50800" bIns="50800" rtlCol="0" anchor="ctr"/>
+          <a:bodyPr wrap="square" lIns="38100" tIns="38100" rIns="38100" bIns="38100" rtlCol="0" anchor="ctr"/>
           <a:lstStyle/>
           <a:p>
             <a:pPr algn="ctr" indent="0" marL="0">
@@ -9008,7 +11521,7 @@
               <a:buNone/>
             </a:pPr>
             <a:r>
-              <a:rPr lang="en-US" sz="1000" b="1" dirty="0">
+              <a:rPr lang="en-US" sz="1200" b="1" dirty="0">
                 <a:solidFill>
                   <a:srgbClr val="FFFFFF"/>
                 </a:solidFill>
@@ -9022,7 +11535,7 @@
               <a:buNone/>
             </a:pPr>
             <a:r>
-              <a:rPr lang="en-US" sz="1000" dirty="0">
+              <a:rPr lang="en-US" sz="1100" dirty="0">
                 <a:solidFill>
                   <a:srgbClr val="FFFFFF"/>
                 </a:solidFill>
@@ -9035,13 +11548,13 @@
       </p:sp>
       <p:sp>
         <p:nvSpPr>
-          <p:cNvPr id="18" name="lede"/>
+          <p:cNvPr id="20" name="lede"/>
           <p:cNvSpPr txBox="1"/>
           <p:nvPr/>
         </p:nvSpPr>
         <p:spPr>
           <a:xfrm>
-            <a:off x="457200" y="3017520"/>
+            <a:off x="457200" y="2926080"/>
             <a:ext cx="8229600" cy="457200"/>
           </a:xfrm>
           <a:prstGeom prst="rect">
@@ -9071,7 +11584,7 @@
       </p:sp>
       <p:sp>
         <p:nvSpPr>
-          <p:cNvPr id="19" name="bullets"/>
+          <p:cNvPr id="21" name="bullets"/>
           <p:cNvSpPr txBox="1"/>
           <p:nvPr/>
         </p:nvSpPr>
@@ -9255,7 +11768,7 @@
       </p:sp>
       <p:graphicFrame>
         <p:nvGraphicFramePr>
-          <p:cNvPr id="4" name="control-table"/>
+          <p:cNvPr id="4" name="Table 0"/>
           <p:cNvGraphicFramePr>
             <a:graphicFrameLocks noGrp="1"/>
           </p:cNvGraphicFramePr>
@@ -9268,7 +11781,7 @@
           </p:nvPr>
         </p:nvGraphicFramePr>
         <p:xfrm>
-          <a:off x="457200" y="1280160"/>
+          <a:off x="457200" y="1143000"/>
           <a:ext cx="8229600" cy="914400"/>
         </p:xfrm>
         <a:graphic>
@@ -9277,13 +11790,13 @@
               <a:tblPr/>
               <a:tblGrid>
                 <a:gridCol w="1554480"/>
-                <a:gridCol w="1554480"/>
+                <a:gridCol w="1463040"/>
                 <a:gridCol w="1554480"/>
                 <a:gridCol w="1188720"/>
                 <a:gridCol w="1188720"/>
-                <a:gridCol w="1188720"/>
+                <a:gridCol w="1280160"/>
               </a:tblGrid>
-              <a:tr h="457200">
+              <a:tr h="329184">
                 <a:tc>
                   <a:txBody>
                     <a:bodyPr/>
@@ -9651,7 +12164,7 @@
                   </a:tcPr>
                 </a:tc>
               </a:tr>
-              <a:tr h="457200">
+              <a:tr h="329184">
                 <a:tc>
                   <a:txBody>
                     <a:bodyPr/>
@@ -9661,14 +12174,14 @@
                         <a:buNone/>
                       </a:pPr>
                       <a:r>
-                        <a:rPr lang="en-US" sz="1400" dirty="0">
+                        <a:rPr lang="en-US" sz="1300" dirty="0">
                           <a:solidFill>
                             <a:srgbClr val="14212B"/>
                           </a:solidFill>
                         </a:rPr>
                         <a:t>0 Keywords</a:t>
                       </a:r>
-                      <a:endParaRPr lang="en-US" sz="1400" dirty="0"/>
+                      <a:endParaRPr lang="en-US" sz="1300" dirty="0"/>
                     </a:p>
                   </a:txBody>
                   <a:tcPr marL="91440" marR="91440" marT="45720" marB="45720" anchor="ctr">
@@ -9719,14 +12232,14 @@
                         <a:buNone/>
                       </a:pPr>
                       <a:r>
-                        <a:rPr lang="en-US" sz="1400" dirty="0">
+                        <a:rPr lang="en-US" sz="1300" dirty="0">
                           <a:solidFill>
                             <a:srgbClr val="14212B"/>
                           </a:solidFill>
                         </a:rPr>
                         <a:t>your code</a:t>
                       </a:r>
-                      <a:endParaRPr lang="en-US" sz="1400" dirty="0"/>
+                      <a:endParaRPr lang="en-US" sz="1300" dirty="0"/>
                     </a:p>
                   </a:txBody>
                   <a:tcPr marL="91440" marR="91440" marT="45720" marB="45720" anchor="ctr">
@@ -9777,14 +12290,14 @@
                         <a:buNone/>
                       </a:pPr>
                       <a:r>
-                        <a:rPr lang="en-US" sz="1400" dirty="0">
+                        <a:rPr lang="en-US" sz="1300" dirty="0">
                           <a:solidFill>
                             <a:srgbClr val="14212B"/>
                           </a:solidFill>
                         </a:rPr>
                         <a:t>your code</a:t>
                       </a:r>
-                      <a:endParaRPr lang="en-US" sz="1400" dirty="0"/>
+                      <a:endParaRPr lang="en-US" sz="1300" dirty="0"/>
                     </a:p>
                   </a:txBody>
                   <a:tcPr marL="91440" marR="91440" marT="45720" marB="45720" anchor="ctr">
@@ -9835,14 +12348,14 @@
                         <a:buNone/>
                       </a:pPr>
                       <a:r>
-                        <a:rPr lang="en-US" sz="1400" dirty="0">
+                        <a:rPr lang="en-US" sz="1300" dirty="0">
                           <a:solidFill>
                             <a:srgbClr val="7A8A96"/>
                           </a:solidFill>
                         </a:rPr>
-                        <a:t>–</a:t>
+                        <a:t>-</a:t>
                       </a:r>
-                      <a:endParaRPr lang="en-US" sz="1400" dirty="0"/>
+                      <a:endParaRPr lang="en-US" sz="1300" dirty="0"/>
                     </a:p>
                   </a:txBody>
                   <a:tcPr marL="91440" marR="91440" marT="45720" marB="45720" anchor="ctr">
@@ -9893,14 +12406,14 @@
                         <a:buNone/>
                       </a:pPr>
                       <a:r>
-                        <a:rPr lang="en-US" sz="1400" dirty="0">
+                        <a:rPr lang="en-US" sz="1300" dirty="0">
                           <a:solidFill>
                             <a:srgbClr val="7A8A96"/>
                           </a:solidFill>
                         </a:rPr>
-                        <a:t>–</a:t>
+                        <a:t>-</a:t>
                       </a:r>
-                      <a:endParaRPr lang="en-US" sz="1400" dirty="0"/>
+                      <a:endParaRPr lang="en-US" sz="1300" dirty="0"/>
                     </a:p>
                   </a:txBody>
                   <a:tcPr marL="91440" marR="91440" marT="45720" marB="45720" anchor="ctr">
@@ -9951,14 +12464,14 @@
                         <a:buNone/>
                       </a:pPr>
                       <a:r>
-                        <a:rPr lang="en-US" sz="1400" dirty="0">
+                        <a:rPr lang="en-US" sz="1300" dirty="0">
                           <a:solidFill>
                             <a:srgbClr val="7A8A96"/>
                           </a:solidFill>
                         </a:rPr>
-                        <a:t>–</a:t>
+                        <a:t>-</a:t>
                       </a:r>
-                      <a:endParaRPr lang="en-US" sz="1400" dirty="0"/>
+                      <a:endParaRPr lang="en-US" sz="1300" dirty="0"/>
                     </a:p>
                   </a:txBody>
                   <a:tcPr marL="91440" marR="91440" marT="45720" marB="45720" anchor="ctr">
@@ -10001,7 +12514,7 @@
                   </a:tcPr>
                 </a:tc>
               </a:tr>
-              <a:tr h="457200">
+              <a:tr h="329184">
                 <a:tc>
                   <a:txBody>
                     <a:bodyPr/>
@@ -10011,14 +12524,14 @@
                         <a:buNone/>
                       </a:pPr>
                       <a:r>
-                        <a:rPr lang="en-US" sz="1400" dirty="0">
+                        <a:rPr lang="en-US" sz="1300" dirty="0">
                           <a:solidFill>
                             <a:srgbClr val="14212B"/>
                           </a:solidFill>
                         </a:rPr>
                         <a:t>1 Structured</a:t>
                       </a:r>
-                      <a:endParaRPr lang="en-US" sz="1400" dirty="0"/>
+                      <a:endParaRPr lang="en-US" sz="1300" dirty="0"/>
                     </a:p>
                   </a:txBody>
                   <a:tcPr marL="91440" marR="91440" marT="45720" marB="45720" anchor="ctr">
@@ -10069,14 +12582,14 @@
                         <a:buNone/>
                       </a:pPr>
                       <a:r>
-                        <a:rPr lang="en-US" sz="1400" dirty="0">
+                        <a:rPr lang="en-US" sz="1300" dirty="0">
                           <a:solidFill>
                             <a:srgbClr val="14212B"/>
                           </a:solidFill>
                         </a:rPr>
                         <a:t>the model</a:t>
                       </a:r>
-                      <a:endParaRPr lang="en-US" sz="1400" dirty="0"/>
+                      <a:endParaRPr lang="en-US" sz="1300" dirty="0"/>
                     </a:p>
                   </a:txBody>
                   <a:tcPr marL="91440" marR="91440" marT="45720" marB="45720" anchor="ctr">
@@ -10127,14 +12640,14 @@
                         <a:buNone/>
                       </a:pPr>
                       <a:r>
-                        <a:rPr lang="en-US" sz="1400" dirty="0">
+                        <a:rPr lang="en-US" sz="1300" dirty="0">
                           <a:solidFill>
                             <a:srgbClr val="14212B"/>
                           </a:solidFill>
                         </a:rPr>
                         <a:t>your code</a:t>
                       </a:r>
-                      <a:endParaRPr lang="en-US" sz="1400" dirty="0"/>
+                      <a:endParaRPr lang="en-US" sz="1300" dirty="0"/>
                     </a:p>
                   </a:txBody>
                   <a:tcPr marL="91440" marR="91440" marT="45720" marB="45720" anchor="ctr">
@@ -10185,14 +12698,14 @@
                         <a:buNone/>
                       </a:pPr>
                       <a:r>
-                        <a:rPr lang="en-US" sz="1400" dirty="0">
+                        <a:rPr lang="en-US" sz="1300" dirty="0">
                           <a:solidFill>
                             <a:srgbClr val="7A8A96"/>
                           </a:solidFill>
                         </a:rPr>
-                        <a:t>–</a:t>
+                        <a:t>-</a:t>
                       </a:r>
-                      <a:endParaRPr lang="en-US" sz="1400" dirty="0"/>
+                      <a:endParaRPr lang="en-US" sz="1300" dirty="0"/>
                     </a:p>
                   </a:txBody>
                   <a:tcPr marL="91440" marR="91440" marT="45720" marB="45720" anchor="ctr">
@@ -10243,14 +12756,14 @@
                         <a:buNone/>
                       </a:pPr>
                       <a:r>
-                        <a:rPr lang="en-US" sz="1400" dirty="0">
+                        <a:rPr lang="en-US" sz="1300" dirty="0">
                           <a:solidFill>
                             <a:srgbClr val="7A8A96"/>
                           </a:solidFill>
                         </a:rPr>
-                        <a:t>–</a:t>
+                        <a:t>-</a:t>
                       </a:r>
-                      <a:endParaRPr lang="en-US" sz="1400" dirty="0"/>
+                      <a:endParaRPr lang="en-US" sz="1300" dirty="0"/>
                     </a:p>
                   </a:txBody>
                   <a:tcPr marL="91440" marR="91440" marT="45720" marB="45720" anchor="ctr">
@@ -10301,14 +12814,14 @@
                         <a:buNone/>
                       </a:pPr>
                       <a:r>
-                        <a:rPr lang="en-US" sz="1400" dirty="0">
+                        <a:rPr lang="en-US" sz="1300" dirty="0">
                           <a:solidFill>
                             <a:srgbClr val="7A8A96"/>
                           </a:solidFill>
                         </a:rPr>
-                        <a:t>–</a:t>
+                        <a:t>-</a:t>
                       </a:r>
-                      <a:endParaRPr lang="en-US" sz="1400" dirty="0"/>
+                      <a:endParaRPr lang="en-US" sz="1300" dirty="0"/>
                     </a:p>
                   </a:txBody>
                   <a:tcPr marL="91440" marR="91440" marT="45720" marB="45720" anchor="ctr">
@@ -10351,7 +12864,7 @@
                   </a:tcPr>
                 </a:tc>
               </a:tr>
-              <a:tr h="457200">
+              <a:tr h="329184">
                 <a:tc>
                   <a:txBody>
                     <a:bodyPr/>
@@ -10361,14 +12874,14 @@
                         <a:buNone/>
                       </a:pPr>
                       <a:r>
-                        <a:rPr lang="en-US" sz="1400" dirty="0">
+                        <a:rPr lang="en-US" sz="1300" dirty="0">
                           <a:solidFill>
                             <a:srgbClr val="14212B"/>
                           </a:solidFill>
                         </a:rPr>
                         <a:t>2 Tool loop</a:t>
                       </a:r>
-                      <a:endParaRPr lang="en-US" sz="1400" dirty="0"/>
+                      <a:endParaRPr lang="en-US" sz="1300" dirty="0"/>
                     </a:p>
                   </a:txBody>
                   <a:tcPr marL="91440" marR="91440" marT="45720" marB="45720" anchor="ctr">
@@ -10419,14 +12932,14 @@
                         <a:buNone/>
                       </a:pPr>
                       <a:r>
-                        <a:rPr lang="en-US" sz="1400" dirty="0">
+                        <a:rPr lang="en-US" sz="1300" dirty="0">
                           <a:solidFill>
                             <a:srgbClr val="14212B"/>
                           </a:solidFill>
                         </a:rPr>
                         <a:t>the model</a:t>
                       </a:r>
-                      <a:endParaRPr lang="en-US" sz="1400" dirty="0"/>
+                      <a:endParaRPr lang="en-US" sz="1300" dirty="0"/>
                     </a:p>
                   </a:txBody>
                   <a:tcPr marL="91440" marR="91440" marT="45720" marB="45720" anchor="ctr">
@@ -10477,14 +12990,14 @@
                         <a:buNone/>
                       </a:pPr>
                       <a:r>
-                        <a:rPr lang="en-US" sz="1400" dirty="0">
+                        <a:rPr lang="en-US" sz="1300" dirty="0">
                           <a:solidFill>
                             <a:srgbClr val="14212B"/>
                           </a:solidFill>
                         </a:rPr>
                         <a:t>the model</a:t>
                       </a:r>
-                      <a:endParaRPr lang="en-US" sz="1400" dirty="0"/>
+                      <a:endParaRPr lang="en-US" sz="1300" dirty="0"/>
                     </a:p>
                   </a:txBody>
                   <a:tcPr marL="91440" marR="91440" marT="45720" marB="45720" anchor="ctr">
@@ -10535,14 +13048,14 @@
                         <a:buNone/>
                       </a:pPr>
                       <a:r>
-                        <a:rPr lang="en-US" sz="1400" b="1" dirty="0">
+                        <a:rPr lang="en-US" sz="1300" b="1" dirty="0">
                           <a:solidFill>
                             <a:srgbClr val="0B7A75"/>
                           </a:solidFill>
                         </a:rPr>
                         <a:t>yes</a:t>
                       </a:r>
-                      <a:endParaRPr lang="en-US" sz="1400" dirty="0"/>
+                      <a:endParaRPr lang="en-US" sz="1300" dirty="0"/>
                     </a:p>
                   </a:txBody>
                   <a:tcPr marL="91440" marR="91440" marT="45720" marB="45720" anchor="ctr">
@@ -10593,14 +13106,14 @@
                         <a:buNone/>
                       </a:pPr>
                       <a:r>
-                        <a:rPr lang="en-US" sz="1400" dirty="0">
+                        <a:rPr lang="en-US" sz="1300" dirty="0">
                           <a:solidFill>
                             <a:srgbClr val="7A8A96"/>
                           </a:solidFill>
                         </a:rPr>
-                        <a:t>–</a:t>
+                        <a:t>-</a:t>
                       </a:r>
-                      <a:endParaRPr lang="en-US" sz="1400" dirty="0"/>
+                      <a:endParaRPr lang="en-US" sz="1300" dirty="0"/>
                     </a:p>
                   </a:txBody>
                   <a:tcPr marL="91440" marR="91440" marT="45720" marB="45720" anchor="ctr">
@@ -10651,14 +13164,14 @@
                         <a:buNone/>
                       </a:pPr>
                       <a:r>
-                        <a:rPr lang="en-US" sz="1400" dirty="0">
+                        <a:rPr lang="en-US" sz="1300" dirty="0">
                           <a:solidFill>
                             <a:srgbClr val="7A8A96"/>
                           </a:solidFill>
                         </a:rPr>
-                        <a:t>–</a:t>
+                        <a:t>-</a:t>
                       </a:r>
-                      <a:endParaRPr lang="en-US" sz="1400" dirty="0"/>
+                      <a:endParaRPr lang="en-US" sz="1300" dirty="0"/>
                     </a:p>
                   </a:txBody>
                   <a:tcPr marL="91440" marR="91440" marT="45720" marB="45720" anchor="ctr">
@@ -10701,7 +13214,7 @@
                   </a:tcPr>
                 </a:tc>
               </a:tr>
-              <a:tr h="457200">
+              <a:tr h="329184">
                 <a:tc>
                   <a:txBody>
                     <a:bodyPr/>
@@ -10711,14 +13224,14 @@
                         <a:buNone/>
                       </a:pPr>
                       <a:r>
-                        <a:rPr lang="en-US" sz="1400" dirty="0">
+                        <a:rPr lang="en-US" sz="1300" dirty="0">
                           <a:solidFill>
                             <a:srgbClr val="14212B"/>
                           </a:solidFill>
                         </a:rPr>
                         <a:t>3 Multi-tool</a:t>
                       </a:r>
-                      <a:endParaRPr lang="en-US" sz="1400" dirty="0"/>
+                      <a:endParaRPr lang="en-US" sz="1300" dirty="0"/>
                     </a:p>
                   </a:txBody>
                   <a:tcPr marL="91440" marR="91440" marT="45720" marB="45720" anchor="ctr">
@@ -10769,14 +13282,14 @@
                         <a:buNone/>
                       </a:pPr>
                       <a:r>
-                        <a:rPr lang="en-US" sz="1400" dirty="0">
+                        <a:rPr lang="en-US" sz="1300" dirty="0">
                           <a:solidFill>
                             <a:srgbClr val="14212B"/>
                           </a:solidFill>
                         </a:rPr>
                         <a:t>the model</a:t>
                       </a:r>
-                      <a:endParaRPr lang="en-US" sz="1400" dirty="0"/>
+                      <a:endParaRPr lang="en-US" sz="1300" dirty="0"/>
                     </a:p>
                   </a:txBody>
                   <a:tcPr marL="91440" marR="91440" marT="45720" marB="45720" anchor="ctr">
@@ -10827,14 +13340,14 @@
                         <a:buNone/>
                       </a:pPr>
                       <a:r>
-                        <a:rPr lang="en-US" sz="1400" dirty="0">
+                        <a:rPr lang="en-US" sz="1300" dirty="0">
                           <a:solidFill>
                             <a:srgbClr val="14212B"/>
                           </a:solidFill>
                         </a:rPr>
                         <a:t>the model</a:t>
                       </a:r>
-                      <a:endParaRPr lang="en-US" sz="1400" dirty="0"/>
+                      <a:endParaRPr lang="en-US" sz="1300" dirty="0"/>
                     </a:p>
                   </a:txBody>
                   <a:tcPr marL="91440" marR="91440" marT="45720" marB="45720" anchor="ctr">
@@ -10885,14 +13398,14 @@
                         <a:buNone/>
                       </a:pPr>
                       <a:r>
-                        <a:rPr lang="en-US" sz="1400" b="1" dirty="0">
+                        <a:rPr lang="en-US" sz="1300" b="1" dirty="0">
                           <a:solidFill>
                             <a:srgbClr val="0B7A75"/>
                           </a:solidFill>
                         </a:rPr>
                         <a:t>yes</a:t>
                       </a:r>
-                      <a:endParaRPr lang="en-US" sz="1400" dirty="0"/>
+                      <a:endParaRPr lang="en-US" sz="1300" dirty="0"/>
                     </a:p>
                   </a:txBody>
                   <a:tcPr marL="91440" marR="91440" marT="45720" marB="45720" anchor="ctr">
@@ -10943,14 +13456,14 @@
                         <a:buNone/>
                       </a:pPr>
                       <a:r>
-                        <a:rPr lang="en-US" sz="1400" b="1" dirty="0">
+                        <a:rPr lang="en-US" sz="1300" b="1" dirty="0">
                           <a:solidFill>
                             <a:srgbClr val="0B7A75"/>
                           </a:solidFill>
                         </a:rPr>
                         <a:t>yes</a:t>
                       </a:r>
-                      <a:endParaRPr lang="en-US" sz="1400" dirty="0"/>
+                      <a:endParaRPr lang="en-US" sz="1300" dirty="0"/>
                     </a:p>
                   </a:txBody>
                   <a:tcPr marL="91440" marR="91440" marT="45720" marB="45720" anchor="ctr">
@@ -11001,14 +13514,954 @@
                         <a:buNone/>
                       </a:pPr>
                       <a:r>
-                        <a:rPr lang="en-US" sz="1400" b="1" dirty="0">
+                        <a:rPr lang="en-US" sz="1300" b="1" dirty="0">
                           <a:solidFill>
                             <a:srgbClr val="0B7A75"/>
                           </a:solidFill>
                         </a:rPr>
                         <a:t>yes</a:t>
                       </a:r>
-                      <a:endParaRPr lang="en-US" sz="1400" dirty="0"/>
+                      <a:endParaRPr lang="en-US" sz="1300" dirty="0"/>
+                    </a:p>
+                  </a:txBody>
+                  <a:tcPr marL="91440" marR="91440" marT="45720" marB="45720" anchor="ctr">
+                    <a:lnL w="6350" cap="flat" cmpd="sng" algn="ctr">
+                      <a:solidFill>
+                        <a:srgbClr val="D8E0E5"/>
+                      </a:solidFill>
+                      <a:prstDash val="solid"/>
+                      <a:round/>
+                      <a:headEnd type="none" w="med" len="med"/>
+                      <a:tailEnd type="none" w="med" len="med"/>
+                    </a:lnL>
+                    <a:lnR w="6350" cap="flat" cmpd="sng" algn="ctr">
+                      <a:solidFill>
+                        <a:srgbClr val="D8E0E5"/>
+                      </a:solidFill>
+                      <a:prstDash val="solid"/>
+                      <a:round/>
+                      <a:headEnd type="none" w="med" len="med"/>
+                      <a:tailEnd type="none" w="med" len="med"/>
+                    </a:lnR>
+                    <a:lnT w="6350" cap="flat" cmpd="sng" algn="ctr">
+                      <a:solidFill>
+                        <a:srgbClr val="D8E0E5"/>
+                      </a:solidFill>
+                      <a:prstDash val="solid"/>
+                      <a:round/>
+                      <a:headEnd type="none" w="med" len="med"/>
+                      <a:tailEnd type="none" w="med" len="med"/>
+                    </a:lnT>
+                    <a:lnB w="6350" cap="flat" cmpd="sng" algn="ctr">
+                      <a:solidFill>
+                        <a:srgbClr val="D8E0E5"/>
+                      </a:solidFill>
+                      <a:prstDash val="solid"/>
+                      <a:round/>
+                      <a:headEnd type="none" w="med" len="med"/>
+                      <a:tailEnd type="none" w="med" len="med"/>
+                    </a:lnB>
+                  </a:tcPr>
+                </a:tc>
+              </a:tr>
+              <a:tr h="329184">
+                <a:tc>
+                  <a:txBody>
+                    <a:bodyPr/>
+                    <a:lstStyle/>
+                    <a:p>
+                      <a:pPr indent="0" marL="0">
+                        <a:buNone/>
+                      </a:pPr>
+                      <a:r>
+                        <a:rPr lang="en-US" sz="1300" dirty="0">
+                          <a:solidFill>
+                            <a:srgbClr val="14212B"/>
+                          </a:solidFill>
+                        </a:rPr>
+                        <a:t>3b Framework</a:t>
+                      </a:r>
+                      <a:endParaRPr lang="en-US" sz="1300" dirty="0"/>
+                    </a:p>
+                  </a:txBody>
+                  <a:tcPr marL="91440" marR="91440" marT="45720" marB="45720" anchor="ctr">
+                    <a:lnL w="6350" cap="flat" cmpd="sng" algn="ctr">
+                      <a:solidFill>
+                        <a:srgbClr val="D8E0E5"/>
+                      </a:solidFill>
+                      <a:prstDash val="solid"/>
+                      <a:round/>
+                      <a:headEnd type="none" w="med" len="med"/>
+                      <a:tailEnd type="none" w="med" len="med"/>
+                    </a:lnL>
+                    <a:lnR w="6350" cap="flat" cmpd="sng" algn="ctr">
+                      <a:solidFill>
+                        <a:srgbClr val="D8E0E5"/>
+                      </a:solidFill>
+                      <a:prstDash val="solid"/>
+                      <a:round/>
+                      <a:headEnd type="none" w="med" len="med"/>
+                      <a:tailEnd type="none" w="med" len="med"/>
+                    </a:lnR>
+                    <a:lnT w="6350" cap="flat" cmpd="sng" algn="ctr">
+                      <a:solidFill>
+                        <a:srgbClr val="D8E0E5"/>
+                      </a:solidFill>
+                      <a:prstDash val="solid"/>
+                      <a:round/>
+                      <a:headEnd type="none" w="med" len="med"/>
+                      <a:tailEnd type="none" w="med" len="med"/>
+                    </a:lnT>
+                    <a:lnB w="6350" cap="flat" cmpd="sng" algn="ctr">
+                      <a:solidFill>
+                        <a:srgbClr val="D8E0E5"/>
+                      </a:solidFill>
+                      <a:prstDash val="solid"/>
+                      <a:round/>
+                      <a:headEnd type="none" w="med" len="med"/>
+                      <a:tailEnd type="none" w="med" len="med"/>
+                    </a:lnB>
+                  </a:tcPr>
+                </a:tc>
+                <a:tc>
+                  <a:txBody>
+                    <a:bodyPr/>
+                    <a:lstStyle/>
+                    <a:p>
+                      <a:pPr indent="0" marL="0">
+                        <a:buNone/>
+                      </a:pPr>
+                      <a:r>
+                        <a:rPr lang="en-US" sz="1300" dirty="0">
+                          <a:solidFill>
+                            <a:srgbClr val="14212B"/>
+                          </a:solidFill>
+                        </a:rPr>
+                        <a:t>the model</a:t>
+                      </a:r>
+                      <a:endParaRPr lang="en-US" sz="1300" dirty="0"/>
+                    </a:p>
+                  </a:txBody>
+                  <a:tcPr marL="91440" marR="91440" marT="45720" marB="45720" anchor="ctr">
+                    <a:lnL w="6350" cap="flat" cmpd="sng" algn="ctr">
+                      <a:solidFill>
+                        <a:srgbClr val="D8E0E5"/>
+                      </a:solidFill>
+                      <a:prstDash val="solid"/>
+                      <a:round/>
+                      <a:headEnd type="none" w="med" len="med"/>
+                      <a:tailEnd type="none" w="med" len="med"/>
+                    </a:lnL>
+                    <a:lnR w="6350" cap="flat" cmpd="sng" algn="ctr">
+                      <a:solidFill>
+                        <a:srgbClr val="D8E0E5"/>
+                      </a:solidFill>
+                      <a:prstDash val="solid"/>
+                      <a:round/>
+                      <a:headEnd type="none" w="med" len="med"/>
+                      <a:tailEnd type="none" w="med" len="med"/>
+                    </a:lnR>
+                    <a:lnT w="6350" cap="flat" cmpd="sng" algn="ctr">
+                      <a:solidFill>
+                        <a:srgbClr val="D8E0E5"/>
+                      </a:solidFill>
+                      <a:prstDash val="solid"/>
+                      <a:round/>
+                      <a:headEnd type="none" w="med" len="med"/>
+                      <a:tailEnd type="none" w="med" len="med"/>
+                    </a:lnT>
+                    <a:lnB w="6350" cap="flat" cmpd="sng" algn="ctr">
+                      <a:solidFill>
+                        <a:srgbClr val="D8E0E5"/>
+                      </a:solidFill>
+                      <a:prstDash val="solid"/>
+                      <a:round/>
+                      <a:headEnd type="none" w="med" len="med"/>
+                      <a:tailEnd type="none" w="med" len="med"/>
+                    </a:lnB>
+                  </a:tcPr>
+                </a:tc>
+                <a:tc>
+                  <a:txBody>
+                    <a:bodyPr/>
+                    <a:lstStyle/>
+                    <a:p>
+                      <a:pPr indent="0" marL="0">
+                        <a:buNone/>
+                      </a:pPr>
+                      <a:r>
+                        <a:rPr lang="en-US" sz="1300" dirty="0">
+                          <a:solidFill>
+                            <a:srgbClr val="14212B"/>
+                          </a:solidFill>
+                        </a:rPr>
+                        <a:t>framework loop</a:t>
+                      </a:r>
+                      <a:endParaRPr lang="en-US" sz="1300" dirty="0"/>
+                    </a:p>
+                  </a:txBody>
+                  <a:tcPr marL="91440" marR="91440" marT="45720" marB="45720" anchor="ctr">
+                    <a:lnL w="6350" cap="flat" cmpd="sng" algn="ctr">
+                      <a:solidFill>
+                        <a:srgbClr val="D8E0E5"/>
+                      </a:solidFill>
+                      <a:prstDash val="solid"/>
+                      <a:round/>
+                      <a:headEnd type="none" w="med" len="med"/>
+                      <a:tailEnd type="none" w="med" len="med"/>
+                    </a:lnL>
+                    <a:lnR w="6350" cap="flat" cmpd="sng" algn="ctr">
+                      <a:solidFill>
+                        <a:srgbClr val="D8E0E5"/>
+                      </a:solidFill>
+                      <a:prstDash val="solid"/>
+                      <a:round/>
+                      <a:headEnd type="none" w="med" len="med"/>
+                      <a:tailEnd type="none" w="med" len="med"/>
+                    </a:lnR>
+                    <a:lnT w="6350" cap="flat" cmpd="sng" algn="ctr">
+                      <a:solidFill>
+                        <a:srgbClr val="D8E0E5"/>
+                      </a:solidFill>
+                      <a:prstDash val="solid"/>
+                      <a:round/>
+                      <a:headEnd type="none" w="med" len="med"/>
+                      <a:tailEnd type="none" w="med" len="med"/>
+                    </a:lnT>
+                    <a:lnB w="6350" cap="flat" cmpd="sng" algn="ctr">
+                      <a:solidFill>
+                        <a:srgbClr val="D8E0E5"/>
+                      </a:solidFill>
+                      <a:prstDash val="solid"/>
+                      <a:round/>
+                      <a:headEnd type="none" w="med" len="med"/>
+                      <a:tailEnd type="none" w="med" len="med"/>
+                    </a:lnB>
+                  </a:tcPr>
+                </a:tc>
+                <a:tc>
+                  <a:txBody>
+                    <a:bodyPr/>
+                    <a:lstStyle/>
+                    <a:p>
+                      <a:pPr indent="0" marL="0">
+                        <a:buNone/>
+                      </a:pPr>
+                      <a:r>
+                        <a:rPr lang="en-US" sz="1300" b="1" dirty="0">
+                          <a:solidFill>
+                            <a:srgbClr val="0B7A75"/>
+                          </a:solidFill>
+                        </a:rPr>
+                        <a:t>yes</a:t>
+                      </a:r>
+                      <a:endParaRPr lang="en-US" sz="1300" dirty="0"/>
+                    </a:p>
+                  </a:txBody>
+                  <a:tcPr marL="91440" marR="91440" marT="45720" marB="45720" anchor="ctr">
+                    <a:lnL w="6350" cap="flat" cmpd="sng" algn="ctr">
+                      <a:solidFill>
+                        <a:srgbClr val="D8E0E5"/>
+                      </a:solidFill>
+                      <a:prstDash val="solid"/>
+                      <a:round/>
+                      <a:headEnd type="none" w="med" len="med"/>
+                      <a:tailEnd type="none" w="med" len="med"/>
+                    </a:lnL>
+                    <a:lnR w="6350" cap="flat" cmpd="sng" algn="ctr">
+                      <a:solidFill>
+                        <a:srgbClr val="D8E0E5"/>
+                      </a:solidFill>
+                      <a:prstDash val="solid"/>
+                      <a:round/>
+                      <a:headEnd type="none" w="med" len="med"/>
+                      <a:tailEnd type="none" w="med" len="med"/>
+                    </a:lnR>
+                    <a:lnT w="6350" cap="flat" cmpd="sng" algn="ctr">
+                      <a:solidFill>
+                        <a:srgbClr val="D8E0E5"/>
+                      </a:solidFill>
+                      <a:prstDash val="solid"/>
+                      <a:round/>
+                      <a:headEnd type="none" w="med" len="med"/>
+                      <a:tailEnd type="none" w="med" len="med"/>
+                    </a:lnT>
+                    <a:lnB w="6350" cap="flat" cmpd="sng" algn="ctr">
+                      <a:solidFill>
+                        <a:srgbClr val="D8E0E5"/>
+                      </a:solidFill>
+                      <a:prstDash val="solid"/>
+                      <a:round/>
+                      <a:headEnd type="none" w="med" len="med"/>
+                      <a:tailEnd type="none" w="med" len="med"/>
+                    </a:lnB>
+                  </a:tcPr>
+                </a:tc>
+                <a:tc>
+                  <a:txBody>
+                    <a:bodyPr/>
+                    <a:lstStyle/>
+                    <a:p>
+                      <a:pPr indent="0" marL="0">
+                        <a:buNone/>
+                      </a:pPr>
+                      <a:r>
+                        <a:rPr lang="en-US" sz="1300" b="1" dirty="0">
+                          <a:solidFill>
+                            <a:srgbClr val="0B7A75"/>
+                          </a:solidFill>
+                        </a:rPr>
+                        <a:t>yes</a:t>
+                      </a:r>
+                      <a:endParaRPr lang="en-US" sz="1300" dirty="0"/>
+                    </a:p>
+                  </a:txBody>
+                  <a:tcPr marL="91440" marR="91440" marT="45720" marB="45720" anchor="ctr">
+                    <a:lnL w="6350" cap="flat" cmpd="sng" algn="ctr">
+                      <a:solidFill>
+                        <a:srgbClr val="D8E0E5"/>
+                      </a:solidFill>
+                      <a:prstDash val="solid"/>
+                      <a:round/>
+                      <a:headEnd type="none" w="med" len="med"/>
+                      <a:tailEnd type="none" w="med" len="med"/>
+                    </a:lnL>
+                    <a:lnR w="6350" cap="flat" cmpd="sng" algn="ctr">
+                      <a:solidFill>
+                        <a:srgbClr val="D8E0E5"/>
+                      </a:solidFill>
+                      <a:prstDash val="solid"/>
+                      <a:round/>
+                      <a:headEnd type="none" w="med" len="med"/>
+                      <a:tailEnd type="none" w="med" len="med"/>
+                    </a:lnR>
+                    <a:lnT w="6350" cap="flat" cmpd="sng" algn="ctr">
+                      <a:solidFill>
+                        <a:srgbClr val="D8E0E5"/>
+                      </a:solidFill>
+                      <a:prstDash val="solid"/>
+                      <a:round/>
+                      <a:headEnd type="none" w="med" len="med"/>
+                      <a:tailEnd type="none" w="med" len="med"/>
+                    </a:lnT>
+                    <a:lnB w="6350" cap="flat" cmpd="sng" algn="ctr">
+                      <a:solidFill>
+                        <a:srgbClr val="D8E0E5"/>
+                      </a:solidFill>
+                      <a:prstDash val="solid"/>
+                      <a:round/>
+                      <a:headEnd type="none" w="med" len="med"/>
+                      <a:tailEnd type="none" w="med" len="med"/>
+                    </a:lnB>
+                  </a:tcPr>
+                </a:tc>
+                <a:tc>
+                  <a:txBody>
+                    <a:bodyPr/>
+                    <a:lstStyle/>
+                    <a:p>
+                      <a:pPr indent="0" marL="0">
+                        <a:buNone/>
+                      </a:pPr>
+                      <a:r>
+                        <a:rPr lang="en-US" sz="1300" b="1" dirty="0">
+                          <a:solidFill>
+                            <a:srgbClr val="0B7A75"/>
+                          </a:solidFill>
+                        </a:rPr>
+                        <a:t>yes</a:t>
+                      </a:r>
+                      <a:endParaRPr lang="en-US" sz="1300" dirty="0"/>
+                    </a:p>
+                  </a:txBody>
+                  <a:tcPr marL="91440" marR="91440" marT="45720" marB="45720" anchor="ctr">
+                    <a:lnL w="6350" cap="flat" cmpd="sng" algn="ctr">
+                      <a:solidFill>
+                        <a:srgbClr val="D8E0E5"/>
+                      </a:solidFill>
+                      <a:prstDash val="solid"/>
+                      <a:round/>
+                      <a:headEnd type="none" w="med" len="med"/>
+                      <a:tailEnd type="none" w="med" len="med"/>
+                    </a:lnL>
+                    <a:lnR w="6350" cap="flat" cmpd="sng" algn="ctr">
+                      <a:solidFill>
+                        <a:srgbClr val="D8E0E5"/>
+                      </a:solidFill>
+                      <a:prstDash val="solid"/>
+                      <a:round/>
+                      <a:headEnd type="none" w="med" len="med"/>
+                      <a:tailEnd type="none" w="med" len="med"/>
+                    </a:lnR>
+                    <a:lnT w="6350" cap="flat" cmpd="sng" algn="ctr">
+                      <a:solidFill>
+                        <a:srgbClr val="D8E0E5"/>
+                      </a:solidFill>
+                      <a:prstDash val="solid"/>
+                      <a:round/>
+                      <a:headEnd type="none" w="med" len="med"/>
+                      <a:tailEnd type="none" w="med" len="med"/>
+                    </a:lnT>
+                    <a:lnB w="6350" cap="flat" cmpd="sng" algn="ctr">
+                      <a:solidFill>
+                        <a:srgbClr val="D8E0E5"/>
+                      </a:solidFill>
+                      <a:prstDash val="solid"/>
+                      <a:round/>
+                      <a:headEnd type="none" w="med" len="med"/>
+                      <a:tailEnd type="none" w="med" len="med"/>
+                    </a:lnB>
+                  </a:tcPr>
+                </a:tc>
+              </a:tr>
+              <a:tr h="329184">
+                <a:tc>
+                  <a:txBody>
+                    <a:bodyPr/>
+                    <a:lstStyle/>
+                    <a:p>
+                      <a:pPr indent="0" marL="0">
+                        <a:buNone/>
+                      </a:pPr>
+                      <a:r>
+                        <a:rPr lang="en-US" sz="1300" dirty="0">
+                          <a:solidFill>
+                            <a:srgbClr val="14212B"/>
+                          </a:solidFill>
+                        </a:rPr>
+                        <a:t>4 MCP server</a:t>
+                      </a:r>
+                      <a:endParaRPr lang="en-US" sz="1300" dirty="0"/>
+                    </a:p>
+                  </a:txBody>
+                  <a:tcPr marL="91440" marR="91440" marT="45720" marB="45720" anchor="ctr">
+                    <a:lnL w="6350" cap="flat" cmpd="sng" algn="ctr">
+                      <a:solidFill>
+                        <a:srgbClr val="D8E0E5"/>
+                      </a:solidFill>
+                      <a:prstDash val="solid"/>
+                      <a:round/>
+                      <a:headEnd type="none" w="med" len="med"/>
+                      <a:tailEnd type="none" w="med" len="med"/>
+                    </a:lnL>
+                    <a:lnR w="6350" cap="flat" cmpd="sng" algn="ctr">
+                      <a:solidFill>
+                        <a:srgbClr val="D8E0E5"/>
+                      </a:solidFill>
+                      <a:prstDash val="solid"/>
+                      <a:round/>
+                      <a:headEnd type="none" w="med" len="med"/>
+                      <a:tailEnd type="none" w="med" len="med"/>
+                    </a:lnR>
+                    <a:lnT w="6350" cap="flat" cmpd="sng" algn="ctr">
+                      <a:solidFill>
+                        <a:srgbClr val="D8E0E5"/>
+                      </a:solidFill>
+                      <a:prstDash val="solid"/>
+                      <a:round/>
+                      <a:headEnd type="none" w="med" len="med"/>
+                      <a:tailEnd type="none" w="med" len="med"/>
+                    </a:lnT>
+                    <a:lnB w="6350" cap="flat" cmpd="sng" algn="ctr">
+                      <a:solidFill>
+                        <a:srgbClr val="D8E0E5"/>
+                      </a:solidFill>
+                      <a:prstDash val="solid"/>
+                      <a:round/>
+                      <a:headEnd type="none" w="med" len="med"/>
+                      <a:tailEnd type="none" w="med" len="med"/>
+                    </a:lnB>
+                  </a:tcPr>
+                </a:tc>
+                <a:tc>
+                  <a:txBody>
+                    <a:bodyPr/>
+                    <a:lstStyle/>
+                    <a:p>
+                      <a:pPr indent="0" marL="0">
+                        <a:buNone/>
+                      </a:pPr>
+                      <a:r>
+                        <a:rPr lang="en-US" sz="1300" dirty="0">
+                          <a:solidFill>
+                            <a:srgbClr val="14212B"/>
+                          </a:solidFill>
+                        </a:rPr>
+                        <a:t>client model</a:t>
+                      </a:r>
+                      <a:endParaRPr lang="en-US" sz="1300" dirty="0"/>
+                    </a:p>
+                  </a:txBody>
+                  <a:tcPr marL="91440" marR="91440" marT="45720" marB="45720" anchor="ctr">
+                    <a:lnL w="6350" cap="flat" cmpd="sng" algn="ctr">
+                      <a:solidFill>
+                        <a:srgbClr val="D8E0E5"/>
+                      </a:solidFill>
+                      <a:prstDash val="solid"/>
+                      <a:round/>
+                      <a:headEnd type="none" w="med" len="med"/>
+                      <a:tailEnd type="none" w="med" len="med"/>
+                    </a:lnL>
+                    <a:lnR w="6350" cap="flat" cmpd="sng" algn="ctr">
+                      <a:solidFill>
+                        <a:srgbClr val="D8E0E5"/>
+                      </a:solidFill>
+                      <a:prstDash val="solid"/>
+                      <a:round/>
+                      <a:headEnd type="none" w="med" len="med"/>
+                      <a:tailEnd type="none" w="med" len="med"/>
+                    </a:lnR>
+                    <a:lnT w="6350" cap="flat" cmpd="sng" algn="ctr">
+                      <a:solidFill>
+                        <a:srgbClr val="D8E0E5"/>
+                      </a:solidFill>
+                      <a:prstDash val="solid"/>
+                      <a:round/>
+                      <a:headEnd type="none" w="med" len="med"/>
+                      <a:tailEnd type="none" w="med" len="med"/>
+                    </a:lnT>
+                    <a:lnB w="6350" cap="flat" cmpd="sng" algn="ctr">
+                      <a:solidFill>
+                        <a:srgbClr val="D8E0E5"/>
+                      </a:solidFill>
+                      <a:prstDash val="solid"/>
+                      <a:round/>
+                      <a:headEnd type="none" w="med" len="med"/>
+                      <a:tailEnd type="none" w="med" len="med"/>
+                    </a:lnB>
+                  </a:tcPr>
+                </a:tc>
+                <a:tc>
+                  <a:txBody>
+                    <a:bodyPr/>
+                    <a:lstStyle/>
+                    <a:p>
+                      <a:pPr indent="0" marL="0">
+                        <a:buNone/>
+                      </a:pPr>
+                      <a:r>
+                        <a:rPr lang="en-US" sz="1300" dirty="0">
+                          <a:solidFill>
+                            <a:srgbClr val="14212B"/>
+                          </a:solidFill>
+                        </a:rPr>
+                        <a:t>the client</a:t>
+                      </a:r>
+                      <a:endParaRPr lang="en-US" sz="1300" dirty="0"/>
+                    </a:p>
+                  </a:txBody>
+                  <a:tcPr marL="91440" marR="91440" marT="45720" marB="45720" anchor="ctr">
+                    <a:lnL w="6350" cap="flat" cmpd="sng" algn="ctr">
+                      <a:solidFill>
+                        <a:srgbClr val="D8E0E5"/>
+                      </a:solidFill>
+                      <a:prstDash val="solid"/>
+                      <a:round/>
+                      <a:headEnd type="none" w="med" len="med"/>
+                      <a:tailEnd type="none" w="med" len="med"/>
+                    </a:lnL>
+                    <a:lnR w="6350" cap="flat" cmpd="sng" algn="ctr">
+                      <a:solidFill>
+                        <a:srgbClr val="D8E0E5"/>
+                      </a:solidFill>
+                      <a:prstDash val="solid"/>
+                      <a:round/>
+                      <a:headEnd type="none" w="med" len="med"/>
+                      <a:tailEnd type="none" w="med" len="med"/>
+                    </a:lnR>
+                    <a:lnT w="6350" cap="flat" cmpd="sng" algn="ctr">
+                      <a:solidFill>
+                        <a:srgbClr val="D8E0E5"/>
+                      </a:solidFill>
+                      <a:prstDash val="solid"/>
+                      <a:round/>
+                      <a:headEnd type="none" w="med" len="med"/>
+                      <a:tailEnd type="none" w="med" len="med"/>
+                    </a:lnT>
+                    <a:lnB w="6350" cap="flat" cmpd="sng" algn="ctr">
+                      <a:solidFill>
+                        <a:srgbClr val="D8E0E5"/>
+                      </a:solidFill>
+                      <a:prstDash val="solid"/>
+                      <a:round/>
+                      <a:headEnd type="none" w="med" len="med"/>
+                      <a:tailEnd type="none" w="med" len="med"/>
+                    </a:lnB>
+                  </a:tcPr>
+                </a:tc>
+                <a:tc gridSpan="3">
+                  <a:txBody>
+                    <a:bodyPr/>
+                    <a:lstStyle/>
+                    <a:p>
+                      <a:pPr indent="0" marL="0">
+                        <a:buNone/>
+                      </a:pPr>
+                      <a:r>
+                        <a:rPr lang="en-US" sz="1300" dirty="0">
+                          <a:solidFill>
+                            <a:srgbClr val="5A6B78"/>
+                          </a:solidFill>
+                        </a:rPr>
+                        <a:t>set by the client</a:t>
+                      </a:r>
+                      <a:endParaRPr lang="en-US" sz="1300" dirty="0"/>
+                    </a:p>
+                  </a:txBody>
+                  <a:tcPr marL="91440" marR="91440" marT="45720" marB="45720" anchor="ctr">
+                    <a:lnL w="6350" cap="flat" cmpd="sng" algn="ctr">
+                      <a:solidFill>
+                        <a:srgbClr val="D8E0E5"/>
+                      </a:solidFill>
+                      <a:prstDash val="solid"/>
+                      <a:round/>
+                      <a:headEnd type="none" w="med" len="med"/>
+                      <a:tailEnd type="none" w="med" len="med"/>
+                    </a:lnL>
+                    <a:lnR w="6350" cap="flat" cmpd="sng" algn="ctr">
+                      <a:solidFill>
+                        <a:srgbClr val="D8E0E5"/>
+                      </a:solidFill>
+                      <a:prstDash val="solid"/>
+                      <a:round/>
+                      <a:headEnd type="none" w="med" len="med"/>
+                      <a:tailEnd type="none" w="med" len="med"/>
+                    </a:lnR>
+                    <a:lnT w="6350" cap="flat" cmpd="sng" algn="ctr">
+                      <a:solidFill>
+                        <a:srgbClr val="D8E0E5"/>
+                      </a:solidFill>
+                      <a:prstDash val="solid"/>
+                      <a:round/>
+                      <a:headEnd type="none" w="med" len="med"/>
+                      <a:tailEnd type="none" w="med" len="med"/>
+                    </a:lnT>
+                    <a:lnB w="6350" cap="flat" cmpd="sng" algn="ctr">
+                      <a:solidFill>
+                        <a:srgbClr val="D8E0E5"/>
+                      </a:solidFill>
+                      <a:prstDash val="solid"/>
+                      <a:round/>
+                      <a:headEnd type="none" w="med" len="med"/>
+                      <a:tailEnd type="none" w="med" len="med"/>
+                    </a:lnB>
+                  </a:tcPr>
+                </a:tc>
+                <a:tc hMerge="1">
+                  <a:tcPr/>
+                </a:tc>
+                <a:tc hMerge="1">
+                  <a:tcPr/>
+                </a:tc>
+              </a:tr>
+              <a:tr h="329184">
+                <a:tc>
+                  <a:txBody>
+                    <a:bodyPr/>
+                    <a:lstStyle/>
+                    <a:p>
+                      <a:pPr indent="0" marL="0">
+                        <a:buNone/>
+                      </a:pPr>
+                      <a:r>
+                        <a:rPr lang="en-US" sz="1300" dirty="0">
+                          <a:solidFill>
+                            <a:srgbClr val="14212B"/>
+                          </a:solidFill>
+                        </a:rPr>
+                        <a:t>6 Any provider</a:t>
+                      </a:r>
+                      <a:endParaRPr lang="en-US" sz="1300" dirty="0"/>
+                    </a:p>
+                  </a:txBody>
+                  <a:tcPr marL="91440" marR="91440" marT="45720" marB="45720" anchor="ctr">
+                    <a:lnL w="6350" cap="flat" cmpd="sng" algn="ctr">
+                      <a:solidFill>
+                        <a:srgbClr val="D8E0E5"/>
+                      </a:solidFill>
+                      <a:prstDash val="solid"/>
+                      <a:round/>
+                      <a:headEnd type="none" w="med" len="med"/>
+                      <a:tailEnd type="none" w="med" len="med"/>
+                    </a:lnL>
+                    <a:lnR w="6350" cap="flat" cmpd="sng" algn="ctr">
+                      <a:solidFill>
+                        <a:srgbClr val="D8E0E5"/>
+                      </a:solidFill>
+                      <a:prstDash val="solid"/>
+                      <a:round/>
+                      <a:headEnd type="none" w="med" len="med"/>
+                      <a:tailEnd type="none" w="med" len="med"/>
+                    </a:lnR>
+                    <a:lnT w="6350" cap="flat" cmpd="sng" algn="ctr">
+                      <a:solidFill>
+                        <a:srgbClr val="D8E0E5"/>
+                      </a:solidFill>
+                      <a:prstDash val="solid"/>
+                      <a:round/>
+                      <a:headEnd type="none" w="med" len="med"/>
+                      <a:tailEnd type="none" w="med" len="med"/>
+                    </a:lnT>
+                    <a:lnB w="6350" cap="flat" cmpd="sng" algn="ctr">
+                      <a:solidFill>
+                        <a:srgbClr val="D8E0E5"/>
+                      </a:solidFill>
+                      <a:prstDash val="solid"/>
+                      <a:round/>
+                      <a:headEnd type="none" w="med" len="med"/>
+                      <a:tailEnd type="none" w="med" len="med"/>
+                    </a:lnB>
+                  </a:tcPr>
+                </a:tc>
+                <a:tc>
+                  <a:txBody>
+                    <a:bodyPr/>
+                    <a:lstStyle/>
+                    <a:p>
+                      <a:pPr indent="0" marL="0">
+                        <a:buNone/>
+                      </a:pPr>
+                      <a:r>
+                        <a:rPr lang="en-US" sz="1300" dirty="0">
+                          <a:solidFill>
+                            <a:srgbClr val="14212B"/>
+                          </a:solidFill>
+                        </a:rPr>
+                        <a:t>the model</a:t>
+                      </a:r>
+                      <a:endParaRPr lang="en-US" sz="1300" dirty="0"/>
+                    </a:p>
+                  </a:txBody>
+                  <a:tcPr marL="91440" marR="91440" marT="45720" marB="45720" anchor="ctr">
+                    <a:lnL w="6350" cap="flat" cmpd="sng" algn="ctr">
+                      <a:solidFill>
+                        <a:srgbClr val="D8E0E5"/>
+                      </a:solidFill>
+                      <a:prstDash val="solid"/>
+                      <a:round/>
+                      <a:headEnd type="none" w="med" len="med"/>
+                      <a:tailEnd type="none" w="med" len="med"/>
+                    </a:lnL>
+                    <a:lnR w="6350" cap="flat" cmpd="sng" algn="ctr">
+                      <a:solidFill>
+                        <a:srgbClr val="D8E0E5"/>
+                      </a:solidFill>
+                      <a:prstDash val="solid"/>
+                      <a:round/>
+                      <a:headEnd type="none" w="med" len="med"/>
+                      <a:tailEnd type="none" w="med" len="med"/>
+                    </a:lnR>
+                    <a:lnT w="6350" cap="flat" cmpd="sng" algn="ctr">
+                      <a:solidFill>
+                        <a:srgbClr val="D8E0E5"/>
+                      </a:solidFill>
+                      <a:prstDash val="solid"/>
+                      <a:round/>
+                      <a:headEnd type="none" w="med" len="med"/>
+                      <a:tailEnd type="none" w="med" len="med"/>
+                    </a:lnT>
+                    <a:lnB w="6350" cap="flat" cmpd="sng" algn="ctr">
+                      <a:solidFill>
+                        <a:srgbClr val="D8E0E5"/>
+                      </a:solidFill>
+                      <a:prstDash val="solid"/>
+                      <a:round/>
+                      <a:headEnd type="none" w="med" len="med"/>
+                      <a:tailEnd type="none" w="med" len="med"/>
+                    </a:lnB>
+                  </a:tcPr>
+                </a:tc>
+                <a:tc>
+                  <a:txBody>
+                    <a:bodyPr/>
+                    <a:lstStyle/>
+                    <a:p>
+                      <a:pPr indent="0" marL="0">
+                        <a:buNone/>
+                      </a:pPr>
+                      <a:r>
+                        <a:rPr lang="en-US" sz="1300" dirty="0">
+                          <a:solidFill>
+                            <a:srgbClr val="14212B"/>
+                          </a:solidFill>
+                        </a:rPr>
+                        <a:t>the model</a:t>
+                      </a:r>
+                      <a:endParaRPr lang="en-US" sz="1300" dirty="0"/>
+                    </a:p>
+                  </a:txBody>
+                  <a:tcPr marL="91440" marR="91440" marT="45720" marB="45720" anchor="ctr">
+                    <a:lnL w="6350" cap="flat" cmpd="sng" algn="ctr">
+                      <a:solidFill>
+                        <a:srgbClr val="D8E0E5"/>
+                      </a:solidFill>
+                      <a:prstDash val="solid"/>
+                      <a:round/>
+                      <a:headEnd type="none" w="med" len="med"/>
+                      <a:tailEnd type="none" w="med" len="med"/>
+                    </a:lnL>
+                    <a:lnR w="6350" cap="flat" cmpd="sng" algn="ctr">
+                      <a:solidFill>
+                        <a:srgbClr val="D8E0E5"/>
+                      </a:solidFill>
+                      <a:prstDash val="solid"/>
+                      <a:round/>
+                      <a:headEnd type="none" w="med" len="med"/>
+                      <a:tailEnd type="none" w="med" len="med"/>
+                    </a:lnR>
+                    <a:lnT w="6350" cap="flat" cmpd="sng" algn="ctr">
+                      <a:solidFill>
+                        <a:srgbClr val="D8E0E5"/>
+                      </a:solidFill>
+                      <a:prstDash val="solid"/>
+                      <a:round/>
+                      <a:headEnd type="none" w="med" len="med"/>
+                      <a:tailEnd type="none" w="med" len="med"/>
+                    </a:lnT>
+                    <a:lnB w="6350" cap="flat" cmpd="sng" algn="ctr">
+                      <a:solidFill>
+                        <a:srgbClr val="D8E0E5"/>
+                      </a:solidFill>
+                      <a:prstDash val="solid"/>
+                      <a:round/>
+                      <a:headEnd type="none" w="med" len="med"/>
+                      <a:tailEnd type="none" w="med" len="med"/>
+                    </a:lnB>
+                  </a:tcPr>
+                </a:tc>
+                <a:tc>
+                  <a:txBody>
+                    <a:bodyPr/>
+                    <a:lstStyle/>
+                    <a:p>
+                      <a:pPr indent="0" marL="0">
+                        <a:buNone/>
+                      </a:pPr>
+                      <a:r>
+                        <a:rPr lang="en-US" sz="1300" b="1" dirty="0">
+                          <a:solidFill>
+                            <a:srgbClr val="0B7A75"/>
+                          </a:solidFill>
+                        </a:rPr>
+                        <a:t>yes</a:t>
+                      </a:r>
+                      <a:endParaRPr lang="en-US" sz="1300" dirty="0"/>
+                    </a:p>
+                  </a:txBody>
+                  <a:tcPr marL="91440" marR="91440" marT="45720" marB="45720" anchor="ctr">
+                    <a:lnL w="6350" cap="flat" cmpd="sng" algn="ctr">
+                      <a:solidFill>
+                        <a:srgbClr val="D8E0E5"/>
+                      </a:solidFill>
+                      <a:prstDash val="solid"/>
+                      <a:round/>
+                      <a:headEnd type="none" w="med" len="med"/>
+                      <a:tailEnd type="none" w="med" len="med"/>
+                    </a:lnL>
+                    <a:lnR w="6350" cap="flat" cmpd="sng" algn="ctr">
+                      <a:solidFill>
+                        <a:srgbClr val="D8E0E5"/>
+                      </a:solidFill>
+                      <a:prstDash val="solid"/>
+                      <a:round/>
+                      <a:headEnd type="none" w="med" len="med"/>
+                      <a:tailEnd type="none" w="med" len="med"/>
+                    </a:lnR>
+                    <a:lnT w="6350" cap="flat" cmpd="sng" algn="ctr">
+                      <a:solidFill>
+                        <a:srgbClr val="D8E0E5"/>
+                      </a:solidFill>
+                      <a:prstDash val="solid"/>
+                      <a:round/>
+                      <a:headEnd type="none" w="med" len="med"/>
+                      <a:tailEnd type="none" w="med" len="med"/>
+                    </a:lnT>
+                    <a:lnB w="6350" cap="flat" cmpd="sng" algn="ctr">
+                      <a:solidFill>
+                        <a:srgbClr val="D8E0E5"/>
+                      </a:solidFill>
+                      <a:prstDash val="solid"/>
+                      <a:round/>
+                      <a:headEnd type="none" w="med" len="med"/>
+                      <a:tailEnd type="none" w="med" len="med"/>
+                    </a:lnB>
+                  </a:tcPr>
+                </a:tc>
+                <a:tc>
+                  <a:txBody>
+                    <a:bodyPr/>
+                    <a:lstStyle/>
+                    <a:p>
+                      <a:pPr indent="0" marL="0">
+                        <a:buNone/>
+                      </a:pPr>
+                      <a:r>
+                        <a:rPr lang="en-US" sz="1300" b="1" dirty="0">
+                          <a:solidFill>
+                            <a:srgbClr val="0B7A75"/>
+                          </a:solidFill>
+                        </a:rPr>
+                        <a:t>yes</a:t>
+                      </a:r>
+                      <a:endParaRPr lang="en-US" sz="1300" dirty="0"/>
+                    </a:p>
+                  </a:txBody>
+                  <a:tcPr marL="91440" marR="91440" marT="45720" marB="45720" anchor="ctr">
+                    <a:lnL w="6350" cap="flat" cmpd="sng" algn="ctr">
+                      <a:solidFill>
+                        <a:srgbClr val="D8E0E5"/>
+                      </a:solidFill>
+                      <a:prstDash val="solid"/>
+                      <a:round/>
+                      <a:headEnd type="none" w="med" len="med"/>
+                      <a:tailEnd type="none" w="med" len="med"/>
+                    </a:lnL>
+                    <a:lnR w="6350" cap="flat" cmpd="sng" algn="ctr">
+                      <a:solidFill>
+                        <a:srgbClr val="D8E0E5"/>
+                      </a:solidFill>
+                      <a:prstDash val="solid"/>
+                      <a:round/>
+                      <a:headEnd type="none" w="med" len="med"/>
+                      <a:tailEnd type="none" w="med" len="med"/>
+                    </a:lnR>
+                    <a:lnT w="6350" cap="flat" cmpd="sng" algn="ctr">
+                      <a:solidFill>
+                        <a:srgbClr val="D8E0E5"/>
+                      </a:solidFill>
+                      <a:prstDash val="solid"/>
+                      <a:round/>
+                      <a:headEnd type="none" w="med" len="med"/>
+                      <a:tailEnd type="none" w="med" len="med"/>
+                    </a:lnT>
+                    <a:lnB w="6350" cap="flat" cmpd="sng" algn="ctr">
+                      <a:solidFill>
+                        <a:srgbClr val="D8E0E5"/>
+                      </a:solidFill>
+                      <a:prstDash val="solid"/>
+                      <a:round/>
+                      <a:headEnd type="none" w="med" len="med"/>
+                      <a:tailEnd type="none" w="med" len="med"/>
+                    </a:lnB>
+                  </a:tcPr>
+                </a:tc>
+                <a:tc>
+                  <a:txBody>
+                    <a:bodyPr/>
+                    <a:lstStyle/>
+                    <a:p>
+                      <a:pPr indent="0" marL="0">
+                        <a:buNone/>
+                      </a:pPr>
+                      <a:r>
+                        <a:rPr lang="en-US" sz="1300" b="1" dirty="0">
+                          <a:solidFill>
+                            <a:srgbClr val="0B7A75"/>
+                          </a:solidFill>
+                        </a:rPr>
+                        <a:t>yes</a:t>
+                      </a:r>
+                      <a:endParaRPr lang="en-US" sz="1300" dirty="0"/>
                     </a:p>
                   </a:txBody>
                   <a:tcPr marL="91440" marR="91440" marT="45720" marB="45720" anchor="ctr">
@@ -11063,12 +14516,12 @@
         </p:nvSpPr>
         <p:spPr>
           <a:xfrm>
-            <a:off x="457200" y="3840480"/>
-            <a:ext cx="8229600" cy="914400"/>
+            <a:off x="457200" y="3931920"/>
+            <a:ext cx="8229600" cy="868680"/>
           </a:xfrm>
           <a:prstGeom prst="roundRect">
             <a:avLst>
-              <a:gd name="adj" fmla="val 8000"/>
+              <a:gd name="adj" fmla="val 8421"/>
             </a:avLst>
           </a:prstGeom>
           <a:solidFill>
@@ -11090,8 +14543,8 @@
         </p:nvSpPr>
         <p:spPr>
           <a:xfrm>
-            <a:off x="594360" y="3913632"/>
-            <a:ext cx="7955280" cy="768096"/>
+            <a:off x="594360" y="4005072"/>
+            <a:ext cx="7955280" cy="722376"/>
           </a:xfrm>
           <a:prstGeom prst="rect">
             <a:avLst/>
@@ -11256,8 +14709,8 @@
         </p:blipFill>
         <p:spPr>
           <a:xfrm>
-            <a:off x="457200" y="1476227"/>
-            <a:ext cx="5120640" cy="2808267"/>
+            <a:off x="457200" y="1560443"/>
+            <a:ext cx="5120640" cy="2639833"/>
           </a:xfrm>
           <a:prstGeom prst="rect">
             <a:avLst/>
@@ -11316,7 +14769,7 @@
                   <a:schemeClr val="tx1"/>
                 </a:solidFill>
               </a:rPr>
-              <a:t>Every stage reuses the Ollama, JokeAPI and trace packages</a:t>
+              <a:t>Stages reuse the same Ollama, JokeAPI and trace packages</a:t>
             </a:r>
             <a:endParaRPr lang="en-US" sz="1500" dirty="0"/>
           </a:p>
@@ -11466,162 +14919,9 @@
           </a:p>
         </p:txBody>
       </p:sp>
-      <p:sp>
-        <p:nvSpPr>
-          <p:cNvPr id="4" name="bullets"/>
-          <p:cNvSpPr txBox="1"/>
-          <p:nvPr/>
-        </p:nvSpPr>
-        <p:spPr>
-          <a:xfrm>
-            <a:off x="457200" y="1280160"/>
-            <a:ext cx="3840480" cy="1828800"/>
-          </a:xfrm>
-          <a:prstGeom prst="rect">
-            <a:avLst/>
-          </a:prstGeom>
-          <a:noFill/>
-          <a:ln/>
-        </p:spPr>
-        <p:txBody>
-          <a:bodyPr wrap="square" lIns="0" tIns="0" rIns="0" bIns="0" rtlCol="0" anchor="t"/>
-          <a:lstStyle/>
-          <a:p>
-            <a:pPr marL="342900" indent="-342900">
-              <a:spcAft>
-                <a:spcPts val="800"/>
-              </a:spcAft>
-              <a:buSzPct val="100000"/>
-              <a:buChar char="•"/>
-            </a:pPr>
-            <a:r>
-              <a:rPr lang="en-US" sz="1600" dirty="0">
-                <a:solidFill>
-                  <a:schemeClr val="tx1"/>
-                </a:solidFill>
-              </a:rPr>
-              <a:t>Lowercase the text and look for known words</a:t>
-            </a:r>
-            <a:endParaRPr lang="en-US" sz="1600" dirty="0"/>
-          </a:p>
-          <a:p>
-            <a:pPr marL="342900" indent="-342900">
-              <a:spcAft>
-                <a:spcPts val="800"/>
-              </a:spcAft>
-              <a:buSzPct val="100000"/>
-              <a:buChar char="•"/>
-            </a:pPr>
-            <a:r>
-              <a:rPr lang="en-US" sz="1600" dirty="0">
-                <a:solidFill>
-                  <a:schemeClr val="tx1"/>
-                </a:solidFill>
-              </a:rPr>
-              <a:t>Category names, "one-liner", "no politics"</a:t>
-            </a:r>
-            <a:endParaRPr lang="en-US" sz="1600" dirty="0"/>
-          </a:p>
-          <a:p>
-            <a:pPr marL="342900" indent="-342900">
-              <a:spcAft>
-                <a:spcPts val="800"/>
-              </a:spcAft>
-              <a:buSzPct val="100000"/>
-              <a:buChar char="•"/>
-            </a:pPr>
-            <a:r>
-              <a:rPr lang="en-US" sz="1600" dirty="0">
-                <a:solidFill>
-                  <a:schemeClr val="tx1"/>
-                </a:solidFill>
-              </a:rPr>
-              <a:t>Fast, free and predictable</a:t>
-            </a:r>
-            <a:endParaRPr lang="en-US" sz="1600" dirty="0"/>
-          </a:p>
-        </p:txBody>
-      </p:sp>
-      <p:sp>
-        <p:nvSpPr>
-          <p:cNvPr id="5" name="callout-bg"/>
-          <p:cNvSpPr/>
-          <p:nvPr/>
-        </p:nvSpPr>
-        <p:spPr>
-          <a:xfrm>
-            <a:off x="457200" y="3200400"/>
-            <a:ext cx="3840480" cy="1371600"/>
-          </a:xfrm>
-          <a:prstGeom prst="roundRect">
-            <a:avLst>
-              <a:gd name="adj" fmla="val 5333"/>
-            </a:avLst>
-          </a:prstGeom>
-          <a:solidFill>
-            <a:srgbClr val="EEF3F4"/>
-          </a:solidFill>
-          <a:ln w="12700">
-            <a:solidFill>
-              <a:srgbClr val="EEF3F4"/>
-            </a:solidFill>
-            <a:prstDash val="solid"/>
-          </a:ln>
-        </p:spPr>
-      </p:sp>
-      <p:sp>
-        <p:nvSpPr>
-          <p:cNvPr id="6" name="callout"/>
-          <p:cNvSpPr txBox="1"/>
-          <p:nvPr/>
-        </p:nvSpPr>
-        <p:spPr>
-          <a:xfrm>
-            <a:off x="594360" y="3273552"/>
-            <a:ext cx="3566160" cy="1225296"/>
-          </a:xfrm>
-          <a:prstGeom prst="rect">
-            <a:avLst/>
-          </a:prstGeom>
-          <a:noFill/>
-          <a:ln/>
-        </p:spPr>
-        <p:txBody>
-          <a:bodyPr wrap="square" lIns="0" tIns="0" rIns="0" bIns="0" rtlCol="0" anchor="t"/>
-          <a:lstStyle/>
-          <a:p>
-            <a:pPr indent="0" marL="0">
-              <a:buNone/>
-            </a:pPr>
-            <a:r>
-              <a:rPr lang="en-US" sz="1200" b="1" dirty="0">
-                <a:solidFill>
-                  <a:srgbClr val="B4561A"/>
-                </a:solidFill>
-              </a:rPr>
-              <a:t>WHERE IT BREAKS</a:t>
-            </a:r>
-            <a:endParaRPr lang="en-US" sz="1200" dirty="0"/>
-          </a:p>
-          <a:p>
-            <a:pPr indent="0" marL="0">
-              <a:buNone/>
-            </a:pPr>
-            <a:r>
-              <a:rPr lang="en-US" sz="1400" dirty="0">
-                <a:solidFill>
-                  <a:srgbClr val="14212B"/>
-                </a:solidFill>
-              </a:rPr>
-              <a:t>"keep it family friendly" matches nothing. "clean" blacklists only nsfw.</a:t>
-            </a:r>
-            <a:endParaRPr lang="en-US" sz="1200" dirty="0"/>
-          </a:p>
-        </p:txBody>
-      </p:sp>
       <p:pic>
         <p:nvPicPr>
-          <p:cNvPr id="7" name="Stage 0 flow" descr="Stage 0 flow">    </p:cNvPr>
+          <p:cNvPr id="4" name="Stage 0 flow" descr="Stage 0 flow">    </p:cNvPr>
           <p:cNvPicPr>
             <a:picLocks noChangeAspect="1"/>
           </p:cNvPicPr>
@@ -11635,14 +14935,168 @@
         </p:blipFill>
         <p:spPr>
           <a:xfrm>
-            <a:off x="4480560" y="2220356"/>
-            <a:ext cx="4297680" cy="1411449"/>
+            <a:off x="1228238" y="1097280"/>
+            <a:ext cx="6687524" cy="2194560"/>
           </a:xfrm>
           <a:prstGeom prst="rect">
             <a:avLst/>
           </a:prstGeom>
         </p:spPr>
       </p:pic>
+      <p:sp>
+        <p:nvSpPr>
+          <p:cNvPr id="5" name="callout-bg"/>
+          <p:cNvSpPr/>
+          <p:nvPr/>
+        </p:nvSpPr>
+        <p:spPr>
+          <a:xfrm>
+            <a:off x="457200" y="3474720"/>
+            <a:ext cx="4023360" cy="1188720"/>
+          </a:xfrm>
+          <a:prstGeom prst="roundRect">
+            <a:avLst>
+              <a:gd name="adj" fmla="val 6154"/>
+            </a:avLst>
+          </a:prstGeom>
+          <a:solidFill>
+            <a:srgbClr val="EEF3F4"/>
+          </a:solidFill>
+          <a:ln w="12700">
+            <a:solidFill>
+              <a:srgbClr val="EEF3F4"/>
+            </a:solidFill>
+            <a:prstDash val="solid"/>
+          </a:ln>
+        </p:spPr>
+      </p:sp>
+      <p:sp>
+        <p:nvSpPr>
+          <p:cNvPr id="6" name="callout"/>
+          <p:cNvSpPr txBox="1"/>
+          <p:nvPr/>
+        </p:nvSpPr>
+        <p:spPr>
+          <a:xfrm>
+            <a:off x="594360" y="3547872"/>
+            <a:ext cx="3749040" cy="1042416"/>
+          </a:xfrm>
+          <a:prstGeom prst="rect">
+            <a:avLst/>
+          </a:prstGeom>
+          <a:noFill/>
+          <a:ln/>
+        </p:spPr>
+        <p:txBody>
+          <a:bodyPr wrap="square" lIns="0" tIns="0" rIns="0" bIns="0" rtlCol="0" anchor="t"/>
+          <a:lstStyle/>
+          <a:p>
+            <a:pPr indent="0" marL="0">
+              <a:buNone/>
+            </a:pPr>
+            <a:r>
+              <a:rPr lang="en-US" sz="1200" b="1" dirty="0">
+                <a:solidFill>
+                  <a:srgbClr val="0B7A75"/>
+                </a:solidFill>
+              </a:rPr>
+              <a:t>WHERE IT WORKS</a:t>
+            </a:r>
+            <a:endParaRPr lang="en-US" sz="1200" dirty="0"/>
+          </a:p>
+          <a:p>
+            <a:pPr indent="0" marL="0">
+              <a:buNone/>
+            </a:pPr>
+            <a:r>
+              <a:rPr lang="en-US" sz="1400" dirty="0">
+                <a:solidFill>
+                  <a:srgbClr val="14212B"/>
+                </a:solidFill>
+              </a:rPr>
+              <a:t>"programming joke", "a two-part pun", "no politics": exact words in, exact filters out.</a:t>
+            </a:r>
+            <a:endParaRPr lang="en-US" sz="1200" dirty="0"/>
+          </a:p>
+        </p:txBody>
+      </p:sp>
+      <p:sp>
+        <p:nvSpPr>
+          <p:cNvPr id="7" name="callout-bg"/>
+          <p:cNvSpPr/>
+          <p:nvPr/>
+        </p:nvSpPr>
+        <p:spPr>
+          <a:xfrm>
+            <a:off x="4663440" y="3474720"/>
+            <a:ext cx="4023360" cy="1188720"/>
+          </a:xfrm>
+          <a:prstGeom prst="roundRect">
+            <a:avLst>
+              <a:gd name="adj" fmla="val 6154"/>
+            </a:avLst>
+          </a:prstGeom>
+          <a:solidFill>
+            <a:srgbClr val="EEF3F4"/>
+          </a:solidFill>
+          <a:ln w="12700">
+            <a:solidFill>
+              <a:srgbClr val="EEF3F4"/>
+            </a:solidFill>
+            <a:prstDash val="solid"/>
+          </a:ln>
+        </p:spPr>
+      </p:sp>
+      <p:sp>
+        <p:nvSpPr>
+          <p:cNvPr id="8" name="callout"/>
+          <p:cNvSpPr txBox="1"/>
+          <p:nvPr/>
+        </p:nvSpPr>
+        <p:spPr>
+          <a:xfrm>
+            <a:off x="4800600" y="3547872"/>
+            <a:ext cx="3749040" cy="1042416"/>
+          </a:xfrm>
+          <a:prstGeom prst="rect">
+            <a:avLst/>
+          </a:prstGeom>
+          <a:noFill/>
+          <a:ln/>
+        </p:spPr>
+        <p:txBody>
+          <a:bodyPr wrap="square" lIns="0" tIns="0" rIns="0" bIns="0" rtlCol="0" anchor="t"/>
+          <a:lstStyle/>
+          <a:p>
+            <a:pPr indent="0" marL="0">
+              <a:buNone/>
+            </a:pPr>
+            <a:r>
+              <a:rPr lang="en-US" sz="1200" b="1" dirty="0">
+                <a:solidFill>
+                  <a:srgbClr val="B4561A"/>
+                </a:solidFill>
+              </a:rPr>
+              <a:t>WHERE IT BREAKS</a:t>
+            </a:r>
+            <a:endParaRPr lang="en-US" sz="1200" dirty="0"/>
+          </a:p>
+          <a:p>
+            <a:pPr indent="0" marL="0">
+              <a:buNone/>
+            </a:pPr>
+            <a:r>
+              <a:rPr lang="en-US" sz="1400" dirty="0">
+                <a:solidFill>
+                  <a:srgbClr val="14212B"/>
+                </a:solidFill>
+              </a:rPr>
+              <a:t>"keep it family friendly" matches nothing. "clean" blacklists only nsfw.</a:t>
+            </a:r>
+            <a:endParaRPr lang="en-US" sz="1200" dirty="0"/>
+          </a:p>
+        </p:txBody>
+      </p:sp>
       <p:sp>
         <p:nvSpPr>
           <p:cNvPr id="25" name="Slide Number Placeholder 0"/>
@@ -11767,8 +15221,8 @@
         </p:blipFill>
         <p:spPr>
           <a:xfrm>
-            <a:off x="365760" y="1858927"/>
-            <a:ext cx="5120640" cy="2042866"/>
+            <a:off x="681773" y="1051560"/>
+            <a:ext cx="7780454" cy="3108960"/>
           </a:xfrm>
           <a:prstGeom prst="rect">
             <a:avLst/>
@@ -11777,14 +15231,14 @@
       </p:pic>
       <p:sp>
         <p:nvSpPr>
-          <p:cNvPr id="5" name="bullets"/>
+          <p:cNvPr id="5" name="takeaway"/>
           <p:cNvSpPr txBox="1"/>
           <p:nvPr/>
         </p:nvSpPr>
         <p:spPr>
           <a:xfrm>
-            <a:off x="5669280" y="1280160"/>
-            <a:ext cx="3108960" cy="2194560"/>
+            <a:off x="457200" y="4206240"/>
+            <a:ext cx="8229600" cy="548640"/>
           </a:xfrm>
           <a:prstGeom prst="rect">
             <a:avLst/>
@@ -11796,12 +15250,8 @@
           <a:bodyPr wrap="square" lIns="0" tIns="0" rIns="0" bIns="0" rtlCol="0" anchor="t"/>
           <a:lstStyle/>
           <a:p>
-            <a:pPr marL="342900" indent="-342900">
-              <a:spcAft>
-                <a:spcPts val="800"/>
-              </a:spcAft>
-              <a:buSzPct val="100000"/>
-              <a:buChar char="•"/>
+            <a:pPr indent="0" marL="0">
+              <a:buNone/>
             </a:pPr>
             <a:r>
               <a:rPr lang="en-US" sz="1500" dirty="0">
@@ -11809,140 +15259,9 @@
                   <a:schemeClr val="tx1"/>
                 </a:solidFill>
               </a:rPr>
-              <a:t>One call, with the JSON schema in the format field</a:t>
+              <a:t>One call with a JSON schema. The model can only emit valid JSON; your code decodes it, runs Normalize() and does the rest. Text in, struct out.</a:t>
             </a:r>
             <a:endParaRPr lang="en-US" sz="1500" dirty="0"/>
-          </a:p>
-          <a:p>
-            <a:pPr marL="342900" indent="-342900">
-              <a:spcAft>
-                <a:spcPts val="800"/>
-              </a:spcAft>
-              <a:buSzPct val="100000"/>
-              <a:buChar char="•"/>
-            </a:pPr>
-            <a:r>
-              <a:rPr lang="en-US" sz="1500" dirty="0">
-                <a:solidFill>
-                  <a:schemeClr val="tx1"/>
-                </a:solidFill>
-              </a:rPr>
-              <a:t>The model can only emit valid JSON</a:t>
-            </a:r>
-            <a:endParaRPr lang="en-US" sz="1500" dirty="0"/>
-          </a:p>
-          <a:p>
-            <a:pPr marL="342900" indent="-342900">
-              <a:spcAft>
-                <a:spcPts val="800"/>
-              </a:spcAft>
-              <a:buSzPct val="100000"/>
-              <a:buChar char="•"/>
-            </a:pPr>
-            <a:r>
-              <a:rPr lang="en-US" sz="1500" dirty="0">
-                <a:solidFill>
-                  <a:schemeClr val="tx1"/>
-                </a:solidFill>
-              </a:rPr>
-              <a:t>Decode, then Normalize(): trust nothing</a:t>
-            </a:r>
-            <a:endParaRPr lang="en-US" sz="1500" dirty="0"/>
-          </a:p>
-          <a:p>
-            <a:pPr marL="342900" indent="-342900">
-              <a:spcAft>
-                <a:spcPts val="800"/>
-              </a:spcAft>
-              <a:buSzPct val="100000"/>
-              <a:buChar char="•"/>
-            </a:pPr>
-            <a:r>
-              <a:rPr lang="en-US" sz="1500" dirty="0">
-                <a:solidFill>
-                  <a:schemeClr val="tx1"/>
-                </a:solidFill>
-              </a:rPr>
-              <a:t>Ollama or Claude API behind one prompt</a:t>
-            </a:r>
-            <a:endParaRPr lang="en-US" sz="1500" dirty="0"/>
-          </a:p>
-        </p:txBody>
-      </p:sp>
-      <p:sp>
-        <p:nvSpPr>
-          <p:cNvPr id="6" name="callout-bg"/>
-          <p:cNvSpPr/>
-          <p:nvPr/>
-        </p:nvSpPr>
-        <p:spPr>
-          <a:xfrm>
-            <a:off x="5669280" y="3566160"/>
-            <a:ext cx="3108960" cy="1005840"/>
-          </a:xfrm>
-          <a:prstGeom prst="roundRect">
-            <a:avLst>
-              <a:gd name="adj" fmla="val 7273"/>
-            </a:avLst>
-          </a:prstGeom>
-          <a:solidFill>
-            <a:srgbClr val="EEF3F4"/>
-          </a:solidFill>
-          <a:ln w="12700">
-            <a:solidFill>
-              <a:srgbClr val="EEF3F4"/>
-            </a:solidFill>
-            <a:prstDash val="solid"/>
-          </a:ln>
-        </p:spPr>
-      </p:sp>
-      <p:sp>
-        <p:nvSpPr>
-          <p:cNvPr id="7" name="callout"/>
-          <p:cNvSpPr txBox="1"/>
-          <p:nvPr/>
-        </p:nvSpPr>
-        <p:spPr>
-          <a:xfrm>
-            <a:off x="5806440" y="3639312"/>
-            <a:ext cx="2834640" cy="859536"/>
-          </a:xfrm>
-          <a:prstGeom prst="rect">
-            <a:avLst/>
-          </a:prstGeom>
-          <a:noFill/>
-          <a:ln/>
-        </p:spPr>
-        <p:txBody>
-          <a:bodyPr wrap="square" lIns="0" tIns="0" rIns="0" bIns="0" rtlCol="0" anchor="t"/>
-          <a:lstStyle/>
-          <a:p>
-            <a:pPr indent="0" marL="0">
-              <a:buNone/>
-            </a:pPr>
-            <a:r>
-              <a:rPr lang="en-US" sz="1200" b="1" dirty="0">
-                <a:solidFill>
-                  <a:srgbClr val="0B7A75"/>
-                </a:solidFill>
-              </a:rPr>
-              <a:t>LESSON</a:t>
-            </a:r>
-            <a:endParaRPr lang="en-US" sz="1200" dirty="0"/>
-          </a:p>
-          <a:p>
-            <a:pPr indent="0" marL="0">
-              <a:buNone/>
-            </a:pPr>
-            <a:r>
-              <a:rPr lang="en-US" sz="1400" dirty="0">
-                <a:solidFill>
-                  <a:srgbClr val="14212B"/>
-                </a:solidFill>
-              </a:rPr>
-              <a:t>The LLM becomes a typed function: text in, struct out.</a:t>
-            </a:r>
-            <a:endParaRPr lang="en-US" sz="1200" dirty="0"/>
           </a:p>
         </p:txBody>
       </p:sp>
@@ -12241,8 +15560,8 @@
         </p:blipFill>
         <p:spPr>
           <a:xfrm>
-            <a:off x="5352924" y="1005840"/>
-            <a:ext cx="3375913" cy="3749040"/>
+            <a:off x="5324495" y="1005840"/>
+            <a:ext cx="3432770" cy="3749040"/>
           </a:xfrm>
           <a:prstGeom prst="rect">
             <a:avLst/>
@@ -12373,8 +15692,8 @@
         </p:blipFill>
         <p:spPr>
           <a:xfrm>
-            <a:off x="457200" y="1097473"/>
-            <a:ext cx="5394960" cy="3657215"/>
+            <a:off x="457200" y="1097043"/>
+            <a:ext cx="5394960" cy="3658073"/>
           </a:xfrm>
           <a:prstGeom prst="rect">
             <a:avLst/>
@@ -12599,8 +15918,8 @@
         </p:blipFill>
         <p:spPr>
           <a:xfrm>
-            <a:off x="1371600" y="1051560"/>
-            <a:ext cx="6400800" cy="1920240"/>
+            <a:off x="1362741" y="1051560"/>
+            <a:ext cx="6418518" cy="1920240"/>
           </a:xfrm>
           <a:prstGeom prst="rect">
             <a:avLst/>
@@ -12920,10 +16239,10 @@
         <a:srgbClr val="B4561A"/>
       </a:accent4>
       <a:accent5>
-        <a:srgbClr val="7A8A96"/>
+        <a:srgbClr val="3F7D2A"/>
       </a:accent5>
       <a:accent6>
-        <a:srgbClr val="4CC9C0"/>
+        <a:srgbClr val="B02F6B"/>
       </a:accent6>
       <a:hlink>
         <a:srgbClr val="0B7A75"/>
